--- a/lecons/F3/37_FORM4_LESSON33_Other_Weather_Elements.pptx
+++ b/lecons/F3/37_FORM4_LESSON33_Other_Weather_Elements.pptx
@@ -50,9 +50,21 @@
     <p:sldId id="298" r:id="rId44"/>
     <p:sldId id="299" r:id="rId45"/>
     <p:sldId id="300" r:id="rId46"/>
+    <p:sldId id="301" r:id="rId47"/>
+    <p:sldId id="302" r:id="rId48"/>
+    <p:sldId id="303" r:id="rId49"/>
+    <p:sldId id="304" r:id="rId50"/>
+    <p:sldId id="305" r:id="rId51"/>
+    <p:sldId id="306" r:id="rId52"/>
+    <p:sldId id="307" r:id="rId53"/>
+    <p:sldId id="308" r:id="rId54"/>
+    <p:sldId id="309" r:id="rId55"/>
+    <p:sldId id="310" r:id="rId56"/>
+    <p:sldId id="311" r:id="rId57"/>
+    <p:sldId id="312" r:id="rId58"/>
   </p:sldIdLst>
   <p:notesMasterIdLst>
-    <p:notesMasterId r:id="rId47"/>
+    <p:notesMasterId r:id="rId59"/>
   </p:notesMasterIdLst>
   <p:sldSz cx="12192000" cy="6858000"/>
   <p:notesSz cx="6858000" cy="12192000"/>
@@ -634,7 +646,7 @@
           <a:p>
             <a:r>
               <a:rPr lang="en-US" dirty="0"/>
-              <a:t>Listen carefully to this situation from real life. In August, Hadja's washing takes a whole day to dry and the air feels heavy. In January, during the Harmattan, the same clothes dry in less than one hour. Think about it, because I am going to ask you some questions.</a:t>
+              <a:t>Listen carefully to this situation from real life. In August, Hadja's washing takes a whole day to dry and the air feels heavy. In January, during the Harmattan, the same clothes dry in less than one hour, and the wind comes from another direction. She asks: "What changes in the air between August and January, and how can we measure it?" Think about it, because I am going to ask you some questions.</a:t>
             </a:r>
             <a:endParaRPr lang="en-US" dirty="0"/>
           </a:p>
@@ -810,7 +822,7 @@
           <a:p>
             <a:r>
               <a:rPr lang="en-US" dirty="0"/>
-              <a:t>Good. Hadja does not know why clothes dry slowly in August.</a:t>
+              <a:t>Good. Hadja does not know which weather elements change and how they are measured.</a:t>
             </a:r>
             <a:endParaRPr lang="en-US" dirty="0"/>
           </a:p>
@@ -898,7 +910,7 @@
           <a:p>
             <a:r>
               <a:rPr lang="en-US" dirty="0"/>
-              <a:t>Question 2: When do clothes dry fast? Think for a moment, then raise your hand to answer.</a:t>
+              <a:t>Question 2: When do clothes dry slowly? Think for a moment, then raise your hand to answer.</a:t>
             </a:r>
             <a:endParaRPr lang="en-US" dirty="0"/>
           </a:p>
@@ -986,7 +998,7 @@
           <a:p>
             <a:r>
               <a:rPr lang="en-US" dirty="0"/>
-              <a:t>Good. In January, during the Harmattan.</a:t>
+              <a:t>Good. In August, in the rainy season.</a:t>
             </a:r>
             <a:endParaRPr lang="en-US" dirty="0"/>
           </a:p>
@@ -1074,7 +1086,7 @@
           <a:p>
             <a:r>
               <a:rPr lang="en-US" dirty="0"/>
-              <a:t>Question 3: Why? Think for a moment, then raise your hand to answer.</a:t>
+              <a:t>Question 3: Why do they dry fast in January? Think for a moment, then raise your hand to answer.</a:t>
             </a:r>
             <a:endParaRPr lang="en-US" dirty="0"/>
           </a:p>
@@ -1162,7 +1174,7 @@
           <a:p>
             <a:r>
               <a:rPr lang="en-US" dirty="0"/>
-              <a:t>Good. The air is dry: there is little water vapour.</a:t>
+              <a:t>Good. The Harmattan air is dry.</a:t>
             </a:r>
             <a:endParaRPr lang="en-US" dirty="0"/>
           </a:p>
@@ -1426,7 +1438,7 @@
           <a:p>
             <a:r>
               <a:rPr lang="en-US" dirty="0"/>
-              <a:t>Activity 1. Look carefully at this picture: clothes drying on a line. Observe every detail before I ask the question.</a:t>
+              <a:t>Activity 1. Look carefully at this picture: washing hung out to dry. Observe every detail before I ask the question.</a:t>
             </a:r>
             <a:endParaRPr lang="en-US" dirty="0"/>
           </a:p>
@@ -1690,7 +1702,7 @@
           <a:p>
             <a:r>
               <a:rPr lang="en-US" dirty="0"/>
-              <a:t>Let us check the answer together. The air already has a lot of water vapour (high humidity).</a:t>
+              <a:t>Let us check the answer together. The air already holds a lot of water vapour (high humidity).</a:t>
             </a:r>
             <a:endParaRPr lang="en-US" dirty="0"/>
           </a:p>
@@ -1778,7 +1790,7 @@
           <a:p>
             <a:r>
               <a:rPr lang="en-US" dirty="0"/>
-              <a:t>Activity 2. Look carefully at this picture: a windsock at an airport. Observe every detail before I ask the question.</a:t>
+              <a:t>Activity 2. Look carefully at this picture: a windsock at an airfield. Observe every detail before I ask the question.</a:t>
             </a:r>
             <a:endParaRPr lang="en-US" dirty="0"/>
           </a:p>
@@ -1866,7 +1878,7 @@
           <a:p>
             <a:r>
               <a:rPr lang="en-US" dirty="0"/>
-              <a:t>Here is the question for Activity 2: What does the windsock show? Why is it useful for pilots? Take one minute to think and write your answer in your rough notebook.</a:t>
+              <a:t>Here is the question for Activity 2: What does the windsock show? Take one minute to think and write your answer in your rough notebook.</a:t>
             </a:r>
             <a:endParaRPr lang="en-US" dirty="0"/>
           </a:p>
@@ -1954,7 +1966,7 @@
           <a:p>
             <a:r>
               <a:rPr lang="en-US" dirty="0"/>
-              <a:t>Let us check the answer together. The direction and the force of the wind. Planes take off against the wind.</a:t>
+              <a:t>Let us check the answer together. The direction (and the force) of the wind.</a:t>
             </a:r>
             <a:endParaRPr lang="en-US" dirty="0"/>
           </a:p>
@@ -2130,7 +2142,7 @@
           <a:p>
             <a:r>
               <a:rPr lang="en-US" dirty="0"/>
-              <a:t>Here is the question for Activity 3: What does a barometer measure? What if it falls quickly? Take one minute to think and write your answer in your rough notebook.</a:t>
+              <a:t>Here is the question for Activity 3: The barometer falls quickly. What weather can we expect? Take one minute to think and write your answer in your rough notebook.</a:t>
             </a:r>
             <a:endParaRPr lang="en-US" dirty="0"/>
           </a:p>
@@ -2218,7 +2230,7 @@
           <a:p>
             <a:r>
               <a:rPr lang="en-US" dirty="0"/>
-              <a:t>Let us check the answer together. Air pressure. A quick fall means rain or a storm.</a:t>
+              <a:t>Let us check the answer together. Rain or a storm.</a:t>
             </a:r>
             <a:endParaRPr lang="en-US" dirty="0"/>
           </a:p>
@@ -2394,7 +2406,7 @@
           <a:p>
             <a:r>
               <a:rPr lang="en-US" dirty="0"/>
-              <a:t>Let us copy Atmospheric Humidity. Humidity is explained as follows. On this slide we have Humidity and Measurement. Write each point on a new line, with the key term first, and explain it in your own words when we revise. When you finish, we go to the next slide.</a:t>
+              <a:t>Let us copy the definitions. The key terms of this lesson are defined as follows. On this slide we have Humidity. Write each point on a new line, with the key term first, and explain it in your own words when we revise. When you finish, we go to the next slide.</a:t>
             </a:r>
             <a:endParaRPr lang="en-US" dirty="0"/>
           </a:p>
@@ -2570,7 +2582,7 @@
           <a:p>
             <a:r>
               <a:rPr lang="en-US" dirty="0"/>
-              <a:t>We continue with Atmospheric Humidity. On this slide we have Example. Write each point on a new line, with the key term first, and explain it in your own words when we revise.</a:t>
+              <a:t>We continue with the definitions. On this slide we have Relative humidity and Wind. Write each point on a new line, with the key term first, and explain it in your own words when we revise. When you finish, we go to the next slide.</a:t>
             </a:r>
             <a:endParaRPr lang="en-US" dirty="0"/>
           </a:p>
@@ -2658,7 +2670,7 @@
           <a:p>
             <a:r>
               <a:rPr lang="en-US" dirty="0"/>
-              <a:t>Let us copy Wind. Wind is observed and measured as follows. On this slide we have Wind and Wind direction. Write each point on a new line, with the key term first, and explain it in your own words when we revise. When you finish, we go to the next slide.</a:t>
+              <a:t>We continue with the definitions. On this slide we have Atmospheric pressure. Write each point on a new line, with the key term first, and explain it in your own words when we revise.</a:t>
             </a:r>
             <a:endParaRPr lang="en-US" dirty="0"/>
           </a:p>
@@ -2746,7 +2758,7 @@
           <a:p>
             <a:r>
               <a:rPr lang="en-US" dirty="0"/>
-              <a:t>We continue with Wind. On this slide we have Wind speed. Write each point on a new line, with the key term first, and explain it in your own words when we revise.</a:t>
+              <a:t>Let us copy Atmospheric Humidity. Humidity is measured and varies as follows. Copy the point on Instrument on the left, then draw the diagram on the right: a hygrometer. Give it a title and label it clearly.</a:t>
             </a:r>
             <a:endParaRPr lang="en-US" dirty="0"/>
           </a:p>
@@ -2834,7 +2846,7 @@
           <a:p>
             <a:r>
               <a:rPr lang="en-US" dirty="0"/>
-              <a:t>Let us copy Pressure and Sunshine. Pressure and sunshine are measured as follows. On this slide we have Atmospheric pressure and Sunshine. Write each point on a new line, with the key term first, and explain it in your own words when we revise.</a:t>
+              <a:t>We continue with Atmospheric Humidity. On this slide we have Reading. Write each point on a new line, with the key term first, and explain it in your own words when we revise.</a:t>
             </a:r>
             <a:endParaRPr lang="en-US" dirty="0"/>
           </a:p>
@@ -2922,7 +2934,7 @@
           <a:p>
             <a:r>
               <a:rPr lang="en-US" dirty="0"/>
-              <a:t>Now let us check what you have understood. Question 1: What is humidity? Answer in your exercise book.</a:t>
+              <a:t>Copy the point on Temperature and humidity on the left, then draw the diagram on the right: warm air holds more water vapour. Give it a title and label it clearly.</a:t>
             </a:r>
             <a:endParaRPr lang="en-US" dirty="0"/>
           </a:p>
@@ -3010,7 +3022,7 @@
           <a:p>
             <a:r>
               <a:rPr lang="en-US" dirty="0"/>
-              <a:t>The expected answer is: the amount of water vapour in the air. If you got it right, well done.</a:t>
+              <a:t>We continue with Atmospheric Humidity. On this slide we have Example. Write each point on a new line, with the key term first, and explain it in your own words when we revise.</a:t>
             </a:r>
             <a:endParaRPr lang="en-US" dirty="0"/>
           </a:p>
@@ -3098,7 +3110,7 @@
           <a:p>
             <a:r>
               <a:rPr lang="en-US" dirty="0"/>
-              <a:t>Now let us check what you have understood. Question 2: The Harmattan blows from the north-east. What is its name as a wind direction? Answer in your exercise book.</a:t>
+              <a:t>Let us copy Wind Direction. Wind direction is observed as follows. On this slide we have Wind vane. Write each point on a new line, with the key term first, and explain it in your own words when we revise.</a:t>
             </a:r>
             <a:endParaRPr lang="en-US" dirty="0"/>
           </a:p>
@@ -3186,7 +3198,7 @@
           <a:p>
             <a:r>
               <a:rPr lang="en-US" dirty="0"/>
-              <a:t>The expected answer is: a north-easterly wind. If you got it right, well done.</a:t>
+              <a:t>Copy the point on Windsock on the left, then draw the diagram on the right: a windsock. Give it a title and label it clearly.</a:t>
             </a:r>
             <a:endParaRPr lang="en-US" dirty="0"/>
           </a:p>
@@ -3274,7 +3286,7 @@
           <a:p>
             <a:r>
               <a:rPr lang="en-US" dirty="0"/>
-              <a:t>For those who need more practice, fill in the blanks in your exercise book. The answers are: number 1, hygrometer; number 2, barometer; number 3, from.</a:t>
+              <a:t>We continue with Wind Direction. On this slide we have Naming winds and Wind rose. Write each point on a new line, with the key term first, and explain it in your own words when we revise.</a:t>
             </a:r>
             <a:endParaRPr lang="en-US" dirty="0"/>
           </a:p>
@@ -3362,7 +3374,7 @@
           <a:p>
             <a:r>
               <a:rPr lang="en-US" dirty="0"/>
-              <a:t>For your homework: Early tomorrow morning, look at the grass, leaves or cars near your house. Write down whether you see drops of water on them, and where you think the water came from. We shall correct it at the beginning of our next lesson.</a:t>
+              <a:t>Let us copy Wind Speed. Wind speed is measured as follows. Copy the point on Anemometer on the left, then draw the diagram on the right: an anemometer. Give it a title and label it clearly.</a:t>
             </a:r>
             <a:endParaRPr lang="en-US" dirty="0"/>
           </a:p>
@@ -3538,7 +3550,7 @@
           <a:p>
             <a:r>
               <a:rPr lang="en-US" dirty="0"/>
-              <a:t>Our next lesson will be on Lesson 34: Condensation. Thank you for your attention, and see you next time.</a:t>
+              <a:t>We continue with Wind Speed. On this slide we have Units and Beaufort scale. Write each point on a new line, with the key term first, and explain it in your own words when we revise.</a:t>
             </a:r>
             <a:endParaRPr lang="en-US" dirty="0"/>
           </a:p>
@@ -3626,7 +3638,7 @@
           <a:p>
             <a:r>
               <a:rPr lang="en-US" dirty="0"/>
-              <a:t>Let us play the bilingual game. I say a word in English, and you give me the French word. Then we do the reverse.</a:t>
+              <a:t>Let us copy Atmospheric Pressure. Air pressure is measured as follows. Copy the point on Barometer on the left, then draw the diagram on the right: a barometer. Give it a title and label it clearly.</a:t>
             </a:r>
             <a:endParaRPr lang="en-US" dirty="0"/>
           </a:p>
@@ -3714,7 +3726,7 @@
           <a:p>
             <a:r>
               <a:rPr lang="en-US" dirty="0"/>
-              <a:t>I record this information in the official logbook of the class after the lesson.</a:t>
+              <a:t>We continue with Atmospheric Pressure. On this slide we have Average value and Meaning of changes. Write each point on a new line, with the key term first, and explain it in your own words when we revise.</a:t>
             </a:r>
             <a:endParaRPr lang="en-US" dirty="0"/>
           </a:p>
@@ -3802,7 +3814,7 @@
           <a:p>
             <a:r>
               <a:rPr lang="en-US" dirty="0"/>
-              <a:t>I complete the second page of the logbook: the matter taught, the evaluation, the homework and the attendance.</a:t>
+              <a:t>Let us copy Amount of Sunshine. Sunshine is measured as follows. On this slide we have Sunshine recorder and Unit. Write each point on a new line, with the key term first, and explain it in your own words when we revise. When you finish, we go to the next slide.</a:t>
             </a:r>
             <a:endParaRPr lang="en-US" dirty="0"/>
           </a:p>
@@ -3890,7 +3902,7 @@
           <a:p>
             <a:r>
               <a:rPr lang="en-US" dirty="0"/>
-              <a:t>This slide is for me, the teacher: it gives the timing of the lesson and what to do if the projector is not available.</a:t>
+              <a:t>We continue with Amount of Sunshine. On this slide we have Example. Write each point on a new line, with the key term first, and explain it in your own words when we revise.</a:t>
             </a:r>
             <a:endParaRPr lang="en-US" dirty="0"/>
           </a:p>
@@ -3978,7 +3990,7 @@
           <a:p>
             <a:r>
               <a:rPr lang="en-US" dirty="0"/>
-              <a:t>These are the references and picture credits used to prepare this lesson.</a:t>
+              <a:t>Now let us check what you have understood. Question 1: What is humidity? Answer in your exercise book.</a:t>
             </a:r>
             <a:endParaRPr lang="en-US" dirty="0"/>
           </a:p>
@@ -4002,6 +4014,358 @@
             <a:fld id="{F7021451-1387-4CA6-816F-3879F97B5CBC}" type="slidenum">
               <a:rPr lang="en-US"/>
               <a:t>45</a:t>
+            </a:fld>
+            <a:endParaRPr lang="en-US"/>
+          </a:p>
+        </p:txBody>
+      </p:sp>
+    </p:spTree>
+    <p:extLst>
+      <p:ext uri="{BB962C8B-B14F-4D97-AF65-F5344CB8AC3E}">
+        <p14:creationId xmlns:p14="http://schemas.microsoft.com/office/powerpoint/2010/main" val="1024086991"/>
+      </p:ext>
+    </p:extLst>
+  </p:cSld>
+  <p:clrMapOvr>
+    <a:masterClrMapping/>
+  </p:clrMapOvr>
+</p:notes>
+</file>
+
+<file path=ppt/notesSlides/notesSlide46.xml><?xml version="1.0" encoding="utf-8"?>
+<p:notes xmlns:a="http://schemas.openxmlformats.org/drawingml/2006/main" xmlns:r="http://schemas.openxmlformats.org/officeDocument/2006/relationships" xmlns:p="http://schemas.openxmlformats.org/presentationml/2006/main">
+  <p:cSld>
+    <p:spTree>
+      <p:nvGrpSpPr>
+        <p:cNvPr id="1" name=""/>
+        <p:cNvGrpSpPr/>
+        <p:nvPr/>
+      </p:nvGrpSpPr>
+      <p:grpSpPr>
+        <a:xfrm>
+          <a:off x="0" y="0"/>
+          <a:ext cx="0" cy="0"/>
+          <a:chOff x="0" y="0"/>
+          <a:chExt cx="0" cy="0"/>
+        </a:xfrm>
+      </p:grpSpPr>
+      <p:sp>
+        <p:nvSpPr>
+          <p:cNvPr id="2" name="Slide Image Placeholder 1"/>
+          <p:cNvSpPr>
+            <a:spLocks noGrp="1" noRot="1" noChangeAspect="1"/>
+          </p:cNvSpPr>
+          <p:nvPr>
+            <p:ph type="sldImg"/>
+          </p:nvPr>
+        </p:nvSpPr>
+        <p:spPr/>
+      </p:sp>
+      <p:sp>
+        <p:nvSpPr>
+          <p:cNvPr id="3" name="Notes Placeholder 2"/>
+          <p:cNvSpPr>
+            <a:spLocks noGrp="1"/>
+          </p:cNvSpPr>
+          <p:nvPr>
+            <p:ph type="body" idx="1"/>
+          </p:nvPr>
+        </p:nvSpPr>
+        <p:spPr/>
+        <p:txBody>
+          <a:bodyPr/>
+          <a:lstStyle/>
+          <a:p>
+            <a:r>
+              <a:rPr lang="en-US" dirty="0"/>
+              <a:t>The expected answer is: the amount of water vapour in the air. If you got it right, well done.</a:t>
+            </a:r>
+            <a:endParaRPr lang="en-US" dirty="0"/>
+          </a:p>
+        </p:txBody>
+      </p:sp>
+      <p:sp>
+        <p:nvSpPr>
+          <p:cNvPr id="4" name="Slide Number Placeholder 3"/>
+          <p:cNvSpPr>
+            <a:spLocks noGrp="1"/>
+          </p:cNvSpPr>
+          <p:nvPr>
+            <p:ph type="sldNum" sz="quarter" idx="10"/>
+          </p:nvPr>
+        </p:nvSpPr>
+        <p:spPr/>
+        <p:txBody>
+          <a:bodyPr/>
+          <a:lstStyle/>
+          <a:p>
+            <a:fld id="{F7021451-1387-4CA6-816F-3879F97B5CBC}" type="slidenum">
+              <a:rPr lang="en-US"/>
+              <a:t>46</a:t>
+            </a:fld>
+            <a:endParaRPr lang="en-US"/>
+          </a:p>
+        </p:txBody>
+      </p:sp>
+    </p:spTree>
+    <p:extLst>
+      <p:ext uri="{BB962C8B-B14F-4D97-AF65-F5344CB8AC3E}">
+        <p14:creationId xmlns:p14="http://schemas.microsoft.com/office/powerpoint/2010/main" val="1024086991"/>
+      </p:ext>
+    </p:extLst>
+  </p:cSld>
+  <p:clrMapOvr>
+    <a:masterClrMapping/>
+  </p:clrMapOvr>
+</p:notes>
+</file>
+
+<file path=ppt/notesSlides/notesSlide47.xml><?xml version="1.0" encoding="utf-8"?>
+<p:notes xmlns:a="http://schemas.openxmlformats.org/drawingml/2006/main" xmlns:r="http://schemas.openxmlformats.org/officeDocument/2006/relationships" xmlns:p="http://schemas.openxmlformats.org/presentationml/2006/main">
+  <p:cSld>
+    <p:spTree>
+      <p:nvGrpSpPr>
+        <p:cNvPr id="1" name=""/>
+        <p:cNvGrpSpPr/>
+        <p:nvPr/>
+      </p:nvGrpSpPr>
+      <p:grpSpPr>
+        <a:xfrm>
+          <a:off x="0" y="0"/>
+          <a:ext cx="0" cy="0"/>
+          <a:chOff x="0" y="0"/>
+          <a:chExt cx="0" cy="0"/>
+        </a:xfrm>
+      </p:grpSpPr>
+      <p:sp>
+        <p:nvSpPr>
+          <p:cNvPr id="2" name="Slide Image Placeholder 1"/>
+          <p:cNvSpPr>
+            <a:spLocks noGrp="1" noRot="1" noChangeAspect="1"/>
+          </p:cNvSpPr>
+          <p:nvPr>
+            <p:ph type="sldImg"/>
+          </p:nvPr>
+        </p:nvSpPr>
+        <p:spPr/>
+      </p:sp>
+      <p:sp>
+        <p:nvSpPr>
+          <p:cNvPr id="3" name="Notes Placeholder 2"/>
+          <p:cNvSpPr>
+            <a:spLocks noGrp="1"/>
+          </p:cNvSpPr>
+          <p:nvPr>
+            <p:ph type="body" idx="1"/>
+          </p:nvPr>
+        </p:nvSpPr>
+        <p:spPr/>
+        <p:txBody>
+          <a:bodyPr/>
+          <a:lstStyle/>
+          <a:p>
+            <a:r>
+              <a:rPr lang="en-US" dirty="0"/>
+              <a:t>Now let us check what you have understood. Question 2: The Harmattan blows from the north-east. What is its name as a wind direction? Answer in your exercise book.</a:t>
+            </a:r>
+            <a:endParaRPr lang="en-US" dirty="0"/>
+          </a:p>
+        </p:txBody>
+      </p:sp>
+      <p:sp>
+        <p:nvSpPr>
+          <p:cNvPr id="4" name="Slide Number Placeholder 3"/>
+          <p:cNvSpPr>
+            <a:spLocks noGrp="1"/>
+          </p:cNvSpPr>
+          <p:nvPr>
+            <p:ph type="sldNum" sz="quarter" idx="10"/>
+          </p:nvPr>
+        </p:nvSpPr>
+        <p:spPr/>
+        <p:txBody>
+          <a:bodyPr/>
+          <a:lstStyle/>
+          <a:p>
+            <a:fld id="{F7021451-1387-4CA6-816F-3879F97B5CBC}" type="slidenum">
+              <a:rPr lang="en-US"/>
+              <a:t>47</a:t>
+            </a:fld>
+            <a:endParaRPr lang="en-US"/>
+          </a:p>
+        </p:txBody>
+      </p:sp>
+    </p:spTree>
+    <p:extLst>
+      <p:ext uri="{BB962C8B-B14F-4D97-AF65-F5344CB8AC3E}">
+        <p14:creationId xmlns:p14="http://schemas.microsoft.com/office/powerpoint/2010/main" val="1024086991"/>
+      </p:ext>
+    </p:extLst>
+  </p:cSld>
+  <p:clrMapOvr>
+    <a:masterClrMapping/>
+  </p:clrMapOvr>
+</p:notes>
+</file>
+
+<file path=ppt/notesSlides/notesSlide48.xml><?xml version="1.0" encoding="utf-8"?>
+<p:notes xmlns:a="http://schemas.openxmlformats.org/drawingml/2006/main" xmlns:r="http://schemas.openxmlformats.org/officeDocument/2006/relationships" xmlns:p="http://schemas.openxmlformats.org/presentationml/2006/main">
+  <p:cSld>
+    <p:spTree>
+      <p:nvGrpSpPr>
+        <p:cNvPr id="1" name=""/>
+        <p:cNvGrpSpPr/>
+        <p:nvPr/>
+      </p:nvGrpSpPr>
+      <p:grpSpPr>
+        <a:xfrm>
+          <a:off x="0" y="0"/>
+          <a:ext cx="0" cy="0"/>
+          <a:chOff x="0" y="0"/>
+          <a:chExt cx="0" cy="0"/>
+        </a:xfrm>
+      </p:grpSpPr>
+      <p:sp>
+        <p:nvSpPr>
+          <p:cNvPr id="2" name="Slide Image Placeholder 1"/>
+          <p:cNvSpPr>
+            <a:spLocks noGrp="1" noRot="1" noChangeAspect="1"/>
+          </p:cNvSpPr>
+          <p:nvPr>
+            <p:ph type="sldImg"/>
+          </p:nvPr>
+        </p:nvSpPr>
+        <p:spPr/>
+      </p:sp>
+      <p:sp>
+        <p:nvSpPr>
+          <p:cNvPr id="3" name="Notes Placeholder 2"/>
+          <p:cNvSpPr>
+            <a:spLocks noGrp="1"/>
+          </p:cNvSpPr>
+          <p:nvPr>
+            <p:ph type="body" idx="1"/>
+          </p:nvPr>
+        </p:nvSpPr>
+        <p:spPr/>
+        <p:txBody>
+          <a:bodyPr/>
+          <a:lstStyle/>
+          <a:p>
+            <a:r>
+              <a:rPr lang="en-US" dirty="0"/>
+              <a:t>The expected answer is: a north-easterly wind. If you got it right, well done.</a:t>
+            </a:r>
+            <a:endParaRPr lang="en-US" dirty="0"/>
+          </a:p>
+        </p:txBody>
+      </p:sp>
+      <p:sp>
+        <p:nvSpPr>
+          <p:cNvPr id="4" name="Slide Number Placeholder 3"/>
+          <p:cNvSpPr>
+            <a:spLocks noGrp="1"/>
+          </p:cNvSpPr>
+          <p:nvPr>
+            <p:ph type="sldNum" sz="quarter" idx="10"/>
+          </p:nvPr>
+        </p:nvSpPr>
+        <p:spPr/>
+        <p:txBody>
+          <a:bodyPr/>
+          <a:lstStyle/>
+          <a:p>
+            <a:fld id="{F7021451-1387-4CA6-816F-3879F97B5CBC}" type="slidenum">
+              <a:rPr lang="en-US"/>
+              <a:t>48</a:t>
+            </a:fld>
+            <a:endParaRPr lang="en-US"/>
+          </a:p>
+        </p:txBody>
+      </p:sp>
+    </p:spTree>
+    <p:extLst>
+      <p:ext uri="{BB962C8B-B14F-4D97-AF65-F5344CB8AC3E}">
+        <p14:creationId xmlns:p14="http://schemas.microsoft.com/office/powerpoint/2010/main" val="1024086991"/>
+      </p:ext>
+    </p:extLst>
+  </p:cSld>
+  <p:clrMapOvr>
+    <a:masterClrMapping/>
+  </p:clrMapOvr>
+</p:notes>
+</file>
+
+<file path=ppt/notesSlides/notesSlide49.xml><?xml version="1.0" encoding="utf-8"?>
+<p:notes xmlns:a="http://schemas.openxmlformats.org/drawingml/2006/main" xmlns:r="http://schemas.openxmlformats.org/officeDocument/2006/relationships" xmlns:p="http://schemas.openxmlformats.org/presentationml/2006/main">
+  <p:cSld>
+    <p:spTree>
+      <p:nvGrpSpPr>
+        <p:cNvPr id="1" name=""/>
+        <p:cNvGrpSpPr/>
+        <p:nvPr/>
+      </p:nvGrpSpPr>
+      <p:grpSpPr>
+        <a:xfrm>
+          <a:off x="0" y="0"/>
+          <a:ext cx="0" cy="0"/>
+          <a:chOff x="0" y="0"/>
+          <a:chExt cx="0" cy="0"/>
+        </a:xfrm>
+      </p:grpSpPr>
+      <p:sp>
+        <p:nvSpPr>
+          <p:cNvPr id="2" name="Slide Image Placeholder 1"/>
+          <p:cNvSpPr>
+            <a:spLocks noGrp="1" noRot="1" noChangeAspect="1"/>
+          </p:cNvSpPr>
+          <p:nvPr>
+            <p:ph type="sldImg"/>
+          </p:nvPr>
+        </p:nvSpPr>
+        <p:spPr/>
+      </p:sp>
+      <p:sp>
+        <p:nvSpPr>
+          <p:cNvPr id="3" name="Notes Placeholder 2"/>
+          <p:cNvSpPr>
+            <a:spLocks noGrp="1"/>
+          </p:cNvSpPr>
+          <p:nvPr>
+            <p:ph type="body" idx="1"/>
+          </p:nvPr>
+        </p:nvSpPr>
+        <p:spPr/>
+        <p:txBody>
+          <a:bodyPr/>
+          <a:lstStyle/>
+          <a:p>
+            <a:r>
+              <a:rPr lang="en-US" dirty="0"/>
+              <a:t>For those who need more practice, fill in the blanks in your exercise book. The answers are: number 1, hygrometer; number 2, barometer; number 3, from.</a:t>
+            </a:r>
+            <a:endParaRPr lang="en-US" dirty="0"/>
+          </a:p>
+        </p:txBody>
+      </p:sp>
+      <p:sp>
+        <p:nvSpPr>
+          <p:cNvPr id="4" name="Slide Number Placeholder 3"/>
+          <p:cNvSpPr>
+            <a:spLocks noGrp="1"/>
+          </p:cNvSpPr>
+          <p:nvPr>
+            <p:ph type="sldNum" sz="quarter" idx="10"/>
+          </p:nvPr>
+        </p:nvSpPr>
+        <p:spPr/>
+        <p:txBody>
+          <a:bodyPr/>
+          <a:lstStyle/>
+          <a:p>
+            <a:fld id="{F7021451-1387-4CA6-816F-3879F97B5CBC}" type="slidenum">
+              <a:rPr lang="en-US"/>
+              <a:t>49</a:t>
             </a:fld>
             <a:endParaRPr lang="en-US"/>
           </a:p>
@@ -4090,6 +4454,710 @@
             <a:fld id="{F7021451-1387-4CA6-816F-3879F97B5CBC}" type="slidenum">
               <a:rPr lang="en-US"/>
               <a:t>5</a:t>
+            </a:fld>
+            <a:endParaRPr lang="en-US"/>
+          </a:p>
+        </p:txBody>
+      </p:sp>
+    </p:spTree>
+    <p:extLst>
+      <p:ext uri="{BB962C8B-B14F-4D97-AF65-F5344CB8AC3E}">
+        <p14:creationId xmlns:p14="http://schemas.microsoft.com/office/powerpoint/2010/main" val="1024086991"/>
+      </p:ext>
+    </p:extLst>
+  </p:cSld>
+  <p:clrMapOvr>
+    <a:masterClrMapping/>
+  </p:clrMapOvr>
+</p:notes>
+</file>
+
+<file path=ppt/notesSlides/notesSlide50.xml><?xml version="1.0" encoding="utf-8"?>
+<p:notes xmlns:a="http://schemas.openxmlformats.org/drawingml/2006/main" xmlns:r="http://schemas.openxmlformats.org/officeDocument/2006/relationships" xmlns:p="http://schemas.openxmlformats.org/presentationml/2006/main">
+  <p:cSld>
+    <p:spTree>
+      <p:nvGrpSpPr>
+        <p:cNvPr id="1" name=""/>
+        <p:cNvGrpSpPr/>
+        <p:nvPr/>
+      </p:nvGrpSpPr>
+      <p:grpSpPr>
+        <a:xfrm>
+          <a:off x="0" y="0"/>
+          <a:ext cx="0" cy="0"/>
+          <a:chOff x="0" y="0"/>
+          <a:chExt cx="0" cy="0"/>
+        </a:xfrm>
+      </p:grpSpPr>
+      <p:sp>
+        <p:nvSpPr>
+          <p:cNvPr id="2" name="Slide Image Placeholder 1"/>
+          <p:cNvSpPr>
+            <a:spLocks noGrp="1" noRot="1" noChangeAspect="1"/>
+          </p:cNvSpPr>
+          <p:nvPr>
+            <p:ph type="sldImg"/>
+          </p:nvPr>
+        </p:nvSpPr>
+        <p:spPr/>
+      </p:sp>
+      <p:sp>
+        <p:nvSpPr>
+          <p:cNvPr id="3" name="Notes Placeholder 2"/>
+          <p:cNvSpPr>
+            <a:spLocks noGrp="1"/>
+          </p:cNvSpPr>
+          <p:nvPr>
+            <p:ph type="body" idx="1"/>
+          </p:nvPr>
+        </p:nvSpPr>
+        <p:spPr/>
+        <p:txBody>
+          <a:bodyPr/>
+          <a:lstStyle/>
+          <a:p>
+            <a:r>
+              <a:rPr lang="en-US" dirty="0"/>
+              <a:t>For your homework: Early tomorrow morning, look at the grass, leaves or cars near your house. Write down whether you see drops of water on them, and where you think the water came from. We shall correct it at the beginning of our next lesson.</a:t>
+            </a:r>
+            <a:endParaRPr lang="en-US" dirty="0"/>
+          </a:p>
+        </p:txBody>
+      </p:sp>
+      <p:sp>
+        <p:nvSpPr>
+          <p:cNvPr id="4" name="Slide Number Placeholder 3"/>
+          <p:cNvSpPr>
+            <a:spLocks noGrp="1"/>
+          </p:cNvSpPr>
+          <p:nvPr>
+            <p:ph type="sldNum" sz="quarter" idx="10"/>
+          </p:nvPr>
+        </p:nvSpPr>
+        <p:spPr/>
+        <p:txBody>
+          <a:bodyPr/>
+          <a:lstStyle/>
+          <a:p>
+            <a:fld id="{F7021451-1387-4CA6-816F-3879F97B5CBC}" type="slidenum">
+              <a:rPr lang="en-US"/>
+              <a:t>50</a:t>
+            </a:fld>
+            <a:endParaRPr lang="en-US"/>
+          </a:p>
+        </p:txBody>
+      </p:sp>
+    </p:spTree>
+    <p:extLst>
+      <p:ext uri="{BB962C8B-B14F-4D97-AF65-F5344CB8AC3E}">
+        <p14:creationId xmlns:p14="http://schemas.microsoft.com/office/powerpoint/2010/main" val="1024086991"/>
+      </p:ext>
+    </p:extLst>
+  </p:cSld>
+  <p:clrMapOvr>
+    <a:masterClrMapping/>
+  </p:clrMapOvr>
+</p:notes>
+</file>
+
+<file path=ppt/notesSlides/notesSlide51.xml><?xml version="1.0" encoding="utf-8"?>
+<p:notes xmlns:a="http://schemas.openxmlformats.org/drawingml/2006/main" xmlns:r="http://schemas.openxmlformats.org/officeDocument/2006/relationships" xmlns:p="http://schemas.openxmlformats.org/presentationml/2006/main">
+  <p:cSld>
+    <p:spTree>
+      <p:nvGrpSpPr>
+        <p:cNvPr id="1" name=""/>
+        <p:cNvGrpSpPr/>
+        <p:nvPr/>
+      </p:nvGrpSpPr>
+      <p:grpSpPr>
+        <a:xfrm>
+          <a:off x="0" y="0"/>
+          <a:ext cx="0" cy="0"/>
+          <a:chOff x="0" y="0"/>
+          <a:chExt cx="0" cy="0"/>
+        </a:xfrm>
+      </p:grpSpPr>
+      <p:sp>
+        <p:nvSpPr>
+          <p:cNvPr id="2" name="Slide Image Placeholder 1"/>
+          <p:cNvSpPr>
+            <a:spLocks noGrp="1" noRot="1" noChangeAspect="1"/>
+          </p:cNvSpPr>
+          <p:nvPr>
+            <p:ph type="sldImg"/>
+          </p:nvPr>
+        </p:nvSpPr>
+        <p:spPr/>
+      </p:sp>
+      <p:sp>
+        <p:nvSpPr>
+          <p:cNvPr id="3" name="Notes Placeholder 2"/>
+          <p:cNvSpPr>
+            <a:spLocks noGrp="1"/>
+          </p:cNvSpPr>
+          <p:nvPr>
+            <p:ph type="body" idx="1"/>
+          </p:nvPr>
+        </p:nvSpPr>
+        <p:spPr/>
+        <p:txBody>
+          <a:bodyPr/>
+          <a:lstStyle/>
+          <a:p>
+            <a:r>
+              <a:rPr lang="en-US" dirty="0"/>
+              <a:t>Our next lesson will be on Lesson 34: Condensation. Thank you for your attention, and see you next time.</a:t>
+            </a:r>
+            <a:endParaRPr lang="en-US" dirty="0"/>
+          </a:p>
+        </p:txBody>
+      </p:sp>
+      <p:sp>
+        <p:nvSpPr>
+          <p:cNvPr id="4" name="Slide Number Placeholder 3"/>
+          <p:cNvSpPr>
+            <a:spLocks noGrp="1"/>
+          </p:cNvSpPr>
+          <p:nvPr>
+            <p:ph type="sldNum" sz="quarter" idx="10"/>
+          </p:nvPr>
+        </p:nvSpPr>
+        <p:spPr/>
+        <p:txBody>
+          <a:bodyPr/>
+          <a:lstStyle/>
+          <a:p>
+            <a:fld id="{F7021451-1387-4CA6-816F-3879F97B5CBC}" type="slidenum">
+              <a:rPr lang="en-US"/>
+              <a:t>51</a:t>
+            </a:fld>
+            <a:endParaRPr lang="en-US"/>
+          </a:p>
+        </p:txBody>
+      </p:sp>
+    </p:spTree>
+    <p:extLst>
+      <p:ext uri="{BB962C8B-B14F-4D97-AF65-F5344CB8AC3E}">
+        <p14:creationId xmlns:p14="http://schemas.microsoft.com/office/powerpoint/2010/main" val="1024086991"/>
+      </p:ext>
+    </p:extLst>
+  </p:cSld>
+  <p:clrMapOvr>
+    <a:masterClrMapping/>
+  </p:clrMapOvr>
+</p:notes>
+</file>
+
+<file path=ppt/notesSlides/notesSlide52.xml><?xml version="1.0" encoding="utf-8"?>
+<p:notes xmlns:a="http://schemas.openxmlformats.org/drawingml/2006/main" xmlns:r="http://schemas.openxmlformats.org/officeDocument/2006/relationships" xmlns:p="http://schemas.openxmlformats.org/presentationml/2006/main">
+  <p:cSld>
+    <p:spTree>
+      <p:nvGrpSpPr>
+        <p:cNvPr id="1" name=""/>
+        <p:cNvGrpSpPr/>
+        <p:nvPr/>
+      </p:nvGrpSpPr>
+      <p:grpSpPr>
+        <a:xfrm>
+          <a:off x="0" y="0"/>
+          <a:ext cx="0" cy="0"/>
+          <a:chOff x="0" y="0"/>
+          <a:chExt cx="0" cy="0"/>
+        </a:xfrm>
+      </p:grpSpPr>
+      <p:sp>
+        <p:nvSpPr>
+          <p:cNvPr id="2" name="Slide Image Placeholder 1"/>
+          <p:cNvSpPr>
+            <a:spLocks noGrp="1" noRot="1" noChangeAspect="1"/>
+          </p:cNvSpPr>
+          <p:nvPr>
+            <p:ph type="sldImg"/>
+          </p:nvPr>
+        </p:nvSpPr>
+        <p:spPr/>
+      </p:sp>
+      <p:sp>
+        <p:nvSpPr>
+          <p:cNvPr id="3" name="Notes Placeholder 2"/>
+          <p:cNvSpPr>
+            <a:spLocks noGrp="1"/>
+          </p:cNvSpPr>
+          <p:nvPr>
+            <p:ph type="body" idx="1"/>
+          </p:nvPr>
+        </p:nvSpPr>
+        <p:spPr/>
+        <p:txBody>
+          <a:bodyPr/>
+          <a:lstStyle/>
+          <a:p>
+            <a:r>
+              <a:rPr lang="en-US" dirty="0"/>
+              <a:t>Let us play the bilingual game. I say a word in English, and you give me the French word. Then we do the reverse.</a:t>
+            </a:r>
+            <a:endParaRPr lang="en-US" dirty="0"/>
+          </a:p>
+        </p:txBody>
+      </p:sp>
+      <p:sp>
+        <p:nvSpPr>
+          <p:cNvPr id="4" name="Slide Number Placeholder 3"/>
+          <p:cNvSpPr>
+            <a:spLocks noGrp="1"/>
+          </p:cNvSpPr>
+          <p:nvPr>
+            <p:ph type="sldNum" sz="quarter" idx="10"/>
+          </p:nvPr>
+        </p:nvSpPr>
+        <p:spPr/>
+        <p:txBody>
+          <a:bodyPr/>
+          <a:lstStyle/>
+          <a:p>
+            <a:fld id="{F7021451-1387-4CA6-816F-3879F97B5CBC}" type="slidenum">
+              <a:rPr lang="en-US"/>
+              <a:t>52</a:t>
+            </a:fld>
+            <a:endParaRPr lang="en-US"/>
+          </a:p>
+        </p:txBody>
+      </p:sp>
+    </p:spTree>
+    <p:extLst>
+      <p:ext uri="{BB962C8B-B14F-4D97-AF65-F5344CB8AC3E}">
+        <p14:creationId xmlns:p14="http://schemas.microsoft.com/office/powerpoint/2010/main" val="1024086991"/>
+      </p:ext>
+    </p:extLst>
+  </p:cSld>
+  <p:clrMapOvr>
+    <a:masterClrMapping/>
+  </p:clrMapOvr>
+</p:notes>
+</file>
+
+<file path=ppt/notesSlides/notesSlide53.xml><?xml version="1.0" encoding="utf-8"?>
+<p:notes xmlns:a="http://schemas.openxmlformats.org/drawingml/2006/main" xmlns:r="http://schemas.openxmlformats.org/officeDocument/2006/relationships" xmlns:p="http://schemas.openxmlformats.org/presentationml/2006/main">
+  <p:cSld>
+    <p:spTree>
+      <p:nvGrpSpPr>
+        <p:cNvPr id="1" name=""/>
+        <p:cNvGrpSpPr/>
+        <p:nvPr/>
+      </p:nvGrpSpPr>
+      <p:grpSpPr>
+        <a:xfrm>
+          <a:off x="0" y="0"/>
+          <a:ext cx="0" cy="0"/>
+          <a:chOff x="0" y="0"/>
+          <a:chExt cx="0" cy="0"/>
+        </a:xfrm>
+      </p:grpSpPr>
+      <p:sp>
+        <p:nvSpPr>
+          <p:cNvPr id="2" name="Slide Image Placeholder 1"/>
+          <p:cNvSpPr>
+            <a:spLocks noGrp="1" noRot="1" noChangeAspect="1"/>
+          </p:cNvSpPr>
+          <p:nvPr>
+            <p:ph type="sldImg"/>
+          </p:nvPr>
+        </p:nvSpPr>
+        <p:spPr/>
+      </p:sp>
+      <p:sp>
+        <p:nvSpPr>
+          <p:cNvPr id="3" name="Notes Placeholder 2"/>
+          <p:cNvSpPr>
+            <a:spLocks noGrp="1"/>
+          </p:cNvSpPr>
+          <p:nvPr>
+            <p:ph type="body" idx="1"/>
+          </p:nvPr>
+        </p:nvSpPr>
+        <p:spPr/>
+        <p:txBody>
+          <a:bodyPr/>
+          <a:lstStyle/>
+          <a:p>
+            <a:r>
+              <a:rPr lang="en-US" dirty="0"/>
+              <a:t>I record this information in the official logbook of the class after the lesson.</a:t>
+            </a:r>
+            <a:endParaRPr lang="en-US" dirty="0"/>
+          </a:p>
+        </p:txBody>
+      </p:sp>
+      <p:sp>
+        <p:nvSpPr>
+          <p:cNvPr id="4" name="Slide Number Placeholder 3"/>
+          <p:cNvSpPr>
+            <a:spLocks noGrp="1"/>
+          </p:cNvSpPr>
+          <p:nvPr>
+            <p:ph type="sldNum" sz="quarter" idx="10"/>
+          </p:nvPr>
+        </p:nvSpPr>
+        <p:spPr/>
+        <p:txBody>
+          <a:bodyPr/>
+          <a:lstStyle/>
+          <a:p>
+            <a:fld id="{F7021451-1387-4CA6-816F-3879F97B5CBC}" type="slidenum">
+              <a:rPr lang="en-US"/>
+              <a:t>53</a:t>
+            </a:fld>
+            <a:endParaRPr lang="en-US"/>
+          </a:p>
+        </p:txBody>
+      </p:sp>
+    </p:spTree>
+    <p:extLst>
+      <p:ext uri="{BB962C8B-B14F-4D97-AF65-F5344CB8AC3E}">
+        <p14:creationId xmlns:p14="http://schemas.microsoft.com/office/powerpoint/2010/main" val="1024086991"/>
+      </p:ext>
+    </p:extLst>
+  </p:cSld>
+  <p:clrMapOvr>
+    <a:masterClrMapping/>
+  </p:clrMapOvr>
+</p:notes>
+</file>
+
+<file path=ppt/notesSlides/notesSlide54.xml><?xml version="1.0" encoding="utf-8"?>
+<p:notes xmlns:a="http://schemas.openxmlformats.org/drawingml/2006/main" xmlns:r="http://schemas.openxmlformats.org/officeDocument/2006/relationships" xmlns:p="http://schemas.openxmlformats.org/presentationml/2006/main">
+  <p:cSld>
+    <p:spTree>
+      <p:nvGrpSpPr>
+        <p:cNvPr id="1" name=""/>
+        <p:cNvGrpSpPr/>
+        <p:nvPr/>
+      </p:nvGrpSpPr>
+      <p:grpSpPr>
+        <a:xfrm>
+          <a:off x="0" y="0"/>
+          <a:ext cx="0" cy="0"/>
+          <a:chOff x="0" y="0"/>
+          <a:chExt cx="0" cy="0"/>
+        </a:xfrm>
+      </p:grpSpPr>
+      <p:sp>
+        <p:nvSpPr>
+          <p:cNvPr id="2" name="Slide Image Placeholder 1"/>
+          <p:cNvSpPr>
+            <a:spLocks noGrp="1" noRot="1" noChangeAspect="1"/>
+          </p:cNvSpPr>
+          <p:nvPr>
+            <p:ph type="sldImg"/>
+          </p:nvPr>
+        </p:nvSpPr>
+        <p:spPr/>
+      </p:sp>
+      <p:sp>
+        <p:nvSpPr>
+          <p:cNvPr id="3" name="Notes Placeholder 2"/>
+          <p:cNvSpPr>
+            <a:spLocks noGrp="1"/>
+          </p:cNvSpPr>
+          <p:nvPr>
+            <p:ph type="body" idx="1"/>
+          </p:nvPr>
+        </p:nvSpPr>
+        <p:spPr/>
+        <p:txBody>
+          <a:bodyPr/>
+          <a:lstStyle/>
+          <a:p>
+            <a:r>
+              <a:rPr lang="en-US" dirty="0"/>
+              <a:t>I complete the second page of the logbook: the matter taught, the evaluation, the homework and the attendance.</a:t>
+            </a:r>
+            <a:endParaRPr lang="en-US" dirty="0"/>
+          </a:p>
+        </p:txBody>
+      </p:sp>
+      <p:sp>
+        <p:nvSpPr>
+          <p:cNvPr id="4" name="Slide Number Placeholder 3"/>
+          <p:cNvSpPr>
+            <a:spLocks noGrp="1"/>
+          </p:cNvSpPr>
+          <p:nvPr>
+            <p:ph type="sldNum" sz="quarter" idx="10"/>
+          </p:nvPr>
+        </p:nvSpPr>
+        <p:spPr/>
+        <p:txBody>
+          <a:bodyPr/>
+          <a:lstStyle/>
+          <a:p>
+            <a:fld id="{F7021451-1387-4CA6-816F-3879F97B5CBC}" type="slidenum">
+              <a:rPr lang="en-US"/>
+              <a:t>54</a:t>
+            </a:fld>
+            <a:endParaRPr lang="en-US"/>
+          </a:p>
+        </p:txBody>
+      </p:sp>
+    </p:spTree>
+    <p:extLst>
+      <p:ext uri="{BB962C8B-B14F-4D97-AF65-F5344CB8AC3E}">
+        <p14:creationId xmlns:p14="http://schemas.microsoft.com/office/powerpoint/2010/main" val="1024086991"/>
+      </p:ext>
+    </p:extLst>
+  </p:cSld>
+  <p:clrMapOvr>
+    <a:masterClrMapping/>
+  </p:clrMapOvr>
+</p:notes>
+</file>
+
+<file path=ppt/notesSlides/notesSlide55.xml><?xml version="1.0" encoding="utf-8"?>
+<p:notes xmlns:a="http://schemas.openxmlformats.org/drawingml/2006/main" xmlns:r="http://schemas.openxmlformats.org/officeDocument/2006/relationships" xmlns:p="http://schemas.openxmlformats.org/presentationml/2006/main">
+  <p:cSld>
+    <p:spTree>
+      <p:nvGrpSpPr>
+        <p:cNvPr id="1" name=""/>
+        <p:cNvGrpSpPr/>
+        <p:nvPr/>
+      </p:nvGrpSpPr>
+      <p:grpSpPr>
+        <a:xfrm>
+          <a:off x="0" y="0"/>
+          <a:ext cx="0" cy="0"/>
+          <a:chOff x="0" y="0"/>
+          <a:chExt cx="0" cy="0"/>
+        </a:xfrm>
+      </p:grpSpPr>
+      <p:sp>
+        <p:nvSpPr>
+          <p:cNvPr id="2" name="Slide Image Placeholder 1"/>
+          <p:cNvSpPr>
+            <a:spLocks noGrp="1" noRot="1" noChangeAspect="1"/>
+          </p:cNvSpPr>
+          <p:nvPr>
+            <p:ph type="sldImg"/>
+          </p:nvPr>
+        </p:nvSpPr>
+        <p:spPr/>
+      </p:sp>
+      <p:sp>
+        <p:nvSpPr>
+          <p:cNvPr id="3" name="Notes Placeholder 2"/>
+          <p:cNvSpPr>
+            <a:spLocks noGrp="1"/>
+          </p:cNvSpPr>
+          <p:nvPr>
+            <p:ph type="body" idx="1"/>
+          </p:nvPr>
+        </p:nvSpPr>
+        <p:spPr/>
+        <p:txBody>
+          <a:bodyPr/>
+          <a:lstStyle/>
+          <a:p>
+            <a:r>
+              <a:rPr lang="en-US" dirty="0"/>
+              <a:t>This slide is for me, the teacher: it gives the timing of the lesson and what to do if the projector is not available.</a:t>
+            </a:r>
+            <a:endParaRPr lang="en-US" dirty="0"/>
+          </a:p>
+        </p:txBody>
+      </p:sp>
+      <p:sp>
+        <p:nvSpPr>
+          <p:cNvPr id="4" name="Slide Number Placeholder 3"/>
+          <p:cNvSpPr>
+            <a:spLocks noGrp="1"/>
+          </p:cNvSpPr>
+          <p:nvPr>
+            <p:ph type="sldNum" sz="quarter" idx="10"/>
+          </p:nvPr>
+        </p:nvSpPr>
+        <p:spPr/>
+        <p:txBody>
+          <a:bodyPr/>
+          <a:lstStyle/>
+          <a:p>
+            <a:fld id="{F7021451-1387-4CA6-816F-3879F97B5CBC}" type="slidenum">
+              <a:rPr lang="en-US"/>
+              <a:t>55</a:t>
+            </a:fld>
+            <a:endParaRPr lang="en-US"/>
+          </a:p>
+        </p:txBody>
+      </p:sp>
+    </p:spTree>
+    <p:extLst>
+      <p:ext uri="{BB962C8B-B14F-4D97-AF65-F5344CB8AC3E}">
+        <p14:creationId xmlns:p14="http://schemas.microsoft.com/office/powerpoint/2010/main" val="1024086991"/>
+      </p:ext>
+    </p:extLst>
+  </p:cSld>
+  <p:clrMapOvr>
+    <a:masterClrMapping/>
+  </p:clrMapOvr>
+</p:notes>
+</file>
+
+<file path=ppt/notesSlides/notesSlide56.xml><?xml version="1.0" encoding="utf-8"?>
+<p:notes xmlns:a="http://schemas.openxmlformats.org/drawingml/2006/main" xmlns:r="http://schemas.openxmlformats.org/officeDocument/2006/relationships" xmlns:p="http://schemas.openxmlformats.org/presentationml/2006/main">
+  <p:cSld>
+    <p:spTree>
+      <p:nvGrpSpPr>
+        <p:cNvPr id="1" name=""/>
+        <p:cNvGrpSpPr/>
+        <p:nvPr/>
+      </p:nvGrpSpPr>
+      <p:grpSpPr>
+        <a:xfrm>
+          <a:off x="0" y="0"/>
+          <a:ext cx="0" cy="0"/>
+          <a:chOff x="0" y="0"/>
+          <a:chExt cx="0" cy="0"/>
+        </a:xfrm>
+      </p:grpSpPr>
+      <p:sp>
+        <p:nvSpPr>
+          <p:cNvPr id="2" name="Slide Image Placeholder 1"/>
+          <p:cNvSpPr>
+            <a:spLocks noGrp="1" noRot="1" noChangeAspect="1"/>
+          </p:cNvSpPr>
+          <p:nvPr>
+            <p:ph type="sldImg"/>
+          </p:nvPr>
+        </p:nvSpPr>
+        <p:spPr/>
+      </p:sp>
+      <p:sp>
+        <p:nvSpPr>
+          <p:cNvPr id="3" name="Notes Placeholder 2"/>
+          <p:cNvSpPr>
+            <a:spLocks noGrp="1"/>
+          </p:cNvSpPr>
+          <p:nvPr>
+            <p:ph type="body" idx="1"/>
+          </p:nvPr>
+        </p:nvSpPr>
+        <p:spPr/>
+        <p:txBody>
+          <a:bodyPr/>
+          <a:lstStyle/>
+          <a:p>
+            <a:r>
+              <a:rPr lang="en-US" dirty="0"/>
+              <a:t>Take your time to copy this part; we will continue together.</a:t>
+            </a:r>
+            <a:endParaRPr lang="en-US" dirty="0"/>
+          </a:p>
+        </p:txBody>
+      </p:sp>
+      <p:sp>
+        <p:nvSpPr>
+          <p:cNvPr id="4" name="Slide Number Placeholder 3"/>
+          <p:cNvSpPr>
+            <a:spLocks noGrp="1"/>
+          </p:cNvSpPr>
+          <p:nvPr>
+            <p:ph type="sldNum" sz="quarter" idx="10"/>
+          </p:nvPr>
+        </p:nvSpPr>
+        <p:spPr/>
+        <p:txBody>
+          <a:bodyPr/>
+          <a:lstStyle/>
+          <a:p>
+            <a:fld id="{F7021451-1387-4CA6-816F-3879F97B5CBC}" type="slidenum">
+              <a:rPr lang="en-US"/>
+              <a:t>56</a:t>
+            </a:fld>
+            <a:endParaRPr lang="en-US"/>
+          </a:p>
+        </p:txBody>
+      </p:sp>
+    </p:spTree>
+    <p:extLst>
+      <p:ext uri="{BB962C8B-B14F-4D97-AF65-F5344CB8AC3E}">
+        <p14:creationId xmlns:p14="http://schemas.microsoft.com/office/powerpoint/2010/main" val="1024086991"/>
+      </p:ext>
+    </p:extLst>
+  </p:cSld>
+  <p:clrMapOvr>
+    <a:masterClrMapping/>
+  </p:clrMapOvr>
+</p:notes>
+</file>
+
+<file path=ppt/notesSlides/notesSlide57.xml><?xml version="1.0" encoding="utf-8"?>
+<p:notes xmlns:a="http://schemas.openxmlformats.org/drawingml/2006/main" xmlns:r="http://schemas.openxmlformats.org/officeDocument/2006/relationships" xmlns:p="http://schemas.openxmlformats.org/presentationml/2006/main">
+  <p:cSld>
+    <p:spTree>
+      <p:nvGrpSpPr>
+        <p:cNvPr id="1" name=""/>
+        <p:cNvGrpSpPr/>
+        <p:nvPr/>
+      </p:nvGrpSpPr>
+      <p:grpSpPr>
+        <a:xfrm>
+          <a:off x="0" y="0"/>
+          <a:ext cx="0" cy="0"/>
+          <a:chOff x="0" y="0"/>
+          <a:chExt cx="0" cy="0"/>
+        </a:xfrm>
+      </p:grpSpPr>
+      <p:sp>
+        <p:nvSpPr>
+          <p:cNvPr id="2" name="Slide Image Placeholder 1"/>
+          <p:cNvSpPr>
+            <a:spLocks noGrp="1" noRot="1" noChangeAspect="1"/>
+          </p:cNvSpPr>
+          <p:nvPr>
+            <p:ph type="sldImg"/>
+          </p:nvPr>
+        </p:nvSpPr>
+        <p:spPr/>
+      </p:sp>
+      <p:sp>
+        <p:nvSpPr>
+          <p:cNvPr id="3" name="Notes Placeholder 2"/>
+          <p:cNvSpPr>
+            <a:spLocks noGrp="1"/>
+          </p:cNvSpPr>
+          <p:nvPr>
+            <p:ph type="body" idx="1"/>
+          </p:nvPr>
+        </p:nvSpPr>
+        <p:spPr/>
+        <p:txBody>
+          <a:bodyPr/>
+          <a:lstStyle/>
+          <a:p>
+            <a:r>
+              <a:rPr lang="en-US" dirty="0"/>
+              <a:t>These are the references and picture credits used to prepare this lesson.</a:t>
+            </a:r>
+            <a:endParaRPr lang="en-US" dirty="0"/>
+          </a:p>
+        </p:txBody>
+      </p:sp>
+      <p:sp>
+        <p:nvSpPr>
+          <p:cNvPr id="4" name="Slide Number Placeholder 3"/>
+          <p:cNvSpPr>
+            <a:spLocks noGrp="1"/>
+          </p:cNvSpPr>
+          <p:nvPr>
+            <p:ph type="sldNum" sz="quarter" idx="10"/>
+          </p:nvPr>
+        </p:nvSpPr>
+        <p:spPr/>
+        <p:txBody>
+          <a:bodyPr/>
+          <a:lstStyle/>
+          <a:p>
+            <a:fld id="{F7021451-1387-4CA6-816F-3879F97B5CBC}" type="slidenum">
+              <a:rPr lang="en-US"/>
+              <a:t>57</a:t>
             </a:fld>
             <a:endParaRPr lang="en-US"/>
           </a:p>
@@ -5798,7 +6866,7 @@
         <p:spPr>
           <a:xfrm>
             <a:off x="0" y="658368"/>
-            <a:ext cx="5120640" cy="5833872"/>
+            <a:ext cx="1463040" cy="5833872"/>
           </a:xfrm>
           <a:prstGeom prst="rect">
             <a:avLst/>
@@ -5813,8 +6881,8 @@
         </p:nvSpPr>
         <p:spPr>
           <a:xfrm>
-            <a:off x="5349240" y="1005840"/>
-            <a:ext cx="6522415" cy="731520"/>
+            <a:off x="1691640" y="1005840"/>
+            <a:ext cx="10180015" cy="731520"/>
           </a:xfrm>
           <a:prstGeom prst="rect">
             <a:avLst/>
@@ -5854,8 +6922,8 @@
         </p:nvSpPr>
         <p:spPr>
           <a:xfrm>
-            <a:off x="5349240" y="1783080"/>
-            <a:ext cx="6522415" cy="4663440"/>
+            <a:off x="1691640" y="1783080"/>
+            <a:ext cx="10180015" cy="4663440"/>
           </a:xfrm>
           <a:prstGeom prst="rect">
             <a:avLst/>
@@ -5882,7 +6950,7 @@
                 <a:ea typeface="Times New Roman" pitchFamily="34" charset="-122"/>
                 <a:cs typeface="Times New Roman" pitchFamily="34" charset="-120"/>
               </a:rPr>
-              <a:t>In August, Hadja's washing takes a whole day to dry and the air feels heavy. In January, during the Harmattan, the same clothes dry in less than one hour.</a:t>
+              <a:t>In August, Hadja's washing takes a whole day to dry and the air feels heavy. In January, during the Harmattan, the same clothes dry in less than one hour, and the wind comes from another direction. She asks: "What changes in the air between August and January, and how can we measure it?"</a:t>
             </a:r>
             <a:endParaRPr lang="en-US" sz="4000" dirty="0"/>
           </a:p>
@@ -6320,7 +7388,7 @@
                 <a:ea typeface="Times New Roman" pitchFamily="34" charset="-122"/>
                 <a:cs typeface="Times New Roman" pitchFamily="34" charset="-120"/>
               </a:rPr>
-              <a:t>Hadja does not know why clothes dry slowly in August.</a:t>
+              <a:t>Hadja does not know which weather elements change and how they are measured.</a:t>
             </a:r>
             <a:endParaRPr lang="en-US" sz="4000" dirty="0"/>
           </a:p>
@@ -6539,7 +7607,7 @@
                 <a:ea typeface="Times New Roman" pitchFamily="34" charset="-122"/>
                 <a:cs typeface="Times New Roman" pitchFamily="34" charset="-120"/>
               </a:rPr>
-              <a:t>When do clothes dry fast?</a:t>
+              <a:t>When do clothes dry slowly?</a:t>
             </a:r>
             <a:endParaRPr lang="en-US" sz="4000" dirty="0"/>
           </a:p>
@@ -6758,7 +7826,7 @@
                 <a:ea typeface="Times New Roman" pitchFamily="34" charset="-122"/>
                 <a:cs typeface="Times New Roman" pitchFamily="34" charset="-120"/>
               </a:rPr>
-              <a:t>In January, during the Harmattan.</a:t>
+              <a:t>In August, in the rainy season.</a:t>
             </a:r>
             <a:endParaRPr lang="en-US" sz="4000" dirty="0"/>
           </a:p>
@@ -6977,7 +8045,7 @@
                 <a:ea typeface="Times New Roman" pitchFamily="34" charset="-122"/>
                 <a:cs typeface="Times New Roman" pitchFamily="34" charset="-120"/>
               </a:rPr>
-              <a:t>Why?</a:t>
+              <a:t>Why do they dry fast in January?</a:t>
             </a:r>
             <a:endParaRPr lang="en-US" sz="4000" dirty="0"/>
           </a:p>
@@ -7196,7 +8264,7 @@
                 <a:ea typeface="Times New Roman" pitchFamily="34" charset="-122"/>
                 <a:cs typeface="Times New Roman" pitchFamily="34" charset="-120"/>
               </a:rPr>
-              <a:t>The air is dry: there is little water vapour.</a:t>
+              <a:t>The Harmattan air is dry.</a:t>
             </a:r>
             <a:endParaRPr lang="en-US" sz="4000" dirty="0"/>
           </a:p>
@@ -7746,7 +8814,7 @@
                 <a:ea typeface="Calibri" pitchFamily="34" charset="-122"/>
                 <a:cs typeface="Calibri" pitchFamily="34" charset="-120"/>
               </a:rPr>
-              <a:t>1. HUMIDITY</a:t>
+              <a:t>1. ATMOSPHERIC HUMIDITY</a:t>
             </a:r>
             <a:endParaRPr lang="en-US" sz="1400" dirty="0"/>
           </a:p>
@@ -7848,7 +8916,7 @@
                 <a:ea typeface="Times New Roman" pitchFamily="34" charset="-122"/>
                 <a:cs typeface="Times New Roman" pitchFamily="34" charset="-120"/>
               </a:rPr>
-              <a:t>Clothes drying on a line.</a:t>
+              <a:t>Washing hung out to dry.</a:t>
             </a:r>
             <a:endParaRPr lang="en-US" sz="1800" dirty="0"/>
           </a:p>
@@ -8555,7 +9623,7 @@
                 <a:ea typeface="Calibri" pitchFamily="34" charset="-122"/>
                 <a:cs typeface="Calibri" pitchFamily="34" charset="-120"/>
               </a:rPr>
-              <a:t>1. HUMIDITY</a:t>
+              <a:t>1. ATMOSPHERIC HUMIDITY</a:t>
             </a:r>
             <a:endParaRPr lang="en-US" sz="1400" dirty="0"/>
           </a:p>
@@ -8774,7 +9842,7 @@
                 <a:ea typeface="Calibri" pitchFamily="34" charset="-122"/>
                 <a:cs typeface="Calibri" pitchFamily="34" charset="-120"/>
               </a:rPr>
-              <a:t>1. HUMIDITY</a:t>
+              <a:t>1. ATMOSPHERIC HUMIDITY</a:t>
             </a:r>
             <a:endParaRPr lang="en-US" sz="1400" dirty="0"/>
           </a:p>
@@ -8881,7 +9949,7 @@
                 <a:ea typeface="Times New Roman" pitchFamily="34" charset="-122"/>
                 <a:cs typeface="Times New Roman" pitchFamily="34" charset="-120"/>
               </a:rPr>
-              <a:t>The air already has a lot of water vapour (high humidity).</a:t>
+              <a:t>The air already holds a lot of water vapour (high humidity).</a:t>
             </a:r>
             <a:endParaRPr lang="en-US" sz="4000" dirty="0"/>
           </a:p>
@@ -8993,7 +10061,7 @@
                 <a:ea typeface="Calibri" pitchFamily="34" charset="-122"/>
                 <a:cs typeface="Calibri" pitchFamily="34" charset="-120"/>
               </a:rPr>
-              <a:t>2. WIND</a:t>
+              <a:t>2. WIND DIRECTION</a:t>
             </a:r>
             <a:endParaRPr lang="en-US" sz="1400" dirty="0"/>
           </a:p>
@@ -9095,7 +10163,7 @@
                 <a:ea typeface="Times New Roman" pitchFamily="34" charset="-122"/>
                 <a:cs typeface="Times New Roman" pitchFamily="34" charset="-120"/>
               </a:rPr>
-              <a:t>A windsock at an airport.</a:t>
+              <a:t>A windsock at an airfield.</a:t>
             </a:r>
             <a:endParaRPr lang="en-US" sz="1800" dirty="0"/>
           </a:p>
@@ -9207,7 +10275,7 @@
                 <a:ea typeface="Calibri" pitchFamily="34" charset="-122"/>
                 <a:cs typeface="Calibri" pitchFamily="34" charset="-120"/>
               </a:rPr>
-              <a:t>2. WIND</a:t>
+              <a:t>2. WIND DIRECTION</a:t>
             </a:r>
             <a:endParaRPr lang="en-US" sz="1400" dirty="0"/>
           </a:p>
@@ -9314,7 +10382,7 @@
                 <a:ea typeface="Times New Roman" pitchFamily="34" charset="-122"/>
                 <a:cs typeface="Times New Roman" pitchFamily="34" charset="-120"/>
               </a:rPr>
-              <a:t>What does the windsock show? Why is it useful for pilots?</a:t>
+              <a:t>What does the windsock show?</a:t>
             </a:r>
             <a:endParaRPr lang="en-US" sz="4000" dirty="0"/>
           </a:p>
@@ -9426,7 +10494,7 @@
                 <a:ea typeface="Calibri" pitchFamily="34" charset="-122"/>
                 <a:cs typeface="Calibri" pitchFamily="34" charset="-120"/>
               </a:rPr>
-              <a:t>2. WIND</a:t>
+              <a:t>2. WIND DIRECTION</a:t>
             </a:r>
             <a:endParaRPr lang="en-US" sz="1400" dirty="0"/>
           </a:p>
@@ -9533,7 +10601,7 @@
                 <a:ea typeface="Times New Roman" pitchFamily="34" charset="-122"/>
                 <a:cs typeface="Times New Roman" pitchFamily="34" charset="-120"/>
               </a:rPr>
-              <a:t>The direction and the force of the wind. Planes take off against the wind.</a:t>
+              <a:t>The direction (and the force) of the wind.</a:t>
             </a:r>
             <a:endParaRPr lang="en-US" sz="4000" dirty="0"/>
           </a:p>
@@ -9645,7 +10713,7 @@
                 <a:ea typeface="Calibri" pitchFamily="34" charset="-122"/>
                 <a:cs typeface="Calibri" pitchFamily="34" charset="-120"/>
               </a:rPr>
-              <a:t>3. PRESSURE AND SUNSHINE</a:t>
+              <a:t>4. ATMOSPHERIC PRESSURE</a:t>
             </a:r>
             <a:endParaRPr lang="en-US" sz="1400" dirty="0"/>
           </a:p>
@@ -9859,7 +10927,7 @@
                 <a:ea typeface="Calibri" pitchFamily="34" charset="-122"/>
                 <a:cs typeface="Calibri" pitchFamily="34" charset="-120"/>
               </a:rPr>
-              <a:t>3. PRESSURE AND SUNSHINE</a:t>
+              <a:t>4. ATMOSPHERIC PRESSURE</a:t>
             </a:r>
             <a:endParaRPr lang="en-US" sz="1400" dirty="0"/>
           </a:p>
@@ -9966,7 +11034,7 @@
                 <a:ea typeface="Times New Roman" pitchFamily="34" charset="-122"/>
                 <a:cs typeface="Times New Roman" pitchFamily="34" charset="-120"/>
               </a:rPr>
-              <a:t>What does a barometer measure? What if it falls quickly?</a:t>
+              <a:t>The barometer falls quickly. What weather can we expect?</a:t>
             </a:r>
             <a:endParaRPr lang="en-US" sz="4000" dirty="0"/>
           </a:p>
@@ -10078,7 +11146,7 @@
                 <a:ea typeface="Calibri" pitchFamily="34" charset="-122"/>
                 <a:cs typeface="Calibri" pitchFamily="34" charset="-120"/>
               </a:rPr>
-              <a:t>3. PRESSURE AND SUNSHINE</a:t>
+              <a:t>4. ATMOSPHERIC PRESSURE</a:t>
             </a:r>
             <a:endParaRPr lang="en-US" sz="1400" dirty="0"/>
           </a:p>
@@ -10185,7 +11253,7 @@
                 <a:ea typeface="Times New Roman" pitchFamily="34" charset="-122"/>
                 <a:cs typeface="Times New Roman" pitchFamily="34" charset="-120"/>
               </a:rPr>
-              <a:t>Air pressure. A quick fall means rain or a storm.</a:t>
+              <a:t>Rain or a storm.</a:t>
             </a:r>
             <a:endParaRPr lang="en-US" sz="4000" dirty="0"/>
           </a:p>
@@ -10396,7 +11464,7 @@
               <a:buNone/>
             </a:pPr>
             <a:r>
-              <a:rPr lang="en-US" sz="4000" b="1" dirty="0">
+              <a:rPr lang="en-US" sz="3200" b="1" dirty="0">
                 <a:solidFill>
                   <a:srgbClr val="111111"/>
                 </a:solidFill>
@@ -10406,7 +11474,7 @@
               </a:rPr>
               <a:t>Topic: The Earth-Atmosphere System</a:t>
             </a:r>
-            <a:endParaRPr lang="en-US" sz="4000" dirty="0"/>
+            <a:endParaRPr lang="en-US" sz="3200" dirty="0"/>
           </a:p>
           <a:p>
             <a:pPr algn="l" indent="0" marL="0">
@@ -10416,7 +11484,7 @@
               <a:buNone/>
             </a:pPr>
             <a:r>
-              <a:rPr lang="en-US" sz="4000" b="1" dirty="0">
+              <a:rPr lang="en-US" sz="3200" b="1" dirty="0">
                 <a:solidFill>
                   <a:srgbClr val="111111"/>
                 </a:solidFill>
@@ -10426,7 +11494,7 @@
               </a:rPr>
               <a:t>Sub-topic: Measurement of Weather Elements</a:t>
             </a:r>
-            <a:endParaRPr lang="en-US" sz="4000" dirty="0"/>
+            <a:endParaRPr lang="en-US" sz="3200" dirty="0"/>
           </a:p>
           <a:p>
             <a:pPr algn="l" indent="0" marL="0">
@@ -10436,7 +11504,7 @@
               <a:buNone/>
             </a:pPr>
             <a:r>
-              <a:rPr lang="en-US" sz="4000" b="1" dirty="0">
+              <a:rPr lang="en-US" sz="3200" b="1" dirty="0">
                 <a:solidFill>
                   <a:srgbClr val="990011"/>
                 </a:solidFill>
@@ -10446,7 +11514,7 @@
               </a:rPr>
               <a:t>Lesson 33: Weather Elements: Humidity, Wind, Pressure and Sunshine</a:t>
             </a:r>
-            <a:endParaRPr lang="en-US" sz="4000" dirty="0"/>
+            <a:endParaRPr lang="en-US" sz="3200" dirty="0"/>
           </a:p>
         </p:txBody>
       </p:sp>
@@ -10579,7 +11647,7 @@
         <p:spPr>
           <a:xfrm>
             <a:off x="0" y="658368"/>
-            <a:ext cx="3840480" cy="5833872"/>
+            <a:ext cx="5120640" cy="5833872"/>
           </a:xfrm>
           <a:prstGeom prst="rect">
             <a:avLst/>
@@ -10594,8 +11662,8 @@
         </p:nvSpPr>
         <p:spPr>
           <a:xfrm>
-            <a:off x="4069080" y="1005840"/>
-            <a:ext cx="7802575" cy="731520"/>
+            <a:off x="5349240" y="1005840"/>
+            <a:ext cx="6522415" cy="731520"/>
           </a:xfrm>
           <a:prstGeom prst="rect">
             <a:avLst/>
@@ -10621,7 +11689,7 @@
                 <a:ea typeface="Times New Roman" pitchFamily="34" charset="-122"/>
                 <a:cs typeface="Times New Roman" pitchFamily="34" charset="-120"/>
               </a:rPr>
-              <a:t>1. Atmospheric Humidity</a:t>
+              <a:t>DEFINITIONS</a:t>
             </a:r>
             <a:endParaRPr lang="en-US" sz="3600" dirty="0"/>
           </a:p>
@@ -10635,8 +11703,8 @@
         </p:nvSpPr>
         <p:spPr>
           <a:xfrm>
-            <a:off x="4069080" y="1783080"/>
-            <a:ext cx="7802575" cy="4663440"/>
+            <a:off x="5349240" y="1783080"/>
+            <a:ext cx="6522415" cy="4663440"/>
           </a:xfrm>
           <a:prstGeom prst="rect">
             <a:avLst/>
@@ -10663,7 +11731,7 @@
                 <a:ea typeface="Times New Roman" pitchFamily="34" charset="-122"/>
                 <a:cs typeface="Times New Roman" pitchFamily="34" charset="-120"/>
               </a:rPr>
-              <a:t>Humidity is explained as follows:</a:t>
+              <a:t>The key terms of this lesson are defined as follows:</a:t>
             </a:r>
             <a:endParaRPr lang="en-US" sz="4000" dirty="0"/>
           </a:p>
@@ -10701,43 +11769,6 @@
                 <a:cs typeface="Times New Roman" pitchFamily="34" charset="-120"/>
               </a:rPr>
               <a:t>It is the amount of water vapour in the air.</a:t>
-            </a:r>
-            <a:endParaRPr lang="en-US" sz="4000" dirty="0"/>
-          </a:p>
-          <a:p>
-            <a:pPr algn="l" indent="0" marL="0">
-              <a:spcAft>
-                <a:spcPts val="800"/>
-              </a:spcAft>
-              <a:buNone/>
-            </a:pPr>
-            <a:r>
-              <a:rPr lang="en-US" sz="4000" b="1" dirty="0">
-                <a:solidFill>
-                  <a:srgbClr val="111111"/>
-                </a:solidFill>
-                <a:latin typeface="Times New Roman" pitchFamily="34" charset="0"/>
-                <a:ea typeface="Times New Roman" pitchFamily="34" charset="-122"/>
-                <a:cs typeface="Times New Roman" pitchFamily="34" charset="-120"/>
-              </a:rPr>
-              <a:t>Measurement: </a:t>
-            </a:r>
-            <a:pPr algn="l" indent="0" marL="0">
-              <a:spcAft>
-                <a:spcPts val="800"/>
-              </a:spcAft>
-              <a:buNone/>
-            </a:pPr>
-            <a:r>
-              <a:rPr lang="en-US" sz="4000" dirty="0">
-                <a:solidFill>
-                  <a:srgbClr val="111111"/>
-                </a:solidFill>
-                <a:latin typeface="Times New Roman" pitchFamily="34" charset="0"/>
-                <a:ea typeface="Times New Roman" pitchFamily="34" charset="-122"/>
-                <a:cs typeface="Times New Roman" pitchFamily="34" charset="-120"/>
-              </a:rPr>
-              <a:t>It is measured with a hygrometer (wet and dry bulb thermometers) and given in percent.</a:t>
             </a:r>
             <a:endParaRPr lang="en-US" sz="4000" dirty="0"/>
           </a:p>
@@ -11881,7 +12912,7 @@
         <p:spPr>
           <a:xfrm>
             <a:off x="0" y="658368"/>
-            <a:ext cx="5120640" cy="5833872"/>
+            <a:ext cx="2468880" cy="5833872"/>
           </a:xfrm>
           <a:prstGeom prst="rect">
             <a:avLst/>
@@ -11896,8 +12927,8 @@
         </p:nvSpPr>
         <p:spPr>
           <a:xfrm>
-            <a:off x="5349240" y="1005840"/>
-            <a:ext cx="6522415" cy="731520"/>
+            <a:off x="2697480" y="1005840"/>
+            <a:ext cx="9174175" cy="731520"/>
           </a:xfrm>
           <a:prstGeom prst="rect">
             <a:avLst/>
@@ -11923,7 +12954,7 @@
                 <a:ea typeface="Times New Roman" pitchFamily="34" charset="-122"/>
                 <a:cs typeface="Times New Roman" pitchFamily="34" charset="-120"/>
               </a:rPr>
-              <a:t>1. Atmospheric Humidity (continued)</a:t>
+              <a:t>DEFINITIONS (continued)</a:t>
             </a:r>
             <a:endParaRPr lang="en-US" sz="3600" dirty="0"/>
           </a:p>
@@ -11937,8 +12968,8 @@
         </p:nvSpPr>
         <p:spPr>
           <a:xfrm>
-            <a:off x="5349240" y="1783080"/>
-            <a:ext cx="6522415" cy="4663440"/>
+            <a:off x="2697480" y="1783080"/>
+            <a:ext cx="9174175" cy="4663440"/>
           </a:xfrm>
           <a:prstGeom prst="rect">
             <a:avLst/>
@@ -11965,7 +12996,7 @@
                 <a:ea typeface="Times New Roman" pitchFamily="34" charset="-122"/>
                 <a:cs typeface="Times New Roman" pitchFamily="34" charset="-120"/>
               </a:rPr>
-              <a:t>Example: </a:t>
+              <a:t>Relative humidity: </a:t>
             </a:r>
             <a:pPr algn="l" indent="0" marL="0">
               <a:spcAft>
@@ -11982,7 +13013,44 @@
                 <a:ea typeface="Times New Roman" pitchFamily="34" charset="-122"/>
                 <a:cs typeface="Times New Roman" pitchFamily="34" charset="-120"/>
               </a:rPr>
-              <a:t>In Garoua humidity is high in August and low in January.</a:t>
+              <a:t>It is the amount of water vapour in the air compared with the maximum it can hold at that temperature, in per cent.</a:t>
+            </a:r>
+            <a:endParaRPr lang="en-US" sz="4000" dirty="0"/>
+          </a:p>
+          <a:p>
+            <a:pPr algn="l" indent="0" marL="0">
+              <a:spcAft>
+                <a:spcPts val="800"/>
+              </a:spcAft>
+              <a:buNone/>
+            </a:pPr>
+            <a:r>
+              <a:rPr lang="en-US" sz="4000" b="1" dirty="0">
+                <a:solidFill>
+                  <a:srgbClr val="111111"/>
+                </a:solidFill>
+                <a:latin typeface="Times New Roman" pitchFamily="34" charset="0"/>
+                <a:ea typeface="Times New Roman" pitchFamily="34" charset="-122"/>
+                <a:cs typeface="Times New Roman" pitchFamily="34" charset="-120"/>
+              </a:rPr>
+              <a:t>Wind: </a:t>
+            </a:r>
+            <a:pPr algn="l" indent="0" marL="0">
+              <a:spcAft>
+                <a:spcPts val="800"/>
+              </a:spcAft>
+              <a:buNone/>
+            </a:pPr>
+            <a:r>
+              <a:rPr lang="en-US" sz="4000" dirty="0">
+                <a:solidFill>
+                  <a:srgbClr val="111111"/>
+                </a:solidFill>
+                <a:latin typeface="Times New Roman" pitchFamily="34" charset="0"/>
+                <a:ea typeface="Times New Roman" pitchFamily="34" charset="-122"/>
+                <a:cs typeface="Times New Roman" pitchFamily="34" charset="-120"/>
+              </a:rPr>
+              <a:t>It is air moving from an area of high pressure to an area of low pressure.</a:t>
             </a:r>
             <a:endParaRPr lang="en-US" sz="4000" dirty="0"/>
           </a:p>
@@ -12117,7 +13185,7 @@
         <p:spPr>
           <a:xfrm>
             <a:off x="0" y="658368"/>
-            <a:ext cx="3840480" cy="5833872"/>
+            <a:ext cx="5120640" cy="5833872"/>
           </a:xfrm>
           <a:prstGeom prst="rect">
             <a:avLst/>
@@ -12132,8 +13200,8 @@
         </p:nvSpPr>
         <p:spPr>
           <a:xfrm>
-            <a:off x="4069080" y="1005840"/>
-            <a:ext cx="7802575" cy="731520"/>
+            <a:off x="5349240" y="1005840"/>
+            <a:ext cx="6522415" cy="731520"/>
           </a:xfrm>
           <a:prstGeom prst="rect">
             <a:avLst/>
@@ -12159,7 +13227,7 @@
                 <a:ea typeface="Times New Roman" pitchFamily="34" charset="-122"/>
                 <a:cs typeface="Times New Roman" pitchFamily="34" charset="-120"/>
               </a:rPr>
-              <a:t>2. Wind</a:t>
+              <a:t>DEFINITIONS (continued)</a:t>
             </a:r>
             <a:endParaRPr lang="en-US" sz="3600" dirty="0"/>
           </a:p>
@@ -12173,8 +13241,8 @@
         </p:nvSpPr>
         <p:spPr>
           <a:xfrm>
-            <a:off x="4069080" y="1783080"/>
-            <a:ext cx="7802575" cy="4663440"/>
+            <a:off x="5349240" y="1783080"/>
+            <a:ext cx="6522415" cy="4663440"/>
           </a:xfrm>
           <a:prstGeom prst="rect">
             <a:avLst/>
@@ -12193,7 +13261,7 @@
               <a:buNone/>
             </a:pPr>
             <a:r>
-              <a:rPr lang="en-US" sz="4000" i="1" dirty="0">
+              <a:rPr lang="en-US" sz="4000" b="1" dirty="0">
                 <a:solidFill>
                   <a:srgbClr val="111111"/>
                 </a:solidFill>
@@ -12201,11 +13269,8 @@
                 <a:ea typeface="Times New Roman" pitchFamily="34" charset="-122"/>
                 <a:cs typeface="Times New Roman" pitchFamily="34" charset="-120"/>
               </a:rPr>
-              <a:t>Wind is observed and measured as follows:</a:t>
-            </a:r>
-            <a:endParaRPr lang="en-US" sz="4000" dirty="0"/>
-          </a:p>
-          <a:p>
+              <a:t>Atmospheric pressure: </a:t>
+            </a:r>
             <a:pPr algn="l" indent="0" marL="0">
               <a:spcAft>
                 <a:spcPts val="800"/>
@@ -12213,7 +13278,7 @@
               <a:buNone/>
             </a:pPr>
             <a:r>
-              <a:rPr lang="en-US" sz="4000" b="1" dirty="0">
+              <a:rPr lang="en-US" sz="4000" dirty="0">
                 <a:solidFill>
                   <a:srgbClr val="111111"/>
                 </a:solidFill>
@@ -12221,61 +13286,7 @@
                 <a:ea typeface="Times New Roman" pitchFamily="34" charset="-122"/>
                 <a:cs typeface="Times New Roman" pitchFamily="34" charset="-120"/>
               </a:rPr>
-              <a:t>Wind: </a:t>
-            </a:r>
-            <a:pPr algn="l" indent="0" marL="0">
-              <a:spcAft>
-                <a:spcPts val="800"/>
-              </a:spcAft>
-              <a:buNone/>
-            </a:pPr>
-            <a:r>
-              <a:rPr lang="en-US" sz="4000" dirty="0">
-                <a:solidFill>
-                  <a:srgbClr val="111111"/>
-                </a:solidFill>
-                <a:latin typeface="Times New Roman" pitchFamily="34" charset="0"/>
-                <a:ea typeface="Times New Roman" pitchFamily="34" charset="-122"/>
-                <a:cs typeface="Times New Roman" pitchFamily="34" charset="-120"/>
-              </a:rPr>
-              <a:t>It is air moving from high pressure to low pressure.</a:t>
-            </a:r>
-            <a:endParaRPr lang="en-US" sz="4000" dirty="0"/>
-          </a:p>
-          <a:p>
-            <a:pPr algn="l" indent="0" marL="0">
-              <a:spcAft>
-                <a:spcPts val="800"/>
-              </a:spcAft>
-              <a:buNone/>
-            </a:pPr>
-            <a:r>
-              <a:rPr lang="en-US" sz="4000" b="1" dirty="0">
-                <a:solidFill>
-                  <a:srgbClr val="111111"/>
-                </a:solidFill>
-                <a:latin typeface="Times New Roman" pitchFamily="34" charset="0"/>
-                <a:ea typeface="Times New Roman" pitchFamily="34" charset="-122"/>
-                <a:cs typeface="Times New Roman" pitchFamily="34" charset="-120"/>
-              </a:rPr>
-              <a:t>Wind direction: </a:t>
-            </a:r>
-            <a:pPr algn="l" indent="0" marL="0">
-              <a:spcAft>
-                <a:spcPts val="800"/>
-              </a:spcAft>
-              <a:buNone/>
-            </a:pPr>
-            <a:r>
-              <a:rPr lang="en-US" sz="4000" dirty="0">
-                <a:solidFill>
-                  <a:srgbClr val="111111"/>
-                </a:solidFill>
-                <a:latin typeface="Times New Roman" pitchFamily="34" charset="0"/>
-                <a:ea typeface="Times New Roman" pitchFamily="34" charset="-122"/>
-                <a:cs typeface="Times New Roman" pitchFamily="34" charset="-120"/>
-              </a:rPr>
-              <a:t>It is shown by a wind vane, and a wind is named after the direction it comes from.</a:t>
+              <a:t>It is the weight of the air on the surface of the Earth.</a:t>
             </a:r>
             <a:endParaRPr lang="en-US" sz="4000" dirty="0"/>
           </a:p>
@@ -12393,9 +13404,129 @@
           </a:p>
         </p:txBody>
       </p:sp>
+      <p:sp>
+        <p:nvSpPr>
+          <p:cNvPr id="3" name="Text 1"/>
+          <p:cNvSpPr/>
+          <p:nvPr/>
+        </p:nvSpPr>
+        <p:spPr>
+          <a:xfrm>
+            <a:off x="365760" y="1005840"/>
+            <a:ext cx="11460175" cy="731520"/>
+          </a:xfrm>
+          <a:prstGeom prst="rect">
+            <a:avLst/>
+          </a:prstGeom>
+          <a:noFill/>
+          <a:ln/>
+        </p:spPr>
+        <p:txBody>
+          <a:bodyPr wrap="square" lIns="0" tIns="0" rIns="0" bIns="0" rtlCol="0" anchor="ctr">
+            <a:normAutofit/>
+          </a:bodyPr>
+          <a:lstStyle/>
+          <a:p>
+            <a:pPr algn="ctr" indent="0" marL="0">
+              <a:buNone/>
+            </a:pPr>
+            <a:r>
+              <a:rPr lang="en-US" sz="3600" b="1" dirty="0">
+                <a:solidFill>
+                  <a:srgbClr val="990011"/>
+                </a:solidFill>
+                <a:latin typeface="Times New Roman" pitchFamily="34" charset="0"/>
+                <a:ea typeface="Times New Roman" pitchFamily="34" charset="-122"/>
+                <a:cs typeface="Times New Roman" pitchFamily="34" charset="-120"/>
+              </a:rPr>
+              <a:t>1. Atmospheric Humidity</a:t>
+            </a:r>
+            <a:endParaRPr lang="en-US" sz="3600" dirty="0"/>
+          </a:p>
+        </p:txBody>
+      </p:sp>
+      <p:sp>
+        <p:nvSpPr>
+          <p:cNvPr id="4" name="Text 2"/>
+          <p:cNvSpPr/>
+          <p:nvPr/>
+        </p:nvSpPr>
+        <p:spPr>
+          <a:xfrm>
+            <a:off x="365760" y="1783080"/>
+            <a:ext cx="4846320" cy="4617720"/>
+          </a:xfrm>
+          <a:prstGeom prst="rect">
+            <a:avLst/>
+          </a:prstGeom>
+          <a:noFill/>
+          <a:ln/>
+        </p:spPr>
+        <p:txBody>
+          <a:bodyPr wrap="square" lIns="0" tIns="0" rIns="0" bIns="0" rtlCol="0" anchor="t"/>
+          <a:lstStyle/>
+          <a:p>
+            <a:pPr algn="l" indent="0" marL="0">
+              <a:spcAft>
+                <a:spcPts val="800"/>
+              </a:spcAft>
+              <a:buNone/>
+            </a:pPr>
+            <a:r>
+              <a:rPr lang="en-US" sz="3600" i="1" dirty="0">
+                <a:solidFill>
+                  <a:srgbClr val="111111"/>
+                </a:solidFill>
+                <a:latin typeface="Times New Roman" pitchFamily="34" charset="0"/>
+                <a:ea typeface="Times New Roman" pitchFamily="34" charset="-122"/>
+                <a:cs typeface="Times New Roman" pitchFamily="34" charset="-120"/>
+              </a:rPr>
+              <a:t>Humidity is measured and varies as follows:</a:t>
+            </a:r>
+            <a:endParaRPr lang="en-US" sz="3600" dirty="0"/>
+          </a:p>
+          <a:p>
+            <a:pPr algn="l" indent="0" marL="0">
+              <a:spcAft>
+                <a:spcPts val="800"/>
+              </a:spcAft>
+              <a:buNone/>
+            </a:pPr>
+            <a:r>
+              <a:rPr lang="en-US" sz="3600" b="1" dirty="0">
+                <a:solidFill>
+                  <a:srgbClr val="111111"/>
+                </a:solidFill>
+                <a:latin typeface="Times New Roman" pitchFamily="34" charset="0"/>
+                <a:ea typeface="Times New Roman" pitchFamily="34" charset="-122"/>
+                <a:cs typeface="Times New Roman" pitchFamily="34" charset="-120"/>
+              </a:rPr>
+              <a:t>Instrument: </a:t>
+            </a:r>
+            <a:pPr algn="l" indent="0" marL="0">
+              <a:spcAft>
+                <a:spcPts val="800"/>
+              </a:spcAft>
+              <a:buNone/>
+            </a:pPr>
+            <a:r>
+              <a:rPr lang="en-US" sz="3600" dirty="0">
+                <a:solidFill>
+                  <a:srgbClr val="111111"/>
+                </a:solidFill>
+                <a:latin typeface="Times New Roman" pitchFamily="34" charset="0"/>
+                <a:ea typeface="Times New Roman" pitchFamily="34" charset="-122"/>
+                <a:cs typeface="Times New Roman" pitchFamily="34" charset="-120"/>
+              </a:rPr>
+              <a:t>Humidity is measured with a hygrometer made of a wet-bulb and a dry-bulb thermometer.</a:t>
+            </a:r>
+            <a:endParaRPr lang="en-US" sz="3600" dirty="0"/>
+          </a:p>
+        </p:txBody>
+      </p:sp>
       <p:pic>
         <p:nvPicPr>
-          <p:cNvPr id="3" name="Image 0" descr="/home/claude/f4/img/minesec_sheet.png">    </p:cNvPr>
+          <p:cNvPr id="5" name="Image 0" descr="/home/claude/f4/img/v2/lsa_hygro.jpg">    </p:cNvPr>
           <p:cNvPicPr>
             <a:picLocks noChangeAspect="1"/>
           </p:cNvPicPr>
@@ -12409,8 +13540,8 @@
         </p:blipFill>
         <p:spPr>
           <a:xfrm>
-            <a:off x="0" y="658368"/>
-            <a:ext cx="5120640" cy="5833872"/>
+            <a:off x="5349240" y="2069045"/>
+            <a:ext cx="6659575" cy="3698319"/>
           </a:xfrm>
           <a:prstGeom prst="rect">
             <a:avLst/>
@@ -12419,14 +13550,14 @@
       </p:pic>
       <p:sp>
         <p:nvSpPr>
-          <p:cNvPr id="4" name="Text 1"/>
+          <p:cNvPr id="6" name="Text 3"/>
           <p:cNvSpPr/>
           <p:nvPr/>
         </p:nvSpPr>
         <p:spPr>
           <a:xfrm>
-            <a:off x="5349240" y="1005840"/>
-            <a:ext cx="6522415" cy="731520"/>
+            <a:off x="5349240" y="6089904"/>
+            <a:ext cx="6659575" cy="347472"/>
           </a:xfrm>
           <a:prstGeom prst="rect">
             <a:avLst/>
@@ -12435,85 +13566,24 @@
           <a:ln/>
         </p:spPr>
         <p:txBody>
-          <a:bodyPr wrap="square" lIns="0" tIns="0" rIns="0" bIns="0" rtlCol="0" anchor="ctr">
-            <a:normAutofit/>
-          </a:bodyPr>
+          <a:bodyPr wrap="square" lIns="0" tIns="0" rIns="0" bIns="0" rtlCol="0" anchor="ctr"/>
           <a:lstStyle/>
           <a:p>
             <a:pPr algn="ctr" indent="0" marL="0">
               <a:buNone/>
             </a:pPr>
             <a:r>
-              <a:rPr lang="en-US" sz="3600" b="1" dirty="0">
-                <a:solidFill>
-                  <a:srgbClr val="990011"/>
+              <a:rPr lang="en-US" sz="1600" i="1" dirty="0">
+                <a:solidFill>
+                  <a:srgbClr val="555555"/>
                 </a:solidFill>
                 <a:latin typeface="Times New Roman" pitchFamily="34" charset="0"/>
                 <a:ea typeface="Times New Roman" pitchFamily="34" charset="-122"/>
                 <a:cs typeface="Times New Roman" pitchFamily="34" charset="-120"/>
               </a:rPr>
-              <a:t>2. Wind (continued)</a:t>
-            </a:r>
-            <a:endParaRPr lang="en-US" sz="3600" dirty="0"/>
-          </a:p>
-        </p:txBody>
-      </p:sp>
-      <p:sp>
-        <p:nvSpPr>
-          <p:cNvPr id="5" name="Text 2"/>
-          <p:cNvSpPr/>
-          <p:nvPr/>
-        </p:nvSpPr>
-        <p:spPr>
-          <a:xfrm>
-            <a:off x="5349240" y="1783080"/>
-            <a:ext cx="6522415" cy="4663440"/>
-          </a:xfrm>
-          <a:prstGeom prst="rect">
-            <a:avLst/>
-          </a:prstGeom>
-          <a:noFill/>
-          <a:ln/>
-        </p:spPr>
-        <p:txBody>
-          <a:bodyPr wrap="square" lIns="0" tIns="0" rIns="0" bIns="0" rtlCol="0" anchor="t"/>
-          <a:lstStyle/>
-          <a:p>
-            <a:pPr algn="l" indent="0" marL="0">
-              <a:spcAft>
-                <a:spcPts val="800"/>
-              </a:spcAft>
-              <a:buNone/>
-            </a:pPr>
-            <a:r>
-              <a:rPr lang="en-US" sz="4000" b="1" dirty="0">
-                <a:solidFill>
-                  <a:srgbClr val="111111"/>
-                </a:solidFill>
-                <a:latin typeface="Times New Roman" pitchFamily="34" charset="0"/>
-                <a:ea typeface="Times New Roman" pitchFamily="34" charset="-122"/>
-                <a:cs typeface="Times New Roman" pitchFamily="34" charset="-120"/>
-              </a:rPr>
-              <a:t>Wind speed: </a:t>
-            </a:r>
-            <a:pPr algn="l" indent="0" marL="0">
-              <a:spcAft>
-                <a:spcPts val="800"/>
-              </a:spcAft>
-              <a:buNone/>
-            </a:pPr>
-            <a:r>
-              <a:rPr lang="en-US" sz="4000" dirty="0">
-                <a:solidFill>
-                  <a:srgbClr val="111111"/>
-                </a:solidFill>
-                <a:latin typeface="Times New Roman" pitchFamily="34" charset="0"/>
-                <a:ea typeface="Times New Roman" pitchFamily="34" charset="-122"/>
-                <a:cs typeface="Times New Roman" pitchFamily="34" charset="-120"/>
-              </a:rPr>
-              <a:t>It is measured with an anemometer in km/h or knots.</a:t>
-            </a:r>
-            <a:endParaRPr lang="en-US" sz="4000" dirty="0"/>
+              <a:t>Illustration: a hygrometer</a:t>
+            </a:r>
+            <a:endParaRPr lang="en-US" sz="1600" dirty="0"/>
           </a:p>
         </p:txBody>
       </p:sp>
@@ -12646,7 +13716,7 @@
         <p:spPr>
           <a:xfrm>
             <a:off x="0" y="658368"/>
-            <a:ext cx="1463040" cy="5833872"/>
+            <a:ext cx="5120640" cy="5833872"/>
           </a:xfrm>
           <a:prstGeom prst="rect">
             <a:avLst/>
@@ -12661,8 +13731,8 @@
         </p:nvSpPr>
         <p:spPr>
           <a:xfrm>
-            <a:off x="1691640" y="1005840"/>
-            <a:ext cx="10180015" cy="731520"/>
+            <a:off x="5349240" y="1005840"/>
+            <a:ext cx="6522415" cy="731520"/>
           </a:xfrm>
           <a:prstGeom prst="rect">
             <a:avLst/>
@@ -12688,7 +13758,7 @@
                 <a:ea typeface="Times New Roman" pitchFamily="34" charset="-122"/>
                 <a:cs typeface="Times New Roman" pitchFamily="34" charset="-120"/>
               </a:rPr>
-              <a:t>3. Pressure and Sunshine</a:t>
+              <a:t>1. Atmospheric Humidity</a:t>
             </a:r>
             <a:endParaRPr lang="en-US" sz="3600" dirty="0"/>
           </a:p>
@@ -12702,8 +13772,8 @@
         </p:nvSpPr>
         <p:spPr>
           <a:xfrm>
-            <a:off x="1691640" y="1783080"/>
-            <a:ext cx="10180015" cy="4663440"/>
+            <a:off x="5349240" y="1783080"/>
+            <a:ext cx="6522415" cy="4663440"/>
           </a:xfrm>
           <a:prstGeom prst="rect">
             <a:avLst/>
@@ -12722,7 +13792,7 @@
               <a:buNone/>
             </a:pPr>
             <a:r>
-              <a:rPr lang="en-US" sz="4000" i="1" dirty="0">
+              <a:rPr lang="en-US" sz="4000" b="1" dirty="0">
                 <a:solidFill>
                   <a:srgbClr val="111111"/>
                 </a:solidFill>
@@ -12730,11 +13800,8 @@
                 <a:ea typeface="Times New Roman" pitchFamily="34" charset="-122"/>
                 <a:cs typeface="Times New Roman" pitchFamily="34" charset="-120"/>
               </a:rPr>
-              <a:t>Pressure and sunshine are measured as follows:</a:t>
-            </a:r>
-            <a:endParaRPr lang="en-US" sz="4000" dirty="0"/>
-          </a:p>
-          <a:p>
+              <a:t>Reading: </a:t>
+            </a:r>
             <a:pPr algn="l" indent="0" marL="0">
               <a:spcAft>
                 <a:spcPts val="800"/>
@@ -12742,7 +13809,7 @@
               <a:buNone/>
             </a:pPr>
             <a:r>
-              <a:rPr lang="en-US" sz="4000" b="1" dirty="0">
+              <a:rPr lang="en-US" sz="4000" dirty="0">
                 <a:solidFill>
                   <a:srgbClr val="111111"/>
                 </a:solidFill>
@@ -12750,61 +13817,7 @@
                 <a:ea typeface="Times New Roman" pitchFamily="34" charset="-122"/>
                 <a:cs typeface="Times New Roman" pitchFamily="34" charset="-120"/>
               </a:rPr>
-              <a:t>Atmospheric pressure: </a:t>
-            </a:r>
-            <a:pPr algn="l" indent="0" marL="0">
-              <a:spcAft>
-                <a:spcPts val="800"/>
-              </a:spcAft>
-              <a:buNone/>
-            </a:pPr>
-            <a:r>
-              <a:rPr lang="en-US" sz="4000" dirty="0">
-                <a:solidFill>
-                  <a:srgbClr val="111111"/>
-                </a:solidFill>
-                <a:latin typeface="Times New Roman" pitchFamily="34" charset="0"/>
-                <a:ea typeface="Times New Roman" pitchFamily="34" charset="-122"/>
-                <a:cs typeface="Times New Roman" pitchFamily="34" charset="-120"/>
-              </a:rPr>
-              <a:t>It is the weight of the air, measured with a barometer in millibars.</a:t>
-            </a:r>
-            <a:endParaRPr lang="en-US" sz="4000" dirty="0"/>
-          </a:p>
-          <a:p>
-            <a:pPr algn="l" indent="0" marL="0">
-              <a:spcAft>
-                <a:spcPts val="800"/>
-              </a:spcAft>
-              <a:buNone/>
-            </a:pPr>
-            <a:r>
-              <a:rPr lang="en-US" sz="4000" b="1" dirty="0">
-                <a:solidFill>
-                  <a:srgbClr val="111111"/>
-                </a:solidFill>
-                <a:latin typeface="Times New Roman" pitchFamily="34" charset="0"/>
-                <a:ea typeface="Times New Roman" pitchFamily="34" charset="-122"/>
-                <a:cs typeface="Times New Roman" pitchFamily="34" charset="-120"/>
-              </a:rPr>
-              <a:t>Sunshine: </a:t>
-            </a:r>
-            <a:pPr algn="l" indent="0" marL="0">
-              <a:spcAft>
-                <a:spcPts val="800"/>
-              </a:spcAft>
-              <a:buNone/>
-            </a:pPr>
-            <a:r>
-              <a:rPr lang="en-US" sz="4000" dirty="0">
-                <a:solidFill>
-                  <a:srgbClr val="111111"/>
-                </a:solidFill>
-                <a:latin typeface="Times New Roman" pitchFamily="34" charset="0"/>
-                <a:ea typeface="Times New Roman" pitchFamily="34" charset="-122"/>
-                <a:cs typeface="Times New Roman" pitchFamily="34" charset="-120"/>
-              </a:rPr>
-              <a:t>The number of hours of sunshine is measured with a sunshine recorder.</a:t>
+              <a:t>The bigger the difference between the two thermometers, the drier the air.</a:t>
             </a:r>
             <a:endParaRPr lang="en-US" sz="4000" dirty="0"/>
           </a:p>
@@ -12916,15 +13929,115 @@
                 <a:ea typeface="Calibri" pitchFamily="34" charset="-122"/>
                 <a:cs typeface="Calibri" pitchFamily="34" charset="-120"/>
               </a:rPr>
-              <a:t>FORMATIVE EVALUATION</a:t>
+              <a:t>BOARD SUMMARY</a:t>
             </a:r>
             <a:endParaRPr lang="en-US" sz="1400" dirty="0"/>
+          </a:p>
+        </p:txBody>
+      </p:sp>
+      <p:sp>
+        <p:nvSpPr>
+          <p:cNvPr id="3" name="Text 1"/>
+          <p:cNvSpPr/>
+          <p:nvPr/>
+        </p:nvSpPr>
+        <p:spPr>
+          <a:xfrm>
+            <a:off x="365760" y="1005840"/>
+            <a:ext cx="11460175" cy="731520"/>
+          </a:xfrm>
+          <a:prstGeom prst="rect">
+            <a:avLst/>
+          </a:prstGeom>
+          <a:noFill/>
+          <a:ln/>
+        </p:spPr>
+        <p:txBody>
+          <a:bodyPr wrap="square" lIns="0" tIns="0" rIns="0" bIns="0" rtlCol="0" anchor="ctr">
+            <a:normAutofit/>
+          </a:bodyPr>
+          <a:lstStyle/>
+          <a:p>
+            <a:pPr algn="ctr" indent="0" marL="0">
+              <a:buNone/>
+            </a:pPr>
+            <a:r>
+              <a:rPr lang="en-US" sz="3600" b="1" dirty="0">
+                <a:solidFill>
+                  <a:srgbClr val="990011"/>
+                </a:solidFill>
+                <a:latin typeface="Times New Roman" pitchFamily="34" charset="0"/>
+                <a:ea typeface="Times New Roman" pitchFamily="34" charset="-122"/>
+                <a:cs typeface="Times New Roman" pitchFamily="34" charset="-120"/>
+              </a:rPr>
+              <a:t>1. Atmospheric Humidity</a:t>
+            </a:r>
+            <a:endParaRPr lang="en-US" sz="3600" dirty="0"/>
+          </a:p>
+        </p:txBody>
+      </p:sp>
+      <p:sp>
+        <p:nvSpPr>
+          <p:cNvPr id="4" name="Text 2"/>
+          <p:cNvSpPr/>
+          <p:nvPr/>
+        </p:nvSpPr>
+        <p:spPr>
+          <a:xfrm>
+            <a:off x="365760" y="1783080"/>
+            <a:ext cx="4846320" cy="4617720"/>
+          </a:xfrm>
+          <a:prstGeom prst="rect">
+            <a:avLst/>
+          </a:prstGeom>
+          <a:noFill/>
+          <a:ln/>
+        </p:spPr>
+        <p:txBody>
+          <a:bodyPr wrap="square" lIns="0" tIns="0" rIns="0" bIns="0" rtlCol="0" anchor="t"/>
+          <a:lstStyle/>
+          <a:p>
+            <a:pPr algn="l" indent="0" marL="0">
+              <a:spcAft>
+                <a:spcPts val="800"/>
+              </a:spcAft>
+              <a:buNone/>
+            </a:pPr>
+            <a:r>
+              <a:rPr lang="en-US" sz="3600" b="1" dirty="0">
+                <a:solidFill>
+                  <a:srgbClr val="111111"/>
+                </a:solidFill>
+                <a:latin typeface="Times New Roman" pitchFamily="34" charset="0"/>
+                <a:ea typeface="Times New Roman" pitchFamily="34" charset="-122"/>
+                <a:cs typeface="Times New Roman" pitchFamily="34" charset="-120"/>
+              </a:rPr>
+              <a:t>Temperature and humidity: </a:t>
+            </a:r>
+            <a:pPr algn="l" indent="0" marL="0">
+              <a:spcAft>
+                <a:spcPts val="800"/>
+              </a:spcAft>
+              <a:buNone/>
+            </a:pPr>
+            <a:r>
+              <a:rPr lang="en-US" sz="3600" dirty="0">
+                <a:solidFill>
+                  <a:srgbClr val="111111"/>
+                </a:solidFill>
+                <a:latin typeface="Times New Roman" pitchFamily="34" charset="0"/>
+                <a:ea typeface="Times New Roman" pitchFamily="34" charset="-122"/>
+                <a:cs typeface="Times New Roman" pitchFamily="34" charset="-120"/>
+              </a:rPr>
+              <a:t>Warm air can hold more water vapour than cold air.</a:t>
+            </a:r>
+            <a:endParaRPr lang="en-US" sz="3600" dirty="0"/>
           </a:p>
         </p:txBody>
       </p:sp>
       <p:pic>
         <p:nvPicPr>
-          <p:cNvPr id="3" name="Image 0" descr="/home/claude/f4/img/minesec_sheet.png">    </p:cNvPr>
+          <p:cNvPr id="5" name="Image 0" descr="/home/claude/f4/img/v2/humidity_big.png">    </p:cNvPr>
           <p:cNvPicPr>
             <a:picLocks noChangeAspect="1"/>
           </p:cNvPicPr>
@@ -12938,8 +14051,8 @@
         </p:blipFill>
         <p:spPr>
           <a:xfrm>
-            <a:off x="0" y="658368"/>
-            <a:ext cx="5120640" cy="5833872"/>
+            <a:off x="5349240" y="2617506"/>
+            <a:ext cx="6659575" cy="2601397"/>
           </a:xfrm>
           <a:prstGeom prst="rect">
             <a:avLst/>
@@ -12948,14 +14061,14 @@
       </p:pic>
       <p:sp>
         <p:nvSpPr>
-          <p:cNvPr id="4" name="Text 1"/>
+          <p:cNvPr id="6" name="Text 3"/>
           <p:cNvSpPr/>
           <p:nvPr/>
         </p:nvSpPr>
         <p:spPr>
           <a:xfrm>
-            <a:off x="5349240" y="1005840"/>
-            <a:ext cx="6522415" cy="731520"/>
+            <a:off x="5349240" y="6089904"/>
+            <a:ext cx="6659575" cy="347472"/>
           </a:xfrm>
           <a:prstGeom prst="rect">
             <a:avLst/>
@@ -12964,68 +14077,24 @@
           <a:ln/>
         </p:spPr>
         <p:txBody>
-          <a:bodyPr wrap="square" lIns="0" tIns="0" rIns="0" bIns="0" rtlCol="0" anchor="ctr">
-            <a:normAutofit/>
-          </a:bodyPr>
+          <a:bodyPr wrap="square" lIns="0" tIns="0" rIns="0" bIns="0" rtlCol="0" anchor="ctr"/>
           <a:lstStyle/>
           <a:p>
             <a:pPr algn="ctr" indent="0" marL="0">
               <a:buNone/>
             </a:pPr>
             <a:r>
-              <a:rPr lang="en-US" sz="3600" b="1" dirty="0">
-                <a:solidFill>
-                  <a:srgbClr val="990011"/>
+              <a:rPr lang="en-US" sz="1600" i="1" dirty="0">
+                <a:solidFill>
+                  <a:srgbClr val="555555"/>
                 </a:solidFill>
                 <a:latin typeface="Times New Roman" pitchFamily="34" charset="0"/>
                 <a:ea typeface="Times New Roman" pitchFamily="34" charset="-122"/>
                 <a:cs typeface="Times New Roman" pitchFamily="34" charset="-120"/>
               </a:rPr>
-              <a:t>Evaluation 1</a:t>
-            </a:r>
-            <a:endParaRPr lang="en-US" sz="3600" dirty="0"/>
-          </a:p>
-        </p:txBody>
-      </p:sp>
-      <p:sp>
-        <p:nvSpPr>
-          <p:cNvPr id="5" name="Text 2"/>
-          <p:cNvSpPr/>
-          <p:nvPr/>
-        </p:nvSpPr>
-        <p:spPr>
-          <a:xfrm>
-            <a:off x="5349240" y="1783080"/>
-            <a:ext cx="6522415" cy="4663440"/>
-          </a:xfrm>
-          <a:prstGeom prst="rect">
-            <a:avLst/>
-          </a:prstGeom>
-          <a:noFill/>
-          <a:ln/>
-        </p:spPr>
-        <p:txBody>
-          <a:bodyPr wrap="square" lIns="0" tIns="0" rIns="0" bIns="0" rtlCol="0" anchor="t"/>
-          <a:lstStyle/>
-          <a:p>
-            <a:pPr algn="l" indent="0" marL="0">
-              <a:spcAft>
-                <a:spcPts val="800"/>
-              </a:spcAft>
-              <a:buNone/>
-            </a:pPr>
-            <a:r>
-              <a:rPr lang="en-US" sz="4000" dirty="0">
-                <a:solidFill>
-                  <a:srgbClr val="111111"/>
-                </a:solidFill>
-                <a:latin typeface="Times New Roman" pitchFamily="34" charset="0"/>
-                <a:ea typeface="Times New Roman" pitchFamily="34" charset="-122"/>
-                <a:cs typeface="Times New Roman" pitchFamily="34" charset="-120"/>
-              </a:rPr>
-              <a:t>What is humidity?</a:t>
-            </a:r>
-            <a:endParaRPr lang="en-US" sz="4000" dirty="0"/>
+              <a:t>Illustration: warm air holds more water vapour</a:t>
+            </a:r>
+            <a:endParaRPr lang="en-US" sz="1600" dirty="0"/>
           </a:p>
         </p:txBody>
       </p:sp>
@@ -13135,7 +14204,7 @@
                 <a:ea typeface="Calibri" pitchFamily="34" charset="-122"/>
                 <a:cs typeface="Calibri" pitchFamily="34" charset="-120"/>
               </a:rPr>
-              <a:t>FORMATIVE EVALUATION</a:t>
+              <a:t>BOARD SUMMARY</a:t>
             </a:r>
             <a:endParaRPr lang="en-US" sz="1400" dirty="0"/>
           </a:p>
@@ -13200,7 +14269,7 @@
                 <a:ea typeface="Times New Roman" pitchFamily="34" charset="-122"/>
                 <a:cs typeface="Times New Roman" pitchFamily="34" charset="-120"/>
               </a:rPr>
-              <a:t>Expected Answer</a:t>
+              <a:t>1. Atmospheric Humidity</a:t>
             </a:r>
             <a:endParaRPr lang="en-US" sz="3600" dirty="0"/>
           </a:p>
@@ -13234,7 +14303,7 @@
               <a:buNone/>
             </a:pPr>
             <a:r>
-              <a:rPr lang="en-US" sz="4000" dirty="0">
+              <a:rPr lang="en-US" sz="4000" b="1" dirty="0">
                 <a:solidFill>
                   <a:srgbClr val="111111"/>
                 </a:solidFill>
@@ -13242,7 +14311,24 @@
                 <a:ea typeface="Times New Roman" pitchFamily="34" charset="-122"/>
                 <a:cs typeface="Times New Roman" pitchFamily="34" charset="-120"/>
               </a:rPr>
-              <a:t>The amount of water vapour in the air.</a:t>
+              <a:t>Example: </a:t>
+            </a:r>
+            <a:pPr algn="l" indent="0" marL="0">
+              <a:spcAft>
+                <a:spcPts val="800"/>
+              </a:spcAft>
+              <a:buNone/>
+            </a:pPr>
+            <a:r>
+              <a:rPr lang="en-US" sz="4000" dirty="0">
+                <a:solidFill>
+                  <a:srgbClr val="111111"/>
+                </a:solidFill>
+                <a:latin typeface="Times New Roman" pitchFamily="34" charset="0"/>
+                <a:ea typeface="Times New Roman" pitchFamily="34" charset="-122"/>
+                <a:cs typeface="Times New Roman" pitchFamily="34" charset="-120"/>
+              </a:rPr>
+              <a:t>In Garoua, relative humidity is high in August and very low in January.</a:t>
             </a:r>
             <a:endParaRPr lang="en-US" sz="4000" dirty="0"/>
           </a:p>
@@ -13354,7 +14440,7 @@
                 <a:ea typeface="Calibri" pitchFamily="34" charset="-122"/>
                 <a:cs typeface="Calibri" pitchFamily="34" charset="-120"/>
               </a:rPr>
-              <a:t>FORMATIVE EVALUATION</a:t>
+              <a:t>BOARD SUMMARY</a:t>
             </a:r>
             <a:endParaRPr lang="en-US" sz="1400" dirty="0"/>
           </a:p>
@@ -13419,7 +14505,7 @@
                 <a:ea typeface="Times New Roman" pitchFamily="34" charset="-122"/>
                 <a:cs typeface="Times New Roman" pitchFamily="34" charset="-120"/>
               </a:rPr>
-              <a:t>Evaluation 2</a:t>
+              <a:t>2. Wind Direction</a:t>
             </a:r>
             <a:endParaRPr lang="en-US" sz="3600" dirty="0"/>
           </a:p>
@@ -13453,7 +14539,7 @@
               <a:buNone/>
             </a:pPr>
             <a:r>
-              <a:rPr lang="en-US" sz="4000" dirty="0">
+              <a:rPr lang="en-US" sz="4000" i="1" dirty="0">
                 <a:solidFill>
                   <a:srgbClr val="111111"/>
                 </a:solidFill>
@@ -13461,7 +14547,44 @@
                 <a:ea typeface="Times New Roman" pitchFamily="34" charset="-122"/>
                 <a:cs typeface="Times New Roman" pitchFamily="34" charset="-120"/>
               </a:rPr>
-              <a:t>The Harmattan blows from the north-east. What is its name as a wind direction?</a:t>
+              <a:t>Wind direction is observed as follows:</a:t>
+            </a:r>
+            <a:endParaRPr lang="en-US" sz="4000" dirty="0"/>
+          </a:p>
+          <a:p>
+            <a:pPr algn="l" indent="0" marL="0">
+              <a:spcAft>
+                <a:spcPts val="800"/>
+              </a:spcAft>
+              <a:buNone/>
+            </a:pPr>
+            <a:r>
+              <a:rPr lang="en-US" sz="4000" b="1" dirty="0">
+                <a:solidFill>
+                  <a:srgbClr val="111111"/>
+                </a:solidFill>
+                <a:latin typeface="Times New Roman" pitchFamily="34" charset="0"/>
+                <a:ea typeface="Times New Roman" pitchFamily="34" charset="-122"/>
+                <a:cs typeface="Times New Roman" pitchFamily="34" charset="-120"/>
+              </a:rPr>
+              <a:t>Wind vane: </a:t>
+            </a:r>
+            <a:pPr algn="l" indent="0" marL="0">
+              <a:spcAft>
+                <a:spcPts val="800"/>
+              </a:spcAft>
+              <a:buNone/>
+            </a:pPr>
+            <a:r>
+              <a:rPr lang="en-US" sz="4000" dirty="0">
+                <a:solidFill>
+                  <a:srgbClr val="111111"/>
+                </a:solidFill>
+                <a:latin typeface="Times New Roman" pitchFamily="34" charset="0"/>
+                <a:ea typeface="Times New Roman" pitchFamily="34" charset="-122"/>
+                <a:cs typeface="Times New Roman" pitchFamily="34" charset="-120"/>
+              </a:rPr>
+              <a:t>Its arrow points to the direction from which the wind comes.</a:t>
             </a:r>
             <a:endParaRPr lang="en-US" sz="4000" dirty="0"/>
           </a:p>
@@ -13573,15 +14696,115 @@
                 <a:ea typeface="Calibri" pitchFamily="34" charset="-122"/>
                 <a:cs typeface="Calibri" pitchFamily="34" charset="-120"/>
               </a:rPr>
-              <a:t>FORMATIVE EVALUATION</a:t>
+              <a:t>BOARD SUMMARY</a:t>
             </a:r>
             <a:endParaRPr lang="en-US" sz="1400" dirty="0"/>
+          </a:p>
+        </p:txBody>
+      </p:sp>
+      <p:sp>
+        <p:nvSpPr>
+          <p:cNvPr id="3" name="Text 1"/>
+          <p:cNvSpPr/>
+          <p:nvPr/>
+        </p:nvSpPr>
+        <p:spPr>
+          <a:xfrm>
+            <a:off x="365760" y="1005840"/>
+            <a:ext cx="11460175" cy="731520"/>
+          </a:xfrm>
+          <a:prstGeom prst="rect">
+            <a:avLst/>
+          </a:prstGeom>
+          <a:noFill/>
+          <a:ln/>
+        </p:spPr>
+        <p:txBody>
+          <a:bodyPr wrap="square" lIns="0" tIns="0" rIns="0" bIns="0" rtlCol="0" anchor="ctr">
+            <a:normAutofit/>
+          </a:bodyPr>
+          <a:lstStyle/>
+          <a:p>
+            <a:pPr algn="ctr" indent="0" marL="0">
+              <a:buNone/>
+            </a:pPr>
+            <a:r>
+              <a:rPr lang="en-US" sz="3600" b="1" dirty="0">
+                <a:solidFill>
+                  <a:srgbClr val="990011"/>
+                </a:solidFill>
+                <a:latin typeface="Times New Roman" pitchFamily="34" charset="0"/>
+                <a:ea typeface="Times New Roman" pitchFamily="34" charset="-122"/>
+                <a:cs typeface="Times New Roman" pitchFamily="34" charset="-120"/>
+              </a:rPr>
+              <a:t>2. Wind Direction</a:t>
+            </a:r>
+            <a:endParaRPr lang="en-US" sz="3600" dirty="0"/>
+          </a:p>
+        </p:txBody>
+      </p:sp>
+      <p:sp>
+        <p:nvSpPr>
+          <p:cNvPr id="4" name="Text 2"/>
+          <p:cNvSpPr/>
+          <p:nvPr/>
+        </p:nvSpPr>
+        <p:spPr>
+          <a:xfrm>
+            <a:off x="365760" y="1783080"/>
+            <a:ext cx="4846320" cy="4617720"/>
+          </a:xfrm>
+          <a:prstGeom prst="rect">
+            <a:avLst/>
+          </a:prstGeom>
+          <a:noFill/>
+          <a:ln/>
+        </p:spPr>
+        <p:txBody>
+          <a:bodyPr wrap="square" lIns="0" tIns="0" rIns="0" bIns="0" rtlCol="0" anchor="t"/>
+          <a:lstStyle/>
+          <a:p>
+            <a:pPr algn="l" indent="0" marL="0">
+              <a:spcAft>
+                <a:spcPts val="800"/>
+              </a:spcAft>
+              <a:buNone/>
+            </a:pPr>
+            <a:r>
+              <a:rPr lang="en-US" sz="3600" b="1" dirty="0">
+                <a:solidFill>
+                  <a:srgbClr val="111111"/>
+                </a:solidFill>
+                <a:latin typeface="Times New Roman" pitchFamily="34" charset="0"/>
+                <a:ea typeface="Times New Roman" pitchFamily="34" charset="-122"/>
+                <a:cs typeface="Times New Roman" pitchFamily="34" charset="-120"/>
+              </a:rPr>
+              <a:t>Windsock: </a:t>
+            </a:r>
+            <a:pPr algn="l" indent="0" marL="0">
+              <a:spcAft>
+                <a:spcPts val="800"/>
+              </a:spcAft>
+              <a:buNone/>
+            </a:pPr>
+            <a:r>
+              <a:rPr lang="en-US" sz="3600" dirty="0">
+                <a:solidFill>
+                  <a:srgbClr val="111111"/>
+                </a:solidFill>
+                <a:latin typeface="Times New Roman" pitchFamily="34" charset="0"/>
+                <a:ea typeface="Times New Roman" pitchFamily="34" charset="-122"/>
+                <a:cs typeface="Times New Roman" pitchFamily="34" charset="-120"/>
+              </a:rPr>
+              <a:t>It shows the direction and the force of the wind at airports.</a:t>
+            </a:r>
+            <a:endParaRPr lang="en-US" sz="3600" dirty="0"/>
           </a:p>
         </p:txBody>
       </p:sp>
       <p:pic>
         <p:nvPicPr>
-          <p:cNvPr id="3" name="Image 0" descr="/home/claude/f4/img/minesec_sheet.png">    </p:cNvPr>
+          <p:cNvPr id="5" name="Image 0" descr="/home/claude/f4/img/v2/f4_windsock.jpg">    </p:cNvPr>
           <p:cNvPicPr>
             <a:picLocks noChangeAspect="1"/>
           </p:cNvPicPr>
@@ -13595,8 +14818,8 @@
         </p:blipFill>
         <p:spPr>
           <a:xfrm>
-            <a:off x="0" y="658368"/>
-            <a:ext cx="5120640" cy="5833872"/>
+            <a:off x="5349240" y="2071212"/>
+            <a:ext cx="6659575" cy="3693983"/>
           </a:xfrm>
           <a:prstGeom prst="rect">
             <a:avLst/>
@@ -13605,14 +14828,14 @@
       </p:pic>
       <p:sp>
         <p:nvSpPr>
-          <p:cNvPr id="4" name="Text 1"/>
+          <p:cNvPr id="6" name="Text 3"/>
           <p:cNvSpPr/>
           <p:nvPr/>
         </p:nvSpPr>
         <p:spPr>
           <a:xfrm>
-            <a:off x="5349240" y="1005840"/>
-            <a:ext cx="6522415" cy="731520"/>
+            <a:off x="5349240" y="6089904"/>
+            <a:ext cx="6659575" cy="347472"/>
           </a:xfrm>
           <a:prstGeom prst="rect">
             <a:avLst/>
@@ -13621,68 +14844,24 @@
           <a:ln/>
         </p:spPr>
         <p:txBody>
-          <a:bodyPr wrap="square" lIns="0" tIns="0" rIns="0" bIns="0" rtlCol="0" anchor="ctr">
-            <a:normAutofit/>
-          </a:bodyPr>
+          <a:bodyPr wrap="square" lIns="0" tIns="0" rIns="0" bIns="0" rtlCol="0" anchor="ctr"/>
           <a:lstStyle/>
           <a:p>
             <a:pPr algn="ctr" indent="0" marL="0">
               <a:buNone/>
             </a:pPr>
             <a:r>
-              <a:rPr lang="en-US" sz="3600" b="1" dirty="0">
-                <a:solidFill>
-                  <a:srgbClr val="990011"/>
+              <a:rPr lang="en-US" sz="1600" i="1" dirty="0">
+                <a:solidFill>
+                  <a:srgbClr val="555555"/>
                 </a:solidFill>
                 <a:latin typeface="Times New Roman" pitchFamily="34" charset="0"/>
                 <a:ea typeface="Times New Roman" pitchFamily="34" charset="-122"/>
                 <a:cs typeface="Times New Roman" pitchFamily="34" charset="-120"/>
               </a:rPr>
-              <a:t>Expected Answer</a:t>
-            </a:r>
-            <a:endParaRPr lang="en-US" sz="3600" dirty="0"/>
-          </a:p>
-        </p:txBody>
-      </p:sp>
-      <p:sp>
-        <p:nvSpPr>
-          <p:cNvPr id="5" name="Text 2"/>
-          <p:cNvSpPr/>
-          <p:nvPr/>
-        </p:nvSpPr>
-        <p:spPr>
-          <a:xfrm>
-            <a:off x="5349240" y="1783080"/>
-            <a:ext cx="6522415" cy="4663440"/>
-          </a:xfrm>
-          <a:prstGeom prst="rect">
-            <a:avLst/>
-          </a:prstGeom>
-          <a:noFill/>
-          <a:ln/>
-        </p:spPr>
-        <p:txBody>
-          <a:bodyPr wrap="square" lIns="0" tIns="0" rIns="0" bIns="0" rtlCol="0" anchor="t"/>
-          <a:lstStyle/>
-          <a:p>
-            <a:pPr algn="l" indent="0" marL="0">
-              <a:spcAft>
-                <a:spcPts val="800"/>
-              </a:spcAft>
-              <a:buNone/>
-            </a:pPr>
-            <a:r>
-              <a:rPr lang="en-US" sz="4000" dirty="0">
-                <a:solidFill>
-                  <a:srgbClr val="111111"/>
-                </a:solidFill>
-                <a:latin typeface="Times New Roman" pitchFamily="34" charset="0"/>
-                <a:ea typeface="Times New Roman" pitchFamily="34" charset="-122"/>
-                <a:cs typeface="Times New Roman" pitchFamily="34" charset="-120"/>
-              </a:rPr>
-              <a:t>A north-easterly wind.</a:t>
-            </a:r>
-            <a:endParaRPr lang="en-US" sz="4000" dirty="0"/>
+              <a:t>Illustration: a windsock</a:t>
+            </a:r>
+            <a:endParaRPr lang="en-US" sz="1600" dirty="0"/>
           </a:p>
         </p:txBody>
       </p:sp>
@@ -13792,7 +14971,7 @@
                 <a:ea typeface="Calibri" pitchFamily="34" charset="-122"/>
                 <a:cs typeface="Calibri" pitchFamily="34" charset="-120"/>
               </a:rPr>
-              <a:t>REMEDIATION</a:t>
+              <a:t>BOARD SUMMARY</a:t>
             </a:r>
             <a:endParaRPr lang="en-US" sz="1400" dirty="0"/>
           </a:p>
@@ -13815,7 +14994,7 @@
         <p:spPr>
           <a:xfrm>
             <a:off x="0" y="658368"/>
-            <a:ext cx="2468880" cy="5833872"/>
+            <a:ext cx="3840480" cy="5833872"/>
           </a:xfrm>
           <a:prstGeom prst="rect">
             <a:avLst/>
@@ -13830,8 +15009,8 @@
         </p:nvSpPr>
         <p:spPr>
           <a:xfrm>
-            <a:off x="2697480" y="1005840"/>
-            <a:ext cx="9174175" cy="731520"/>
+            <a:off x="4069080" y="1005840"/>
+            <a:ext cx="7802575" cy="731520"/>
           </a:xfrm>
           <a:prstGeom prst="rect">
             <a:avLst/>
@@ -13857,7 +15036,7 @@
                 <a:ea typeface="Times New Roman" pitchFamily="34" charset="-122"/>
                 <a:cs typeface="Times New Roman" pitchFamily="34" charset="-120"/>
               </a:rPr>
-              <a:t>Remediation</a:t>
+              <a:t>2. Wind Direction</a:t>
             </a:r>
             <a:endParaRPr lang="en-US" sz="3600" dirty="0"/>
           </a:p>
@@ -13871,8 +15050,8 @@
         </p:nvSpPr>
         <p:spPr>
           <a:xfrm>
-            <a:off x="2697480" y="1783080"/>
-            <a:ext cx="9174175" cy="4663440"/>
+            <a:off x="4069080" y="1783080"/>
+            <a:ext cx="7802575" cy="4663440"/>
           </a:xfrm>
           <a:prstGeom prst="rect">
             <a:avLst/>
@@ -13899,18 +15078,13 @@
                 <a:ea typeface="Times New Roman" pitchFamily="34" charset="-122"/>
                 <a:cs typeface="Times New Roman" pitchFamily="34" charset="-120"/>
               </a:rPr>
-              <a:t>Fill in the blanks:</a:t>
-            </a:r>
-            <a:endParaRPr lang="en-US" sz="4000" dirty="0"/>
-          </a:p>
-          <a:p>
-            <a:pPr algn="l" marL="342900" indent="-342900">
+              <a:t>Naming winds: </a:t>
+            </a:r>
+            <a:pPr algn="l" indent="0" marL="0">
               <a:spcAft>
                 <a:spcPts val="800"/>
               </a:spcAft>
-              <a:buSzPct val="100000"/>
-              <a:buFont typeface="+mj-lt"/>
-              <a:buAutoNum type="arabicPeriod" startAt="1"/>
+              <a:buNone/>
             </a:pPr>
             <a:r>
               <a:rPr lang="en-US" sz="4000" dirty="0">
@@ -13921,21 +15095,19 @@
                 <a:ea typeface="Times New Roman" pitchFamily="34" charset="-122"/>
                 <a:cs typeface="Times New Roman" pitchFamily="34" charset="-120"/>
               </a:rPr>
-              <a:t>Humidity is measured with a ______.</a:t>
+              <a:t>A wind is named after the direction it comes from, for example the north-east Harmattan.</a:t>
             </a:r>
             <a:endParaRPr lang="en-US" sz="4000" dirty="0"/>
           </a:p>
           <a:p>
-            <a:pPr algn="l" marL="342900" indent="-342900">
+            <a:pPr algn="l" indent="0" marL="0">
               <a:spcAft>
                 <a:spcPts val="800"/>
               </a:spcAft>
-              <a:buSzPct val="100000"/>
-              <a:buFont typeface="+mj-lt"/>
-              <a:buAutoNum type="arabicPeriod" startAt="1"/>
+              <a:buNone/>
             </a:pPr>
             <a:r>
-              <a:rPr lang="en-US" sz="4000" dirty="0">
+              <a:rPr lang="en-US" sz="4000" b="1" dirty="0">
                 <a:solidFill>
                   <a:srgbClr val="111111"/>
                 </a:solidFill>
@@ -13943,18 +15115,13 @@
                 <a:ea typeface="Times New Roman" pitchFamily="34" charset="-122"/>
                 <a:cs typeface="Times New Roman" pitchFamily="34" charset="-120"/>
               </a:rPr>
-              <a:t>Air pressure is measured with a ______.</a:t>
-            </a:r>
-            <a:endParaRPr lang="en-US" sz="4000" dirty="0"/>
-          </a:p>
-          <a:p>
-            <a:pPr algn="l" marL="342900" indent="-342900">
+              <a:t>Wind rose: </a:t>
+            </a:r>
+            <a:pPr algn="l" indent="0" marL="0">
               <a:spcAft>
                 <a:spcPts val="800"/>
               </a:spcAft>
-              <a:buSzPct val="100000"/>
-              <a:buFont typeface="+mj-lt"/>
-              <a:buAutoNum type="arabicPeriod" startAt="1"/>
+              <a:buNone/>
             </a:pPr>
             <a:r>
               <a:rPr lang="en-US" sz="4000" dirty="0">
@@ -13965,7 +15132,7 @@
                 <a:ea typeface="Times New Roman" pitchFamily="34" charset="-122"/>
                 <a:cs typeface="Times New Roman" pitchFamily="34" charset="-120"/>
               </a:rPr>
-              <a:t>A wind is named after the direction it comes ______.</a:t>
+              <a:t>It is a diagram that shows how often the wind blows from each direction.</a:t>
             </a:r>
             <a:endParaRPr lang="en-US" sz="4000" dirty="0"/>
           </a:p>
@@ -14077,15 +15244,135 @@
                 <a:ea typeface="Calibri" pitchFamily="34" charset="-122"/>
                 <a:cs typeface="Calibri" pitchFamily="34" charset="-120"/>
               </a:rPr>
-              <a:t>HOMEWORK</a:t>
+              <a:t>BOARD SUMMARY</a:t>
             </a:r>
             <a:endParaRPr lang="en-US" sz="1400" dirty="0"/>
+          </a:p>
+        </p:txBody>
+      </p:sp>
+      <p:sp>
+        <p:nvSpPr>
+          <p:cNvPr id="3" name="Text 1"/>
+          <p:cNvSpPr/>
+          <p:nvPr/>
+        </p:nvSpPr>
+        <p:spPr>
+          <a:xfrm>
+            <a:off x="365760" y="1005840"/>
+            <a:ext cx="11460175" cy="731520"/>
+          </a:xfrm>
+          <a:prstGeom prst="rect">
+            <a:avLst/>
+          </a:prstGeom>
+          <a:noFill/>
+          <a:ln/>
+        </p:spPr>
+        <p:txBody>
+          <a:bodyPr wrap="square" lIns="0" tIns="0" rIns="0" bIns="0" rtlCol="0" anchor="ctr">
+            <a:normAutofit/>
+          </a:bodyPr>
+          <a:lstStyle/>
+          <a:p>
+            <a:pPr algn="ctr" indent="0" marL="0">
+              <a:buNone/>
+            </a:pPr>
+            <a:r>
+              <a:rPr lang="en-US" sz="3600" b="1" dirty="0">
+                <a:solidFill>
+                  <a:srgbClr val="990011"/>
+                </a:solidFill>
+                <a:latin typeface="Times New Roman" pitchFamily="34" charset="0"/>
+                <a:ea typeface="Times New Roman" pitchFamily="34" charset="-122"/>
+                <a:cs typeface="Times New Roman" pitchFamily="34" charset="-120"/>
+              </a:rPr>
+              <a:t>3. Wind Speed</a:t>
+            </a:r>
+            <a:endParaRPr lang="en-US" sz="3600" dirty="0"/>
+          </a:p>
+        </p:txBody>
+      </p:sp>
+      <p:sp>
+        <p:nvSpPr>
+          <p:cNvPr id="4" name="Text 2"/>
+          <p:cNvSpPr/>
+          <p:nvPr/>
+        </p:nvSpPr>
+        <p:spPr>
+          <a:xfrm>
+            <a:off x="365760" y="1783080"/>
+            <a:ext cx="4846320" cy="4617720"/>
+          </a:xfrm>
+          <a:prstGeom prst="rect">
+            <a:avLst/>
+          </a:prstGeom>
+          <a:noFill/>
+          <a:ln/>
+        </p:spPr>
+        <p:txBody>
+          <a:bodyPr wrap="square" lIns="0" tIns="0" rIns="0" bIns="0" rtlCol="0" anchor="t"/>
+          <a:lstStyle/>
+          <a:p>
+            <a:pPr algn="l" indent="0" marL="0">
+              <a:spcAft>
+                <a:spcPts val="800"/>
+              </a:spcAft>
+              <a:buNone/>
+            </a:pPr>
+            <a:r>
+              <a:rPr lang="en-US" sz="3600" i="1" dirty="0">
+                <a:solidFill>
+                  <a:srgbClr val="111111"/>
+                </a:solidFill>
+                <a:latin typeface="Times New Roman" pitchFamily="34" charset="0"/>
+                <a:ea typeface="Times New Roman" pitchFamily="34" charset="-122"/>
+                <a:cs typeface="Times New Roman" pitchFamily="34" charset="-120"/>
+              </a:rPr>
+              <a:t>Wind speed is measured as follows:</a:t>
+            </a:r>
+            <a:endParaRPr lang="en-US" sz="3600" dirty="0"/>
+          </a:p>
+          <a:p>
+            <a:pPr algn="l" indent="0" marL="0">
+              <a:spcAft>
+                <a:spcPts val="800"/>
+              </a:spcAft>
+              <a:buNone/>
+            </a:pPr>
+            <a:r>
+              <a:rPr lang="en-US" sz="3600" b="1" dirty="0">
+                <a:solidFill>
+                  <a:srgbClr val="111111"/>
+                </a:solidFill>
+                <a:latin typeface="Times New Roman" pitchFamily="34" charset="0"/>
+                <a:ea typeface="Times New Roman" pitchFamily="34" charset="-122"/>
+                <a:cs typeface="Times New Roman" pitchFamily="34" charset="-120"/>
+              </a:rPr>
+              <a:t>Anemometer: </a:t>
+            </a:r>
+            <a:pPr algn="l" indent="0" marL="0">
+              <a:spcAft>
+                <a:spcPts val="800"/>
+              </a:spcAft>
+              <a:buNone/>
+            </a:pPr>
+            <a:r>
+              <a:rPr lang="en-US" sz="3600" dirty="0">
+                <a:solidFill>
+                  <a:srgbClr val="111111"/>
+                </a:solidFill>
+                <a:latin typeface="Times New Roman" pitchFamily="34" charset="0"/>
+                <a:ea typeface="Times New Roman" pitchFamily="34" charset="-122"/>
+                <a:cs typeface="Times New Roman" pitchFamily="34" charset="-120"/>
+              </a:rPr>
+              <a:t>Its cups turn faster when the wind is stronger.</a:t>
+            </a:r>
+            <a:endParaRPr lang="en-US" sz="3600" dirty="0"/>
           </a:p>
         </p:txBody>
       </p:sp>
       <p:pic>
         <p:nvPicPr>
-          <p:cNvPr id="3" name="Image 0" descr="/home/claude/f4/img/minesec_sheet.png">    </p:cNvPr>
+          <p:cNvPr id="5" name="Image 0" descr="/home/claude/f4/img/v2/f4_anemometer.jpg">    </p:cNvPr>
           <p:cNvPicPr>
             <a:picLocks noChangeAspect="1"/>
           </p:cNvPicPr>
@@ -14099,8 +15386,8 @@
         </p:blipFill>
         <p:spPr>
           <a:xfrm>
-            <a:off x="0" y="658368"/>
-            <a:ext cx="5120640" cy="5833872"/>
+            <a:off x="5349240" y="2071212"/>
+            <a:ext cx="6659575" cy="3693983"/>
           </a:xfrm>
           <a:prstGeom prst="rect">
             <a:avLst/>
@@ -14109,14 +15396,14 @@
       </p:pic>
       <p:sp>
         <p:nvSpPr>
-          <p:cNvPr id="4" name="Text 1"/>
+          <p:cNvPr id="6" name="Text 3"/>
           <p:cNvSpPr/>
           <p:nvPr/>
         </p:nvSpPr>
         <p:spPr>
           <a:xfrm>
-            <a:off x="5349240" y="1005840"/>
-            <a:ext cx="6522415" cy="731520"/>
+            <a:off x="5349240" y="6089904"/>
+            <a:ext cx="6659575" cy="347472"/>
           </a:xfrm>
           <a:prstGeom prst="rect">
             <a:avLst/>
@@ -14125,68 +15412,24 @@
           <a:ln/>
         </p:spPr>
         <p:txBody>
-          <a:bodyPr wrap="square" lIns="0" tIns="0" rIns="0" bIns="0" rtlCol="0" anchor="ctr">
-            <a:normAutofit/>
-          </a:bodyPr>
+          <a:bodyPr wrap="square" lIns="0" tIns="0" rIns="0" bIns="0" rtlCol="0" anchor="ctr"/>
           <a:lstStyle/>
           <a:p>
             <a:pPr algn="ctr" indent="0" marL="0">
               <a:buNone/>
             </a:pPr>
             <a:r>
-              <a:rPr lang="en-US" sz="3600" b="1" dirty="0">
-                <a:solidFill>
-                  <a:srgbClr val="990011"/>
+              <a:rPr lang="en-US" sz="1600" i="1" dirty="0">
+                <a:solidFill>
+                  <a:srgbClr val="555555"/>
                 </a:solidFill>
                 <a:latin typeface="Times New Roman" pitchFamily="34" charset="0"/>
                 <a:ea typeface="Times New Roman" pitchFamily="34" charset="-122"/>
                 <a:cs typeface="Times New Roman" pitchFamily="34" charset="-120"/>
               </a:rPr>
-              <a:t>Homework</a:t>
-            </a:r>
-            <a:endParaRPr lang="en-US" sz="3600" dirty="0"/>
-          </a:p>
-        </p:txBody>
-      </p:sp>
-      <p:sp>
-        <p:nvSpPr>
-          <p:cNvPr id="5" name="Text 2"/>
-          <p:cNvSpPr/>
-          <p:nvPr/>
-        </p:nvSpPr>
-        <p:spPr>
-          <a:xfrm>
-            <a:off x="5349240" y="1783080"/>
-            <a:ext cx="6522415" cy="4663440"/>
-          </a:xfrm>
-          <a:prstGeom prst="rect">
-            <a:avLst/>
-          </a:prstGeom>
-          <a:noFill/>
-          <a:ln/>
-        </p:spPr>
-        <p:txBody>
-          <a:bodyPr wrap="square" lIns="0" tIns="0" rIns="0" bIns="0" rtlCol="0" anchor="t"/>
-          <a:lstStyle/>
-          <a:p>
-            <a:pPr algn="l" indent="0" marL="0">
-              <a:spcAft>
-                <a:spcPts val="800"/>
-              </a:spcAft>
-              <a:buNone/>
-            </a:pPr>
-            <a:r>
-              <a:rPr lang="en-US" sz="4000" dirty="0">
-                <a:solidFill>
-                  <a:srgbClr val="111111"/>
-                </a:solidFill>
-                <a:latin typeface="Times New Roman" pitchFamily="34" charset="0"/>
-                <a:ea typeface="Times New Roman" pitchFamily="34" charset="-122"/>
-                <a:cs typeface="Times New Roman" pitchFamily="34" charset="-120"/>
-              </a:rPr>
-              <a:t>Early tomorrow morning, look at the grass, leaves or cars near your house. Write down whether you see drops of water on them, and where you think the water came from.</a:t>
-            </a:r>
-            <a:endParaRPr lang="en-US" sz="4000" dirty="0"/>
+              <a:t>Illustration: an anemometer</a:t>
+            </a:r>
+            <a:endParaRPr lang="en-US" sz="1600" dirty="0"/>
           </a:p>
         </p:txBody>
       </p:sp>
@@ -14535,7 +15778,7 @@
                 <a:ea typeface="Calibri" pitchFamily="34" charset="-122"/>
                 <a:cs typeface="Calibri" pitchFamily="34" charset="-120"/>
               </a:rPr>
-              <a:t>NEXT LESSON</a:t>
+              <a:t>BOARD SUMMARY</a:t>
             </a:r>
             <a:endParaRPr lang="en-US" sz="1400" dirty="0"/>
           </a:p>
@@ -14600,7 +15843,7 @@
                 <a:ea typeface="Times New Roman" pitchFamily="34" charset="-122"/>
                 <a:cs typeface="Times New Roman" pitchFamily="34" charset="-120"/>
               </a:rPr>
-              <a:t>Next Lesson</a:t>
+              <a:t>3. Wind Speed</a:t>
             </a:r>
             <a:endParaRPr lang="en-US" sz="3600" dirty="0"/>
           </a:p>
@@ -14624,10 +15867,10 @@
           <a:ln/>
         </p:spPr>
         <p:txBody>
-          <a:bodyPr wrap="square" lIns="0" tIns="0" rIns="0" bIns="0" rtlCol="0" anchor="ctr"/>
-          <a:lstStyle/>
-          <a:p>
-            <a:pPr algn="ctr" indent="0" marL="0">
+          <a:bodyPr wrap="square" lIns="0" tIns="0" rIns="0" bIns="0" rtlCol="0" anchor="t"/>
+          <a:lstStyle/>
+          <a:p>
+            <a:pPr algn="l" indent="0" marL="0">
               <a:spcAft>
                 <a:spcPts val="800"/>
               </a:spcAft>
@@ -14642,27 +15885,61 @@
                 <a:ea typeface="Times New Roman" pitchFamily="34" charset="-122"/>
                 <a:cs typeface="Times New Roman" pitchFamily="34" charset="-120"/>
               </a:rPr>
-              <a:t>Our next lesson will be on:</a:t>
-            </a:r>
-            <a:endParaRPr lang="en-US" sz="4000" dirty="0"/>
-          </a:p>
-          <a:p>
-            <a:pPr algn="ctr" indent="0" marL="0">
+              <a:t>Units: </a:t>
+            </a:r>
+            <a:pPr algn="l" indent="0" marL="0">
               <a:spcAft>
                 <a:spcPts val="800"/>
               </a:spcAft>
               <a:buNone/>
             </a:pPr>
             <a:r>
-              <a:rPr lang="en-US" sz="4000" b="1" dirty="0">
-                <a:solidFill>
-                  <a:srgbClr val="990011"/>
+              <a:rPr lang="en-US" sz="4000" dirty="0">
+                <a:solidFill>
+                  <a:srgbClr val="111111"/>
                 </a:solidFill>
                 <a:latin typeface="Times New Roman" pitchFamily="34" charset="0"/>
                 <a:ea typeface="Times New Roman" pitchFamily="34" charset="-122"/>
                 <a:cs typeface="Times New Roman" pitchFamily="34" charset="-120"/>
               </a:rPr>
-              <a:t>Lesson 34: Condensation</a:t>
+              <a:t>Wind speed is given in km/h, m/s or knots.</a:t>
+            </a:r>
+            <a:endParaRPr lang="en-US" sz="4000" dirty="0"/>
+          </a:p>
+          <a:p>
+            <a:pPr algn="l" indent="0" marL="0">
+              <a:spcAft>
+                <a:spcPts val="800"/>
+              </a:spcAft>
+              <a:buNone/>
+            </a:pPr>
+            <a:r>
+              <a:rPr lang="en-US" sz="4000" b="1" dirty="0">
+                <a:solidFill>
+                  <a:srgbClr val="111111"/>
+                </a:solidFill>
+                <a:latin typeface="Times New Roman" pitchFamily="34" charset="0"/>
+                <a:ea typeface="Times New Roman" pitchFamily="34" charset="-122"/>
+                <a:cs typeface="Times New Roman" pitchFamily="34" charset="-120"/>
+              </a:rPr>
+              <a:t>Beaufort scale: </a:t>
+            </a:r>
+            <a:pPr algn="l" indent="0" marL="0">
+              <a:spcAft>
+                <a:spcPts val="800"/>
+              </a:spcAft>
+              <a:buNone/>
+            </a:pPr>
+            <a:r>
+              <a:rPr lang="en-US" sz="4000" dirty="0">
+                <a:solidFill>
+                  <a:srgbClr val="111111"/>
+                </a:solidFill>
+                <a:latin typeface="Times New Roman" pitchFamily="34" charset="0"/>
+                <a:ea typeface="Times New Roman" pitchFamily="34" charset="-122"/>
+                <a:cs typeface="Times New Roman" pitchFamily="34" charset="-120"/>
+              </a:rPr>
+              <a:t>It estimates wind force from 0 (calm) to 12 (hurricane) by observing smoke, trees and waves.</a:t>
             </a:r>
             <a:endParaRPr lang="en-US" sz="4000" dirty="0"/>
           </a:p>
@@ -14774,6 +16051,2941 @@
                 <a:ea typeface="Calibri" pitchFamily="34" charset="-122"/>
                 <a:cs typeface="Calibri" pitchFamily="34" charset="-120"/>
               </a:rPr>
+              <a:t>BOARD SUMMARY</a:t>
+            </a:r>
+            <a:endParaRPr lang="en-US" sz="1400" dirty="0"/>
+          </a:p>
+        </p:txBody>
+      </p:sp>
+      <p:sp>
+        <p:nvSpPr>
+          <p:cNvPr id="3" name="Text 1"/>
+          <p:cNvSpPr/>
+          <p:nvPr/>
+        </p:nvSpPr>
+        <p:spPr>
+          <a:xfrm>
+            <a:off x="365760" y="1005840"/>
+            <a:ext cx="11460175" cy="731520"/>
+          </a:xfrm>
+          <a:prstGeom prst="rect">
+            <a:avLst/>
+          </a:prstGeom>
+          <a:noFill/>
+          <a:ln/>
+        </p:spPr>
+        <p:txBody>
+          <a:bodyPr wrap="square" lIns="0" tIns="0" rIns="0" bIns="0" rtlCol="0" anchor="ctr">
+            <a:normAutofit/>
+          </a:bodyPr>
+          <a:lstStyle/>
+          <a:p>
+            <a:pPr algn="ctr" indent="0" marL="0">
+              <a:buNone/>
+            </a:pPr>
+            <a:r>
+              <a:rPr lang="en-US" sz="3600" b="1" dirty="0">
+                <a:solidFill>
+                  <a:srgbClr val="990011"/>
+                </a:solidFill>
+                <a:latin typeface="Times New Roman" pitchFamily="34" charset="0"/>
+                <a:ea typeface="Times New Roman" pitchFamily="34" charset="-122"/>
+                <a:cs typeface="Times New Roman" pitchFamily="34" charset="-120"/>
+              </a:rPr>
+              <a:t>4. Atmospheric Pressure</a:t>
+            </a:r>
+            <a:endParaRPr lang="en-US" sz="3600" dirty="0"/>
+          </a:p>
+        </p:txBody>
+      </p:sp>
+      <p:sp>
+        <p:nvSpPr>
+          <p:cNvPr id="4" name="Text 2"/>
+          <p:cNvSpPr/>
+          <p:nvPr/>
+        </p:nvSpPr>
+        <p:spPr>
+          <a:xfrm>
+            <a:off x="365760" y="1783080"/>
+            <a:ext cx="4846320" cy="4617720"/>
+          </a:xfrm>
+          <a:prstGeom prst="rect">
+            <a:avLst/>
+          </a:prstGeom>
+          <a:noFill/>
+          <a:ln/>
+        </p:spPr>
+        <p:txBody>
+          <a:bodyPr wrap="square" lIns="0" tIns="0" rIns="0" bIns="0" rtlCol="0" anchor="t"/>
+          <a:lstStyle/>
+          <a:p>
+            <a:pPr algn="l" indent="0" marL="0">
+              <a:spcAft>
+                <a:spcPts val="800"/>
+              </a:spcAft>
+              <a:buNone/>
+            </a:pPr>
+            <a:r>
+              <a:rPr lang="en-US" sz="3600" i="1" dirty="0">
+                <a:solidFill>
+                  <a:srgbClr val="111111"/>
+                </a:solidFill>
+                <a:latin typeface="Times New Roman" pitchFamily="34" charset="0"/>
+                <a:ea typeface="Times New Roman" pitchFamily="34" charset="-122"/>
+                <a:cs typeface="Times New Roman" pitchFamily="34" charset="-120"/>
+              </a:rPr>
+              <a:t>Air pressure is measured as follows:</a:t>
+            </a:r>
+            <a:endParaRPr lang="en-US" sz="3600" dirty="0"/>
+          </a:p>
+          <a:p>
+            <a:pPr algn="l" indent="0" marL="0">
+              <a:spcAft>
+                <a:spcPts val="800"/>
+              </a:spcAft>
+              <a:buNone/>
+            </a:pPr>
+            <a:r>
+              <a:rPr lang="en-US" sz="3600" b="1" dirty="0">
+                <a:solidFill>
+                  <a:srgbClr val="111111"/>
+                </a:solidFill>
+                <a:latin typeface="Times New Roman" pitchFamily="34" charset="0"/>
+                <a:ea typeface="Times New Roman" pitchFamily="34" charset="-122"/>
+                <a:cs typeface="Times New Roman" pitchFamily="34" charset="-120"/>
+              </a:rPr>
+              <a:t>Barometer: </a:t>
+            </a:r>
+            <a:pPr algn="l" indent="0" marL="0">
+              <a:spcAft>
+                <a:spcPts val="800"/>
+              </a:spcAft>
+              <a:buNone/>
+            </a:pPr>
+            <a:r>
+              <a:rPr lang="en-US" sz="3600" dirty="0">
+                <a:solidFill>
+                  <a:srgbClr val="111111"/>
+                </a:solidFill>
+                <a:latin typeface="Times New Roman" pitchFamily="34" charset="0"/>
+                <a:ea typeface="Times New Roman" pitchFamily="34" charset="-122"/>
+                <a:cs typeface="Times New Roman" pitchFamily="34" charset="-120"/>
+              </a:rPr>
+              <a:t>It measures air pressure in millibars; the mercury barometer and the aneroid barometer are the main types.</a:t>
+            </a:r>
+            <a:endParaRPr lang="en-US" sz="3600" dirty="0"/>
+          </a:p>
+        </p:txBody>
+      </p:sp>
+      <p:pic>
+        <p:nvPicPr>
+          <p:cNvPr id="5" name="Image 0" descr="/home/claude/f4/img/v2/f4_barometer.jpg">    </p:cNvPr>
+          <p:cNvPicPr>
+            <a:picLocks noChangeAspect="1"/>
+          </p:cNvPicPr>
+          <p:nvPr/>
+        </p:nvPicPr>
+        <p:blipFill>
+          <a:blip r:embed="rId1"/>
+          <a:stretch>
+            <a:fillRect/>
+          </a:stretch>
+        </p:blipFill>
+        <p:spPr>
+          <a:xfrm>
+            <a:off x="5349240" y="2069045"/>
+            <a:ext cx="6659575" cy="3698319"/>
+          </a:xfrm>
+          <a:prstGeom prst="rect">
+            <a:avLst/>
+          </a:prstGeom>
+        </p:spPr>
+      </p:pic>
+      <p:sp>
+        <p:nvSpPr>
+          <p:cNvPr id="6" name="Text 3"/>
+          <p:cNvSpPr/>
+          <p:nvPr/>
+        </p:nvSpPr>
+        <p:spPr>
+          <a:xfrm>
+            <a:off x="5349240" y="6089904"/>
+            <a:ext cx="6659575" cy="347472"/>
+          </a:xfrm>
+          <a:prstGeom prst="rect">
+            <a:avLst/>
+          </a:prstGeom>
+          <a:noFill/>
+          <a:ln/>
+        </p:spPr>
+        <p:txBody>
+          <a:bodyPr wrap="square" lIns="0" tIns="0" rIns="0" bIns="0" rtlCol="0" anchor="ctr"/>
+          <a:lstStyle/>
+          <a:p>
+            <a:pPr algn="ctr" indent="0" marL="0">
+              <a:buNone/>
+            </a:pPr>
+            <a:r>
+              <a:rPr lang="en-US" sz="1600" i="1" dirty="0">
+                <a:solidFill>
+                  <a:srgbClr val="555555"/>
+                </a:solidFill>
+                <a:latin typeface="Times New Roman" pitchFamily="34" charset="0"/>
+                <a:ea typeface="Times New Roman" pitchFamily="34" charset="-122"/>
+                <a:cs typeface="Times New Roman" pitchFamily="34" charset="-120"/>
+              </a:rPr>
+              <a:t>Illustration: a barometer</a:t>
+            </a:r>
+            <a:endParaRPr lang="en-US" sz="1600" dirty="0"/>
+          </a:p>
+        </p:txBody>
+      </p:sp>
+      <p:sp>
+        <p:nvSpPr>
+          <p:cNvPr id="25" name="Slide Number Placeholder 0"/>
+          <p:cNvSpPr>
+            <a:spLocks noGrp="1"/>
+          </p:cNvSpPr>
+          <p:nvPr>
+            <p:ph type="sldNum" sz="quarter" idx="4294967295"/>
+          </p:nvPr>
+        </p:nvSpPr>
+        <p:spPr>
+          <a:xfrm>
+            <a:off x="27432" y="91440"/>
+            <a:ext cx="585216" cy="475488"/>
+          </a:xfrm>
+          <a:prstGeom prst="rect">
+            <a:avLst/>
+          </a:prstGeom>
+          <a:extLst>
+            <a:ext uri="{C572A759-6A51-4108-AA02-DFA0A04FC94B}">
+              <ma14:wrappingTextBoxFlag xmlns:ma14="http://schemas.microsoft.com/office/mac/drawingml/2011/main" val="0"/>
+            </a:ext>
+          </a:extLst>
+        </p:spPr>
+        <p:txBody>
+          <a:bodyPr/>
+          <a:lstStyle>
+            <a:lvl1pPr>
+              <a:defRPr sz="2000">
+                <a:solidFill>
+                  <a:srgbClr val="FFFFFF"/>
+                </a:solidFill>
+                <a:latin typeface="Calibri"/>
+                <a:ea typeface="Calibri"/>
+                <a:cs typeface="Calibri"/>
+              </a:defRPr>
+            </a:lvl1pPr>
+          </a:lstStyle>
+          <a:p>
+            <a:pPr algn="ctr"/>
+            <a:fld id="{F7021451-1387-4CA6-816F-3879F97B5CBC}" type="slidenum">
+              <a:rPr b="1" lang="en-US"/>
+              <a:t>41</a:t>
+            </a:fld>
+            <a:endParaRPr lang="en-US"/>
+          </a:p>
+        </p:txBody>
+      </p:sp>
+    </p:spTree>
+  </p:cSld>
+  <p:clrMapOvr>
+    <a:masterClrMapping/>
+  </p:clrMapOvr>
+</p:sld>
+</file>
+
+<file path=ppt/slides/slide42.xml><?xml version="1.0" encoding="utf-8"?>
+<p:sld xmlns:a="http://schemas.openxmlformats.org/drawingml/2006/main" xmlns:r="http://schemas.openxmlformats.org/officeDocument/2006/relationships" xmlns:p="http://schemas.openxmlformats.org/presentationml/2006/main">
+  <p:cSld name="Slide 42">
+    <p:spTree>
+      <p:nvGrpSpPr>
+        <p:cNvPr id="1" name=""/>
+        <p:cNvGrpSpPr/>
+        <p:nvPr/>
+      </p:nvGrpSpPr>
+      <p:grpSpPr>
+        <a:xfrm>
+          <a:off x="0" y="0"/>
+          <a:ext cx="0" cy="0"/>
+          <a:chOff x="0" y="0"/>
+          <a:chExt cx="0" cy="0"/>
+        </a:xfrm>
+      </p:grpSpPr>
+      <p:sp>
+        <p:nvSpPr>
+          <p:cNvPr id="2" name="Text 0"/>
+          <p:cNvSpPr/>
+          <p:nvPr/>
+        </p:nvSpPr>
+        <p:spPr>
+          <a:xfrm>
+            <a:off x="457200" y="713232"/>
+            <a:ext cx="11368735" cy="274320"/>
+          </a:xfrm>
+          <a:prstGeom prst="rect">
+            <a:avLst/>
+          </a:prstGeom>
+          <a:noFill/>
+          <a:ln/>
+        </p:spPr>
+        <p:txBody>
+          <a:bodyPr wrap="square" lIns="0" tIns="0" rIns="0" bIns="0" rtlCol="0" anchor="ctr"/>
+          <a:lstStyle/>
+          <a:p>
+            <a:pPr algn="r" indent="0" marL="0">
+              <a:buNone/>
+            </a:pPr>
+            <a:r>
+              <a:rPr lang="en-US" sz="1400" b="1" dirty="0">
+                <a:solidFill>
+                  <a:srgbClr val="1C3F6E"/>
+                </a:solidFill>
+                <a:latin typeface="Calibri" pitchFamily="34" charset="0"/>
+                <a:ea typeface="Calibri" pitchFamily="34" charset="-122"/>
+                <a:cs typeface="Calibri" pitchFamily="34" charset="-120"/>
+              </a:rPr>
+              <a:t>BOARD SUMMARY</a:t>
+            </a:r>
+            <a:endParaRPr lang="en-US" sz="1400" dirty="0"/>
+          </a:p>
+        </p:txBody>
+      </p:sp>
+      <p:pic>
+        <p:nvPicPr>
+          <p:cNvPr id="3" name="Image 0" descr="/home/claude/f4/img/minesec_sheet.png">    </p:cNvPr>
+          <p:cNvPicPr>
+            <a:picLocks noChangeAspect="1"/>
+          </p:cNvPicPr>
+          <p:nvPr/>
+        </p:nvPicPr>
+        <p:blipFill>
+          <a:blip r:embed="rId1"/>
+          <a:stretch>
+            <a:fillRect/>
+          </a:stretch>
+        </p:blipFill>
+        <p:spPr>
+          <a:xfrm>
+            <a:off x="0" y="658368"/>
+            <a:ext cx="5120640" cy="5833872"/>
+          </a:xfrm>
+          <a:prstGeom prst="rect">
+            <a:avLst/>
+          </a:prstGeom>
+        </p:spPr>
+      </p:pic>
+      <p:sp>
+        <p:nvSpPr>
+          <p:cNvPr id="4" name="Text 1"/>
+          <p:cNvSpPr/>
+          <p:nvPr/>
+        </p:nvSpPr>
+        <p:spPr>
+          <a:xfrm>
+            <a:off x="5349240" y="1005840"/>
+            <a:ext cx="6522415" cy="731520"/>
+          </a:xfrm>
+          <a:prstGeom prst="rect">
+            <a:avLst/>
+          </a:prstGeom>
+          <a:noFill/>
+          <a:ln/>
+        </p:spPr>
+        <p:txBody>
+          <a:bodyPr wrap="square" lIns="0" tIns="0" rIns="0" bIns="0" rtlCol="0" anchor="ctr">
+            <a:normAutofit/>
+          </a:bodyPr>
+          <a:lstStyle/>
+          <a:p>
+            <a:pPr algn="ctr" indent="0" marL="0">
+              <a:buNone/>
+            </a:pPr>
+            <a:r>
+              <a:rPr lang="en-US" sz="3600" b="1" dirty="0">
+                <a:solidFill>
+                  <a:srgbClr val="990011"/>
+                </a:solidFill>
+                <a:latin typeface="Times New Roman" pitchFamily="34" charset="0"/>
+                <a:ea typeface="Times New Roman" pitchFamily="34" charset="-122"/>
+                <a:cs typeface="Times New Roman" pitchFamily="34" charset="-120"/>
+              </a:rPr>
+              <a:t>4. Atmospheric Pressure</a:t>
+            </a:r>
+            <a:endParaRPr lang="en-US" sz="3600" dirty="0"/>
+          </a:p>
+        </p:txBody>
+      </p:sp>
+      <p:sp>
+        <p:nvSpPr>
+          <p:cNvPr id="5" name="Text 2"/>
+          <p:cNvSpPr/>
+          <p:nvPr/>
+        </p:nvSpPr>
+        <p:spPr>
+          <a:xfrm>
+            <a:off x="5349240" y="1783080"/>
+            <a:ext cx="6522415" cy="4663440"/>
+          </a:xfrm>
+          <a:prstGeom prst="rect">
+            <a:avLst/>
+          </a:prstGeom>
+          <a:noFill/>
+          <a:ln/>
+        </p:spPr>
+        <p:txBody>
+          <a:bodyPr wrap="square" lIns="0" tIns="0" rIns="0" bIns="0" rtlCol="0" anchor="t"/>
+          <a:lstStyle/>
+          <a:p>
+            <a:pPr algn="l" indent="0" marL="0">
+              <a:spcAft>
+                <a:spcPts val="800"/>
+              </a:spcAft>
+              <a:buNone/>
+            </a:pPr>
+            <a:r>
+              <a:rPr lang="en-US" sz="4000" b="1" dirty="0">
+                <a:solidFill>
+                  <a:srgbClr val="111111"/>
+                </a:solidFill>
+                <a:latin typeface="Times New Roman" pitchFamily="34" charset="0"/>
+                <a:ea typeface="Times New Roman" pitchFamily="34" charset="-122"/>
+                <a:cs typeface="Times New Roman" pitchFamily="34" charset="-120"/>
+              </a:rPr>
+              <a:t>Average value: </a:t>
+            </a:r>
+            <a:pPr algn="l" indent="0" marL="0">
+              <a:spcAft>
+                <a:spcPts val="800"/>
+              </a:spcAft>
+              <a:buNone/>
+            </a:pPr>
+            <a:r>
+              <a:rPr lang="en-US" sz="4000" dirty="0">
+                <a:solidFill>
+                  <a:srgbClr val="111111"/>
+                </a:solidFill>
+                <a:latin typeface="Times New Roman" pitchFamily="34" charset="0"/>
+                <a:ea typeface="Times New Roman" pitchFamily="34" charset="-122"/>
+                <a:cs typeface="Times New Roman" pitchFamily="34" charset="-120"/>
+              </a:rPr>
+              <a:t>Normal pressure at sea level is about 1,013 mb.</a:t>
+            </a:r>
+            <a:endParaRPr lang="en-US" sz="4000" dirty="0"/>
+          </a:p>
+          <a:p>
+            <a:pPr algn="l" indent="0" marL="0">
+              <a:spcAft>
+                <a:spcPts val="800"/>
+              </a:spcAft>
+              <a:buNone/>
+            </a:pPr>
+            <a:r>
+              <a:rPr lang="en-US" sz="4000" b="1" dirty="0">
+                <a:solidFill>
+                  <a:srgbClr val="111111"/>
+                </a:solidFill>
+                <a:latin typeface="Times New Roman" pitchFamily="34" charset="0"/>
+                <a:ea typeface="Times New Roman" pitchFamily="34" charset="-122"/>
+                <a:cs typeface="Times New Roman" pitchFamily="34" charset="-120"/>
+              </a:rPr>
+              <a:t>Meaning of changes: </a:t>
+            </a:r>
+            <a:pPr algn="l" indent="0" marL="0">
+              <a:spcAft>
+                <a:spcPts val="800"/>
+              </a:spcAft>
+              <a:buNone/>
+            </a:pPr>
+            <a:r>
+              <a:rPr lang="en-US" sz="4000" dirty="0">
+                <a:solidFill>
+                  <a:srgbClr val="111111"/>
+                </a:solidFill>
+                <a:latin typeface="Times New Roman" pitchFamily="34" charset="0"/>
+                <a:ea typeface="Times New Roman" pitchFamily="34" charset="-122"/>
+                <a:cs typeface="Times New Roman" pitchFamily="34" charset="-120"/>
+              </a:rPr>
+              <a:t>Falling pressure brings clouds and rain, while rising pressure brings dry, fine weather.</a:t>
+            </a:r>
+            <a:endParaRPr lang="en-US" sz="4000" dirty="0"/>
+          </a:p>
+        </p:txBody>
+      </p:sp>
+      <p:sp>
+        <p:nvSpPr>
+          <p:cNvPr id="25" name="Slide Number Placeholder 0"/>
+          <p:cNvSpPr>
+            <a:spLocks noGrp="1"/>
+          </p:cNvSpPr>
+          <p:nvPr>
+            <p:ph type="sldNum" sz="quarter" idx="4294967295"/>
+          </p:nvPr>
+        </p:nvSpPr>
+        <p:spPr>
+          <a:xfrm>
+            <a:off x="27432" y="91440"/>
+            <a:ext cx="585216" cy="475488"/>
+          </a:xfrm>
+          <a:prstGeom prst="rect">
+            <a:avLst/>
+          </a:prstGeom>
+          <a:extLst>
+            <a:ext uri="{C572A759-6A51-4108-AA02-DFA0A04FC94B}">
+              <ma14:wrappingTextBoxFlag xmlns:ma14="http://schemas.microsoft.com/office/mac/drawingml/2011/main" val="0"/>
+            </a:ext>
+          </a:extLst>
+        </p:spPr>
+        <p:txBody>
+          <a:bodyPr/>
+          <a:lstStyle>
+            <a:lvl1pPr>
+              <a:defRPr sz="2000">
+                <a:solidFill>
+                  <a:srgbClr val="FFFFFF"/>
+                </a:solidFill>
+                <a:latin typeface="Calibri"/>
+                <a:ea typeface="Calibri"/>
+                <a:cs typeface="Calibri"/>
+              </a:defRPr>
+            </a:lvl1pPr>
+          </a:lstStyle>
+          <a:p>
+            <a:pPr algn="ctr"/>
+            <a:fld id="{F7021451-1387-4CA6-816F-3879F97B5CBC}" type="slidenum">
+              <a:rPr b="1" lang="en-US"/>
+              <a:t>42</a:t>
+            </a:fld>
+            <a:endParaRPr lang="en-US"/>
+          </a:p>
+        </p:txBody>
+      </p:sp>
+    </p:spTree>
+  </p:cSld>
+  <p:clrMapOvr>
+    <a:masterClrMapping/>
+  </p:clrMapOvr>
+</p:sld>
+</file>
+
+<file path=ppt/slides/slide43.xml><?xml version="1.0" encoding="utf-8"?>
+<p:sld xmlns:a="http://schemas.openxmlformats.org/drawingml/2006/main" xmlns:r="http://schemas.openxmlformats.org/officeDocument/2006/relationships" xmlns:p="http://schemas.openxmlformats.org/presentationml/2006/main">
+  <p:cSld name="Slide 43">
+    <p:spTree>
+      <p:nvGrpSpPr>
+        <p:cNvPr id="1" name=""/>
+        <p:cNvGrpSpPr/>
+        <p:nvPr/>
+      </p:nvGrpSpPr>
+      <p:grpSpPr>
+        <a:xfrm>
+          <a:off x="0" y="0"/>
+          <a:ext cx="0" cy="0"/>
+          <a:chOff x="0" y="0"/>
+          <a:chExt cx="0" cy="0"/>
+        </a:xfrm>
+      </p:grpSpPr>
+      <p:sp>
+        <p:nvSpPr>
+          <p:cNvPr id="2" name="Text 0"/>
+          <p:cNvSpPr/>
+          <p:nvPr/>
+        </p:nvSpPr>
+        <p:spPr>
+          <a:xfrm>
+            <a:off x="457200" y="713232"/>
+            <a:ext cx="11368735" cy="274320"/>
+          </a:xfrm>
+          <a:prstGeom prst="rect">
+            <a:avLst/>
+          </a:prstGeom>
+          <a:noFill/>
+          <a:ln/>
+        </p:spPr>
+        <p:txBody>
+          <a:bodyPr wrap="square" lIns="0" tIns="0" rIns="0" bIns="0" rtlCol="0" anchor="ctr"/>
+          <a:lstStyle/>
+          <a:p>
+            <a:pPr algn="r" indent="0" marL="0">
+              <a:buNone/>
+            </a:pPr>
+            <a:r>
+              <a:rPr lang="en-US" sz="1400" b="1" dirty="0">
+                <a:solidFill>
+                  <a:srgbClr val="1C3F6E"/>
+                </a:solidFill>
+                <a:latin typeface="Calibri" pitchFamily="34" charset="0"/>
+                <a:ea typeface="Calibri" pitchFamily="34" charset="-122"/>
+                <a:cs typeface="Calibri" pitchFamily="34" charset="-120"/>
+              </a:rPr>
+              <a:t>BOARD SUMMARY</a:t>
+            </a:r>
+            <a:endParaRPr lang="en-US" sz="1400" dirty="0"/>
+          </a:p>
+        </p:txBody>
+      </p:sp>
+      <p:pic>
+        <p:nvPicPr>
+          <p:cNvPr id="3" name="Image 0" descr="/home/claude/f4/img/minesec_sheet.png">    </p:cNvPr>
+          <p:cNvPicPr>
+            <a:picLocks noChangeAspect="1"/>
+          </p:cNvPicPr>
+          <p:nvPr/>
+        </p:nvPicPr>
+        <p:blipFill>
+          <a:blip r:embed="rId1"/>
+          <a:stretch>
+            <a:fillRect/>
+          </a:stretch>
+        </p:blipFill>
+        <p:spPr>
+          <a:xfrm>
+            <a:off x="0" y="658368"/>
+            <a:ext cx="3840480" cy="5833872"/>
+          </a:xfrm>
+          <a:prstGeom prst="rect">
+            <a:avLst/>
+          </a:prstGeom>
+        </p:spPr>
+      </p:pic>
+      <p:sp>
+        <p:nvSpPr>
+          <p:cNvPr id="4" name="Text 1"/>
+          <p:cNvSpPr/>
+          <p:nvPr/>
+        </p:nvSpPr>
+        <p:spPr>
+          <a:xfrm>
+            <a:off x="4069080" y="1005840"/>
+            <a:ext cx="7802575" cy="731520"/>
+          </a:xfrm>
+          <a:prstGeom prst="rect">
+            <a:avLst/>
+          </a:prstGeom>
+          <a:noFill/>
+          <a:ln/>
+        </p:spPr>
+        <p:txBody>
+          <a:bodyPr wrap="square" lIns="0" tIns="0" rIns="0" bIns="0" rtlCol="0" anchor="ctr">
+            <a:normAutofit/>
+          </a:bodyPr>
+          <a:lstStyle/>
+          <a:p>
+            <a:pPr algn="ctr" indent="0" marL="0">
+              <a:buNone/>
+            </a:pPr>
+            <a:r>
+              <a:rPr lang="en-US" sz="3600" b="1" dirty="0">
+                <a:solidFill>
+                  <a:srgbClr val="990011"/>
+                </a:solidFill>
+                <a:latin typeface="Times New Roman" pitchFamily="34" charset="0"/>
+                <a:ea typeface="Times New Roman" pitchFamily="34" charset="-122"/>
+                <a:cs typeface="Times New Roman" pitchFamily="34" charset="-120"/>
+              </a:rPr>
+              <a:t>5. Amount of Sunshine</a:t>
+            </a:r>
+            <a:endParaRPr lang="en-US" sz="3600" dirty="0"/>
+          </a:p>
+        </p:txBody>
+      </p:sp>
+      <p:sp>
+        <p:nvSpPr>
+          <p:cNvPr id="5" name="Text 2"/>
+          <p:cNvSpPr/>
+          <p:nvPr/>
+        </p:nvSpPr>
+        <p:spPr>
+          <a:xfrm>
+            <a:off x="4069080" y="1783080"/>
+            <a:ext cx="7802575" cy="4663440"/>
+          </a:xfrm>
+          <a:prstGeom prst="rect">
+            <a:avLst/>
+          </a:prstGeom>
+          <a:noFill/>
+          <a:ln/>
+        </p:spPr>
+        <p:txBody>
+          <a:bodyPr wrap="square" lIns="0" tIns="0" rIns="0" bIns="0" rtlCol="0" anchor="t"/>
+          <a:lstStyle/>
+          <a:p>
+            <a:pPr algn="l" indent="0" marL="0">
+              <a:spcAft>
+                <a:spcPts val="800"/>
+              </a:spcAft>
+              <a:buNone/>
+            </a:pPr>
+            <a:r>
+              <a:rPr lang="en-US" sz="4000" i="1" dirty="0">
+                <a:solidFill>
+                  <a:srgbClr val="111111"/>
+                </a:solidFill>
+                <a:latin typeface="Times New Roman" pitchFamily="34" charset="0"/>
+                <a:ea typeface="Times New Roman" pitchFamily="34" charset="-122"/>
+                <a:cs typeface="Times New Roman" pitchFamily="34" charset="-120"/>
+              </a:rPr>
+              <a:t>Sunshine is measured as follows:</a:t>
+            </a:r>
+            <a:endParaRPr lang="en-US" sz="4000" dirty="0"/>
+          </a:p>
+          <a:p>
+            <a:pPr algn="l" indent="0" marL="0">
+              <a:spcAft>
+                <a:spcPts val="800"/>
+              </a:spcAft>
+              <a:buNone/>
+            </a:pPr>
+            <a:r>
+              <a:rPr lang="en-US" sz="4000" b="1" dirty="0">
+                <a:solidFill>
+                  <a:srgbClr val="111111"/>
+                </a:solidFill>
+                <a:latin typeface="Times New Roman" pitchFamily="34" charset="0"/>
+                <a:ea typeface="Times New Roman" pitchFamily="34" charset="-122"/>
+                <a:cs typeface="Times New Roman" pitchFamily="34" charset="-120"/>
+              </a:rPr>
+              <a:t>Sunshine recorder: </a:t>
+            </a:r>
+            <a:pPr algn="l" indent="0" marL="0">
+              <a:spcAft>
+                <a:spcPts val="800"/>
+              </a:spcAft>
+              <a:buNone/>
+            </a:pPr>
+            <a:r>
+              <a:rPr lang="en-US" sz="4000" dirty="0">
+                <a:solidFill>
+                  <a:srgbClr val="111111"/>
+                </a:solidFill>
+                <a:latin typeface="Times New Roman" pitchFamily="34" charset="0"/>
+                <a:ea typeface="Times New Roman" pitchFamily="34" charset="-122"/>
+                <a:cs typeface="Times New Roman" pitchFamily="34" charset="-120"/>
+              </a:rPr>
+              <a:t>A glass ball focuses the rays of the Sun and burns a line on a paper card.</a:t>
+            </a:r>
+            <a:endParaRPr lang="en-US" sz="4000" dirty="0"/>
+          </a:p>
+          <a:p>
+            <a:pPr algn="l" indent="0" marL="0">
+              <a:spcAft>
+                <a:spcPts val="800"/>
+              </a:spcAft>
+              <a:buNone/>
+            </a:pPr>
+            <a:r>
+              <a:rPr lang="en-US" sz="4000" b="1" dirty="0">
+                <a:solidFill>
+                  <a:srgbClr val="111111"/>
+                </a:solidFill>
+                <a:latin typeface="Times New Roman" pitchFamily="34" charset="0"/>
+                <a:ea typeface="Times New Roman" pitchFamily="34" charset="-122"/>
+                <a:cs typeface="Times New Roman" pitchFamily="34" charset="-120"/>
+              </a:rPr>
+              <a:t>Unit: </a:t>
+            </a:r>
+            <a:pPr algn="l" indent="0" marL="0">
+              <a:spcAft>
+                <a:spcPts val="800"/>
+              </a:spcAft>
+              <a:buNone/>
+            </a:pPr>
+            <a:r>
+              <a:rPr lang="en-US" sz="4000" dirty="0">
+                <a:solidFill>
+                  <a:srgbClr val="111111"/>
+                </a:solidFill>
+                <a:latin typeface="Times New Roman" pitchFamily="34" charset="0"/>
+                <a:ea typeface="Times New Roman" pitchFamily="34" charset="-122"/>
+                <a:cs typeface="Times New Roman" pitchFamily="34" charset="-120"/>
+              </a:rPr>
+              <a:t>Sunshine is given in hours per day.</a:t>
+            </a:r>
+            <a:endParaRPr lang="en-US" sz="4000" dirty="0"/>
+          </a:p>
+        </p:txBody>
+      </p:sp>
+      <p:sp>
+        <p:nvSpPr>
+          <p:cNvPr id="25" name="Slide Number Placeholder 0"/>
+          <p:cNvSpPr>
+            <a:spLocks noGrp="1"/>
+          </p:cNvSpPr>
+          <p:nvPr>
+            <p:ph type="sldNum" sz="quarter" idx="4294967295"/>
+          </p:nvPr>
+        </p:nvSpPr>
+        <p:spPr>
+          <a:xfrm>
+            <a:off x="27432" y="91440"/>
+            <a:ext cx="585216" cy="475488"/>
+          </a:xfrm>
+          <a:prstGeom prst="rect">
+            <a:avLst/>
+          </a:prstGeom>
+          <a:extLst>
+            <a:ext uri="{C572A759-6A51-4108-AA02-DFA0A04FC94B}">
+              <ma14:wrappingTextBoxFlag xmlns:ma14="http://schemas.microsoft.com/office/mac/drawingml/2011/main" val="0"/>
+            </a:ext>
+          </a:extLst>
+        </p:spPr>
+        <p:txBody>
+          <a:bodyPr/>
+          <a:lstStyle>
+            <a:lvl1pPr>
+              <a:defRPr sz="2000">
+                <a:solidFill>
+                  <a:srgbClr val="FFFFFF"/>
+                </a:solidFill>
+                <a:latin typeface="Calibri"/>
+                <a:ea typeface="Calibri"/>
+                <a:cs typeface="Calibri"/>
+              </a:defRPr>
+            </a:lvl1pPr>
+          </a:lstStyle>
+          <a:p>
+            <a:pPr algn="ctr"/>
+            <a:fld id="{F7021451-1387-4CA6-816F-3879F97B5CBC}" type="slidenum">
+              <a:rPr b="1" lang="en-US"/>
+              <a:t>43</a:t>
+            </a:fld>
+            <a:endParaRPr lang="en-US"/>
+          </a:p>
+        </p:txBody>
+      </p:sp>
+    </p:spTree>
+  </p:cSld>
+  <p:clrMapOvr>
+    <a:masterClrMapping/>
+  </p:clrMapOvr>
+</p:sld>
+</file>
+
+<file path=ppt/slides/slide44.xml><?xml version="1.0" encoding="utf-8"?>
+<p:sld xmlns:a="http://schemas.openxmlformats.org/drawingml/2006/main" xmlns:r="http://schemas.openxmlformats.org/officeDocument/2006/relationships" xmlns:p="http://schemas.openxmlformats.org/presentationml/2006/main">
+  <p:cSld name="Slide 44">
+    <p:spTree>
+      <p:nvGrpSpPr>
+        <p:cNvPr id="1" name=""/>
+        <p:cNvGrpSpPr/>
+        <p:nvPr/>
+      </p:nvGrpSpPr>
+      <p:grpSpPr>
+        <a:xfrm>
+          <a:off x="0" y="0"/>
+          <a:ext cx="0" cy="0"/>
+          <a:chOff x="0" y="0"/>
+          <a:chExt cx="0" cy="0"/>
+        </a:xfrm>
+      </p:grpSpPr>
+      <p:sp>
+        <p:nvSpPr>
+          <p:cNvPr id="2" name="Text 0"/>
+          <p:cNvSpPr/>
+          <p:nvPr/>
+        </p:nvSpPr>
+        <p:spPr>
+          <a:xfrm>
+            <a:off x="457200" y="713232"/>
+            <a:ext cx="11368735" cy="274320"/>
+          </a:xfrm>
+          <a:prstGeom prst="rect">
+            <a:avLst/>
+          </a:prstGeom>
+          <a:noFill/>
+          <a:ln/>
+        </p:spPr>
+        <p:txBody>
+          <a:bodyPr wrap="square" lIns="0" tIns="0" rIns="0" bIns="0" rtlCol="0" anchor="ctr"/>
+          <a:lstStyle/>
+          <a:p>
+            <a:pPr algn="r" indent="0" marL="0">
+              <a:buNone/>
+            </a:pPr>
+            <a:r>
+              <a:rPr lang="en-US" sz="1400" b="1" dirty="0">
+                <a:solidFill>
+                  <a:srgbClr val="1C3F6E"/>
+                </a:solidFill>
+                <a:latin typeface="Calibri" pitchFamily="34" charset="0"/>
+                <a:ea typeface="Calibri" pitchFamily="34" charset="-122"/>
+                <a:cs typeface="Calibri" pitchFamily="34" charset="-120"/>
+              </a:rPr>
+              <a:t>BOARD SUMMARY</a:t>
+            </a:r>
+            <a:endParaRPr lang="en-US" sz="1400" dirty="0"/>
+          </a:p>
+        </p:txBody>
+      </p:sp>
+      <p:pic>
+        <p:nvPicPr>
+          <p:cNvPr id="3" name="Image 0" descr="/home/claude/f4/img/minesec_sheet.png">    </p:cNvPr>
+          <p:cNvPicPr>
+            <a:picLocks noChangeAspect="1"/>
+          </p:cNvPicPr>
+          <p:nvPr/>
+        </p:nvPicPr>
+        <p:blipFill>
+          <a:blip r:embed="rId1"/>
+          <a:stretch>
+            <a:fillRect/>
+          </a:stretch>
+        </p:blipFill>
+        <p:spPr>
+          <a:xfrm>
+            <a:off x="0" y="658368"/>
+            <a:ext cx="5120640" cy="5833872"/>
+          </a:xfrm>
+          <a:prstGeom prst="rect">
+            <a:avLst/>
+          </a:prstGeom>
+        </p:spPr>
+      </p:pic>
+      <p:sp>
+        <p:nvSpPr>
+          <p:cNvPr id="4" name="Text 1"/>
+          <p:cNvSpPr/>
+          <p:nvPr/>
+        </p:nvSpPr>
+        <p:spPr>
+          <a:xfrm>
+            <a:off x="5349240" y="1005840"/>
+            <a:ext cx="6522415" cy="731520"/>
+          </a:xfrm>
+          <a:prstGeom prst="rect">
+            <a:avLst/>
+          </a:prstGeom>
+          <a:noFill/>
+          <a:ln/>
+        </p:spPr>
+        <p:txBody>
+          <a:bodyPr wrap="square" lIns="0" tIns="0" rIns="0" bIns="0" rtlCol="0" anchor="ctr">
+            <a:normAutofit/>
+          </a:bodyPr>
+          <a:lstStyle/>
+          <a:p>
+            <a:pPr algn="ctr" indent="0" marL="0">
+              <a:buNone/>
+            </a:pPr>
+            <a:r>
+              <a:rPr lang="en-US" sz="3600" b="1" dirty="0">
+                <a:solidFill>
+                  <a:srgbClr val="990011"/>
+                </a:solidFill>
+                <a:latin typeface="Times New Roman" pitchFamily="34" charset="0"/>
+                <a:ea typeface="Times New Roman" pitchFamily="34" charset="-122"/>
+                <a:cs typeface="Times New Roman" pitchFamily="34" charset="-120"/>
+              </a:rPr>
+              <a:t>5. Amount of Sunshine (continued)</a:t>
+            </a:r>
+            <a:endParaRPr lang="en-US" sz="3600" dirty="0"/>
+          </a:p>
+        </p:txBody>
+      </p:sp>
+      <p:sp>
+        <p:nvSpPr>
+          <p:cNvPr id="5" name="Text 2"/>
+          <p:cNvSpPr/>
+          <p:nvPr/>
+        </p:nvSpPr>
+        <p:spPr>
+          <a:xfrm>
+            <a:off x="5349240" y="1783080"/>
+            <a:ext cx="6522415" cy="4663440"/>
+          </a:xfrm>
+          <a:prstGeom prst="rect">
+            <a:avLst/>
+          </a:prstGeom>
+          <a:noFill/>
+          <a:ln/>
+        </p:spPr>
+        <p:txBody>
+          <a:bodyPr wrap="square" lIns="0" tIns="0" rIns="0" bIns="0" rtlCol="0" anchor="t"/>
+          <a:lstStyle/>
+          <a:p>
+            <a:pPr algn="l" indent="0" marL="0">
+              <a:spcAft>
+                <a:spcPts val="800"/>
+              </a:spcAft>
+              <a:buNone/>
+            </a:pPr>
+            <a:r>
+              <a:rPr lang="en-US" sz="4000" b="1" dirty="0">
+                <a:solidFill>
+                  <a:srgbClr val="111111"/>
+                </a:solidFill>
+                <a:latin typeface="Times New Roman" pitchFamily="34" charset="0"/>
+                <a:ea typeface="Times New Roman" pitchFamily="34" charset="-122"/>
+                <a:cs typeface="Times New Roman" pitchFamily="34" charset="-120"/>
+              </a:rPr>
+              <a:t>Example: </a:t>
+            </a:r>
+            <a:pPr algn="l" indent="0" marL="0">
+              <a:spcAft>
+                <a:spcPts val="800"/>
+              </a:spcAft>
+              <a:buNone/>
+            </a:pPr>
+            <a:r>
+              <a:rPr lang="en-US" sz="4000" dirty="0">
+                <a:solidFill>
+                  <a:srgbClr val="111111"/>
+                </a:solidFill>
+                <a:latin typeface="Times New Roman" pitchFamily="34" charset="0"/>
+                <a:ea typeface="Times New Roman" pitchFamily="34" charset="-122"/>
+                <a:cs typeface="Times New Roman" pitchFamily="34" charset="-120"/>
+              </a:rPr>
+              <a:t>Garoua has many hours of sunshine in the dry season and fewer in the cloudy rainy season.</a:t>
+            </a:r>
+            <a:endParaRPr lang="en-US" sz="4000" dirty="0"/>
+          </a:p>
+        </p:txBody>
+      </p:sp>
+      <p:sp>
+        <p:nvSpPr>
+          <p:cNvPr id="25" name="Slide Number Placeholder 0"/>
+          <p:cNvSpPr>
+            <a:spLocks noGrp="1"/>
+          </p:cNvSpPr>
+          <p:nvPr>
+            <p:ph type="sldNum" sz="quarter" idx="4294967295"/>
+          </p:nvPr>
+        </p:nvSpPr>
+        <p:spPr>
+          <a:xfrm>
+            <a:off x="27432" y="91440"/>
+            <a:ext cx="585216" cy="475488"/>
+          </a:xfrm>
+          <a:prstGeom prst="rect">
+            <a:avLst/>
+          </a:prstGeom>
+          <a:extLst>
+            <a:ext uri="{C572A759-6A51-4108-AA02-DFA0A04FC94B}">
+              <ma14:wrappingTextBoxFlag xmlns:ma14="http://schemas.microsoft.com/office/mac/drawingml/2011/main" val="0"/>
+            </a:ext>
+          </a:extLst>
+        </p:spPr>
+        <p:txBody>
+          <a:bodyPr/>
+          <a:lstStyle>
+            <a:lvl1pPr>
+              <a:defRPr sz="2000">
+                <a:solidFill>
+                  <a:srgbClr val="FFFFFF"/>
+                </a:solidFill>
+                <a:latin typeface="Calibri"/>
+                <a:ea typeface="Calibri"/>
+                <a:cs typeface="Calibri"/>
+              </a:defRPr>
+            </a:lvl1pPr>
+          </a:lstStyle>
+          <a:p>
+            <a:pPr algn="ctr"/>
+            <a:fld id="{F7021451-1387-4CA6-816F-3879F97B5CBC}" type="slidenum">
+              <a:rPr b="1" lang="en-US"/>
+              <a:t>44</a:t>
+            </a:fld>
+            <a:endParaRPr lang="en-US"/>
+          </a:p>
+        </p:txBody>
+      </p:sp>
+    </p:spTree>
+  </p:cSld>
+  <p:clrMapOvr>
+    <a:masterClrMapping/>
+  </p:clrMapOvr>
+</p:sld>
+</file>
+
+<file path=ppt/slides/slide45.xml><?xml version="1.0" encoding="utf-8"?>
+<p:sld xmlns:a="http://schemas.openxmlformats.org/drawingml/2006/main" xmlns:r="http://schemas.openxmlformats.org/officeDocument/2006/relationships" xmlns:p="http://schemas.openxmlformats.org/presentationml/2006/main">
+  <p:cSld name="Slide 45">
+    <p:spTree>
+      <p:nvGrpSpPr>
+        <p:cNvPr id="1" name=""/>
+        <p:cNvGrpSpPr/>
+        <p:nvPr/>
+      </p:nvGrpSpPr>
+      <p:grpSpPr>
+        <a:xfrm>
+          <a:off x="0" y="0"/>
+          <a:ext cx="0" cy="0"/>
+          <a:chOff x="0" y="0"/>
+          <a:chExt cx="0" cy="0"/>
+        </a:xfrm>
+      </p:grpSpPr>
+      <p:sp>
+        <p:nvSpPr>
+          <p:cNvPr id="2" name="Text 0"/>
+          <p:cNvSpPr/>
+          <p:nvPr/>
+        </p:nvSpPr>
+        <p:spPr>
+          <a:xfrm>
+            <a:off x="457200" y="713232"/>
+            <a:ext cx="11368735" cy="274320"/>
+          </a:xfrm>
+          <a:prstGeom prst="rect">
+            <a:avLst/>
+          </a:prstGeom>
+          <a:noFill/>
+          <a:ln/>
+        </p:spPr>
+        <p:txBody>
+          <a:bodyPr wrap="square" lIns="0" tIns="0" rIns="0" bIns="0" rtlCol="0" anchor="ctr"/>
+          <a:lstStyle/>
+          <a:p>
+            <a:pPr algn="r" indent="0" marL="0">
+              <a:buNone/>
+            </a:pPr>
+            <a:r>
+              <a:rPr lang="en-US" sz="1400" b="1" dirty="0">
+                <a:solidFill>
+                  <a:srgbClr val="1C3F6E"/>
+                </a:solidFill>
+                <a:latin typeface="Calibri" pitchFamily="34" charset="0"/>
+                <a:ea typeface="Calibri" pitchFamily="34" charset="-122"/>
+                <a:cs typeface="Calibri" pitchFamily="34" charset="-120"/>
+              </a:rPr>
+              <a:t>FORMATIVE EVALUATION</a:t>
+            </a:r>
+            <a:endParaRPr lang="en-US" sz="1400" dirty="0"/>
+          </a:p>
+        </p:txBody>
+      </p:sp>
+      <p:pic>
+        <p:nvPicPr>
+          <p:cNvPr id="3" name="Image 0" descr="/home/claude/f4/img/minesec_sheet.png">    </p:cNvPr>
+          <p:cNvPicPr>
+            <a:picLocks noChangeAspect="1"/>
+          </p:cNvPicPr>
+          <p:nvPr/>
+        </p:nvPicPr>
+        <p:blipFill>
+          <a:blip r:embed="rId1"/>
+          <a:stretch>
+            <a:fillRect/>
+          </a:stretch>
+        </p:blipFill>
+        <p:spPr>
+          <a:xfrm>
+            <a:off x="0" y="658368"/>
+            <a:ext cx="5120640" cy="5833872"/>
+          </a:xfrm>
+          <a:prstGeom prst="rect">
+            <a:avLst/>
+          </a:prstGeom>
+        </p:spPr>
+      </p:pic>
+      <p:sp>
+        <p:nvSpPr>
+          <p:cNvPr id="4" name="Text 1"/>
+          <p:cNvSpPr/>
+          <p:nvPr/>
+        </p:nvSpPr>
+        <p:spPr>
+          <a:xfrm>
+            <a:off x="5349240" y="1005840"/>
+            <a:ext cx="6522415" cy="731520"/>
+          </a:xfrm>
+          <a:prstGeom prst="rect">
+            <a:avLst/>
+          </a:prstGeom>
+          <a:noFill/>
+          <a:ln/>
+        </p:spPr>
+        <p:txBody>
+          <a:bodyPr wrap="square" lIns="0" tIns="0" rIns="0" bIns="0" rtlCol="0" anchor="ctr">
+            <a:normAutofit/>
+          </a:bodyPr>
+          <a:lstStyle/>
+          <a:p>
+            <a:pPr algn="ctr" indent="0" marL="0">
+              <a:buNone/>
+            </a:pPr>
+            <a:r>
+              <a:rPr lang="en-US" sz="3600" b="1" dirty="0">
+                <a:solidFill>
+                  <a:srgbClr val="990011"/>
+                </a:solidFill>
+                <a:latin typeface="Times New Roman" pitchFamily="34" charset="0"/>
+                <a:ea typeface="Times New Roman" pitchFamily="34" charset="-122"/>
+                <a:cs typeface="Times New Roman" pitchFamily="34" charset="-120"/>
+              </a:rPr>
+              <a:t>Evaluation 1</a:t>
+            </a:r>
+            <a:endParaRPr lang="en-US" sz="3600" dirty="0"/>
+          </a:p>
+        </p:txBody>
+      </p:sp>
+      <p:sp>
+        <p:nvSpPr>
+          <p:cNvPr id="5" name="Text 2"/>
+          <p:cNvSpPr/>
+          <p:nvPr/>
+        </p:nvSpPr>
+        <p:spPr>
+          <a:xfrm>
+            <a:off x="5349240" y="1783080"/>
+            <a:ext cx="6522415" cy="4663440"/>
+          </a:xfrm>
+          <a:prstGeom prst="rect">
+            <a:avLst/>
+          </a:prstGeom>
+          <a:noFill/>
+          <a:ln/>
+        </p:spPr>
+        <p:txBody>
+          <a:bodyPr wrap="square" lIns="0" tIns="0" rIns="0" bIns="0" rtlCol="0" anchor="t"/>
+          <a:lstStyle/>
+          <a:p>
+            <a:pPr algn="l" indent="0" marL="0">
+              <a:spcAft>
+                <a:spcPts val="800"/>
+              </a:spcAft>
+              <a:buNone/>
+            </a:pPr>
+            <a:r>
+              <a:rPr lang="en-US" sz="4000" dirty="0">
+                <a:solidFill>
+                  <a:srgbClr val="111111"/>
+                </a:solidFill>
+                <a:latin typeface="Times New Roman" pitchFamily="34" charset="0"/>
+                <a:ea typeface="Times New Roman" pitchFamily="34" charset="-122"/>
+                <a:cs typeface="Times New Roman" pitchFamily="34" charset="-120"/>
+              </a:rPr>
+              <a:t>What is humidity?</a:t>
+            </a:r>
+            <a:endParaRPr lang="en-US" sz="4000" dirty="0"/>
+          </a:p>
+        </p:txBody>
+      </p:sp>
+      <p:sp>
+        <p:nvSpPr>
+          <p:cNvPr id="25" name="Slide Number Placeholder 0"/>
+          <p:cNvSpPr>
+            <a:spLocks noGrp="1"/>
+          </p:cNvSpPr>
+          <p:nvPr>
+            <p:ph type="sldNum" sz="quarter" idx="4294967295"/>
+          </p:nvPr>
+        </p:nvSpPr>
+        <p:spPr>
+          <a:xfrm>
+            <a:off x="27432" y="91440"/>
+            <a:ext cx="585216" cy="475488"/>
+          </a:xfrm>
+          <a:prstGeom prst="rect">
+            <a:avLst/>
+          </a:prstGeom>
+          <a:extLst>
+            <a:ext uri="{C572A759-6A51-4108-AA02-DFA0A04FC94B}">
+              <ma14:wrappingTextBoxFlag xmlns:ma14="http://schemas.microsoft.com/office/mac/drawingml/2011/main" val="0"/>
+            </a:ext>
+          </a:extLst>
+        </p:spPr>
+        <p:txBody>
+          <a:bodyPr/>
+          <a:lstStyle>
+            <a:lvl1pPr>
+              <a:defRPr sz="2000">
+                <a:solidFill>
+                  <a:srgbClr val="FFFFFF"/>
+                </a:solidFill>
+                <a:latin typeface="Calibri"/>
+                <a:ea typeface="Calibri"/>
+                <a:cs typeface="Calibri"/>
+              </a:defRPr>
+            </a:lvl1pPr>
+          </a:lstStyle>
+          <a:p>
+            <a:pPr algn="ctr"/>
+            <a:fld id="{F7021451-1387-4CA6-816F-3879F97B5CBC}" type="slidenum">
+              <a:rPr b="1" lang="en-US"/>
+              <a:t>45</a:t>
+            </a:fld>
+            <a:endParaRPr lang="en-US"/>
+          </a:p>
+        </p:txBody>
+      </p:sp>
+    </p:spTree>
+  </p:cSld>
+  <p:clrMapOvr>
+    <a:masterClrMapping/>
+  </p:clrMapOvr>
+</p:sld>
+</file>
+
+<file path=ppt/slides/slide46.xml><?xml version="1.0" encoding="utf-8"?>
+<p:sld xmlns:a="http://schemas.openxmlformats.org/drawingml/2006/main" xmlns:r="http://schemas.openxmlformats.org/officeDocument/2006/relationships" xmlns:p="http://schemas.openxmlformats.org/presentationml/2006/main">
+  <p:cSld name="Slide 46">
+    <p:spTree>
+      <p:nvGrpSpPr>
+        <p:cNvPr id="1" name=""/>
+        <p:cNvGrpSpPr/>
+        <p:nvPr/>
+      </p:nvGrpSpPr>
+      <p:grpSpPr>
+        <a:xfrm>
+          <a:off x="0" y="0"/>
+          <a:ext cx="0" cy="0"/>
+          <a:chOff x="0" y="0"/>
+          <a:chExt cx="0" cy="0"/>
+        </a:xfrm>
+      </p:grpSpPr>
+      <p:sp>
+        <p:nvSpPr>
+          <p:cNvPr id="2" name="Text 0"/>
+          <p:cNvSpPr/>
+          <p:nvPr/>
+        </p:nvSpPr>
+        <p:spPr>
+          <a:xfrm>
+            <a:off x="457200" y="713232"/>
+            <a:ext cx="11368735" cy="274320"/>
+          </a:xfrm>
+          <a:prstGeom prst="rect">
+            <a:avLst/>
+          </a:prstGeom>
+          <a:noFill/>
+          <a:ln/>
+        </p:spPr>
+        <p:txBody>
+          <a:bodyPr wrap="square" lIns="0" tIns="0" rIns="0" bIns="0" rtlCol="0" anchor="ctr"/>
+          <a:lstStyle/>
+          <a:p>
+            <a:pPr algn="r" indent="0" marL="0">
+              <a:buNone/>
+            </a:pPr>
+            <a:r>
+              <a:rPr lang="en-US" sz="1400" b="1" dirty="0">
+                <a:solidFill>
+                  <a:srgbClr val="1C3F6E"/>
+                </a:solidFill>
+                <a:latin typeface="Calibri" pitchFamily="34" charset="0"/>
+                <a:ea typeface="Calibri" pitchFamily="34" charset="-122"/>
+                <a:cs typeface="Calibri" pitchFamily="34" charset="-120"/>
+              </a:rPr>
+              <a:t>FORMATIVE EVALUATION</a:t>
+            </a:r>
+            <a:endParaRPr lang="en-US" sz="1400" dirty="0"/>
+          </a:p>
+        </p:txBody>
+      </p:sp>
+      <p:pic>
+        <p:nvPicPr>
+          <p:cNvPr id="3" name="Image 0" descr="/home/claude/f4/img/minesec_sheet.png">    </p:cNvPr>
+          <p:cNvPicPr>
+            <a:picLocks noChangeAspect="1"/>
+          </p:cNvPicPr>
+          <p:nvPr/>
+        </p:nvPicPr>
+        <p:blipFill>
+          <a:blip r:embed="rId1"/>
+          <a:stretch>
+            <a:fillRect/>
+          </a:stretch>
+        </p:blipFill>
+        <p:spPr>
+          <a:xfrm>
+            <a:off x="0" y="658368"/>
+            <a:ext cx="5120640" cy="5833872"/>
+          </a:xfrm>
+          <a:prstGeom prst="rect">
+            <a:avLst/>
+          </a:prstGeom>
+        </p:spPr>
+      </p:pic>
+      <p:sp>
+        <p:nvSpPr>
+          <p:cNvPr id="4" name="Text 1"/>
+          <p:cNvSpPr/>
+          <p:nvPr/>
+        </p:nvSpPr>
+        <p:spPr>
+          <a:xfrm>
+            <a:off x="5349240" y="1005840"/>
+            <a:ext cx="6522415" cy="731520"/>
+          </a:xfrm>
+          <a:prstGeom prst="rect">
+            <a:avLst/>
+          </a:prstGeom>
+          <a:noFill/>
+          <a:ln/>
+        </p:spPr>
+        <p:txBody>
+          <a:bodyPr wrap="square" lIns="0" tIns="0" rIns="0" bIns="0" rtlCol="0" anchor="ctr">
+            <a:normAutofit/>
+          </a:bodyPr>
+          <a:lstStyle/>
+          <a:p>
+            <a:pPr algn="ctr" indent="0" marL="0">
+              <a:buNone/>
+            </a:pPr>
+            <a:r>
+              <a:rPr lang="en-US" sz="3600" b="1" dirty="0">
+                <a:solidFill>
+                  <a:srgbClr val="990011"/>
+                </a:solidFill>
+                <a:latin typeface="Times New Roman" pitchFamily="34" charset="0"/>
+                <a:ea typeface="Times New Roman" pitchFamily="34" charset="-122"/>
+                <a:cs typeface="Times New Roman" pitchFamily="34" charset="-120"/>
+              </a:rPr>
+              <a:t>Expected Answer</a:t>
+            </a:r>
+            <a:endParaRPr lang="en-US" sz="3600" dirty="0"/>
+          </a:p>
+        </p:txBody>
+      </p:sp>
+      <p:sp>
+        <p:nvSpPr>
+          <p:cNvPr id="5" name="Text 2"/>
+          <p:cNvSpPr/>
+          <p:nvPr/>
+        </p:nvSpPr>
+        <p:spPr>
+          <a:xfrm>
+            <a:off x="5349240" y="1783080"/>
+            <a:ext cx="6522415" cy="4663440"/>
+          </a:xfrm>
+          <a:prstGeom prst="rect">
+            <a:avLst/>
+          </a:prstGeom>
+          <a:noFill/>
+          <a:ln/>
+        </p:spPr>
+        <p:txBody>
+          <a:bodyPr wrap="square" lIns="0" tIns="0" rIns="0" bIns="0" rtlCol="0" anchor="t"/>
+          <a:lstStyle/>
+          <a:p>
+            <a:pPr algn="l" indent="0" marL="0">
+              <a:spcAft>
+                <a:spcPts val="800"/>
+              </a:spcAft>
+              <a:buNone/>
+            </a:pPr>
+            <a:r>
+              <a:rPr lang="en-US" sz="4000" dirty="0">
+                <a:solidFill>
+                  <a:srgbClr val="111111"/>
+                </a:solidFill>
+                <a:latin typeface="Times New Roman" pitchFamily="34" charset="0"/>
+                <a:ea typeface="Times New Roman" pitchFamily="34" charset="-122"/>
+                <a:cs typeface="Times New Roman" pitchFamily="34" charset="-120"/>
+              </a:rPr>
+              <a:t>The amount of water vapour in the air.</a:t>
+            </a:r>
+            <a:endParaRPr lang="en-US" sz="4000" dirty="0"/>
+          </a:p>
+        </p:txBody>
+      </p:sp>
+      <p:sp>
+        <p:nvSpPr>
+          <p:cNvPr id="25" name="Slide Number Placeholder 0"/>
+          <p:cNvSpPr>
+            <a:spLocks noGrp="1"/>
+          </p:cNvSpPr>
+          <p:nvPr>
+            <p:ph type="sldNum" sz="quarter" idx="4294967295"/>
+          </p:nvPr>
+        </p:nvSpPr>
+        <p:spPr>
+          <a:xfrm>
+            <a:off x="27432" y="91440"/>
+            <a:ext cx="585216" cy="475488"/>
+          </a:xfrm>
+          <a:prstGeom prst="rect">
+            <a:avLst/>
+          </a:prstGeom>
+          <a:extLst>
+            <a:ext uri="{C572A759-6A51-4108-AA02-DFA0A04FC94B}">
+              <ma14:wrappingTextBoxFlag xmlns:ma14="http://schemas.microsoft.com/office/mac/drawingml/2011/main" val="0"/>
+            </a:ext>
+          </a:extLst>
+        </p:spPr>
+        <p:txBody>
+          <a:bodyPr/>
+          <a:lstStyle>
+            <a:lvl1pPr>
+              <a:defRPr sz="2000">
+                <a:solidFill>
+                  <a:srgbClr val="FFFFFF"/>
+                </a:solidFill>
+                <a:latin typeface="Calibri"/>
+                <a:ea typeface="Calibri"/>
+                <a:cs typeface="Calibri"/>
+              </a:defRPr>
+            </a:lvl1pPr>
+          </a:lstStyle>
+          <a:p>
+            <a:pPr algn="ctr"/>
+            <a:fld id="{F7021451-1387-4CA6-816F-3879F97B5CBC}" type="slidenum">
+              <a:rPr b="1" lang="en-US"/>
+              <a:t>46</a:t>
+            </a:fld>
+            <a:endParaRPr lang="en-US"/>
+          </a:p>
+        </p:txBody>
+      </p:sp>
+    </p:spTree>
+  </p:cSld>
+  <p:clrMapOvr>
+    <a:masterClrMapping/>
+  </p:clrMapOvr>
+</p:sld>
+</file>
+
+<file path=ppt/slides/slide47.xml><?xml version="1.0" encoding="utf-8"?>
+<p:sld xmlns:a="http://schemas.openxmlformats.org/drawingml/2006/main" xmlns:r="http://schemas.openxmlformats.org/officeDocument/2006/relationships" xmlns:p="http://schemas.openxmlformats.org/presentationml/2006/main">
+  <p:cSld name="Slide 47">
+    <p:spTree>
+      <p:nvGrpSpPr>
+        <p:cNvPr id="1" name=""/>
+        <p:cNvGrpSpPr/>
+        <p:nvPr/>
+      </p:nvGrpSpPr>
+      <p:grpSpPr>
+        <a:xfrm>
+          <a:off x="0" y="0"/>
+          <a:ext cx="0" cy="0"/>
+          <a:chOff x="0" y="0"/>
+          <a:chExt cx="0" cy="0"/>
+        </a:xfrm>
+      </p:grpSpPr>
+      <p:sp>
+        <p:nvSpPr>
+          <p:cNvPr id="2" name="Text 0"/>
+          <p:cNvSpPr/>
+          <p:nvPr/>
+        </p:nvSpPr>
+        <p:spPr>
+          <a:xfrm>
+            <a:off x="457200" y="713232"/>
+            <a:ext cx="11368735" cy="274320"/>
+          </a:xfrm>
+          <a:prstGeom prst="rect">
+            <a:avLst/>
+          </a:prstGeom>
+          <a:noFill/>
+          <a:ln/>
+        </p:spPr>
+        <p:txBody>
+          <a:bodyPr wrap="square" lIns="0" tIns="0" rIns="0" bIns="0" rtlCol="0" anchor="ctr"/>
+          <a:lstStyle/>
+          <a:p>
+            <a:pPr algn="r" indent="0" marL="0">
+              <a:buNone/>
+            </a:pPr>
+            <a:r>
+              <a:rPr lang="en-US" sz="1400" b="1" dirty="0">
+                <a:solidFill>
+                  <a:srgbClr val="1C3F6E"/>
+                </a:solidFill>
+                <a:latin typeface="Calibri" pitchFamily="34" charset="0"/>
+                <a:ea typeface="Calibri" pitchFamily="34" charset="-122"/>
+                <a:cs typeface="Calibri" pitchFamily="34" charset="-120"/>
+              </a:rPr>
+              <a:t>FORMATIVE EVALUATION</a:t>
+            </a:r>
+            <a:endParaRPr lang="en-US" sz="1400" dirty="0"/>
+          </a:p>
+        </p:txBody>
+      </p:sp>
+      <p:pic>
+        <p:nvPicPr>
+          <p:cNvPr id="3" name="Image 0" descr="/home/claude/f4/img/minesec_sheet.png">    </p:cNvPr>
+          <p:cNvPicPr>
+            <a:picLocks noChangeAspect="1"/>
+          </p:cNvPicPr>
+          <p:nvPr/>
+        </p:nvPicPr>
+        <p:blipFill>
+          <a:blip r:embed="rId1"/>
+          <a:stretch>
+            <a:fillRect/>
+          </a:stretch>
+        </p:blipFill>
+        <p:spPr>
+          <a:xfrm>
+            <a:off x="0" y="658368"/>
+            <a:ext cx="5120640" cy="5833872"/>
+          </a:xfrm>
+          <a:prstGeom prst="rect">
+            <a:avLst/>
+          </a:prstGeom>
+        </p:spPr>
+      </p:pic>
+      <p:sp>
+        <p:nvSpPr>
+          <p:cNvPr id="4" name="Text 1"/>
+          <p:cNvSpPr/>
+          <p:nvPr/>
+        </p:nvSpPr>
+        <p:spPr>
+          <a:xfrm>
+            <a:off x="5349240" y="1005840"/>
+            <a:ext cx="6522415" cy="731520"/>
+          </a:xfrm>
+          <a:prstGeom prst="rect">
+            <a:avLst/>
+          </a:prstGeom>
+          <a:noFill/>
+          <a:ln/>
+        </p:spPr>
+        <p:txBody>
+          <a:bodyPr wrap="square" lIns="0" tIns="0" rIns="0" bIns="0" rtlCol="0" anchor="ctr">
+            <a:normAutofit/>
+          </a:bodyPr>
+          <a:lstStyle/>
+          <a:p>
+            <a:pPr algn="ctr" indent="0" marL="0">
+              <a:buNone/>
+            </a:pPr>
+            <a:r>
+              <a:rPr lang="en-US" sz="3600" b="1" dirty="0">
+                <a:solidFill>
+                  <a:srgbClr val="990011"/>
+                </a:solidFill>
+                <a:latin typeface="Times New Roman" pitchFamily="34" charset="0"/>
+                <a:ea typeface="Times New Roman" pitchFamily="34" charset="-122"/>
+                <a:cs typeface="Times New Roman" pitchFamily="34" charset="-120"/>
+              </a:rPr>
+              <a:t>Evaluation 2</a:t>
+            </a:r>
+            <a:endParaRPr lang="en-US" sz="3600" dirty="0"/>
+          </a:p>
+        </p:txBody>
+      </p:sp>
+      <p:sp>
+        <p:nvSpPr>
+          <p:cNvPr id="5" name="Text 2"/>
+          <p:cNvSpPr/>
+          <p:nvPr/>
+        </p:nvSpPr>
+        <p:spPr>
+          <a:xfrm>
+            <a:off x="5349240" y="1783080"/>
+            <a:ext cx="6522415" cy="4663440"/>
+          </a:xfrm>
+          <a:prstGeom prst="rect">
+            <a:avLst/>
+          </a:prstGeom>
+          <a:noFill/>
+          <a:ln/>
+        </p:spPr>
+        <p:txBody>
+          <a:bodyPr wrap="square" lIns="0" tIns="0" rIns="0" bIns="0" rtlCol="0" anchor="t"/>
+          <a:lstStyle/>
+          <a:p>
+            <a:pPr algn="l" indent="0" marL="0">
+              <a:spcAft>
+                <a:spcPts val="800"/>
+              </a:spcAft>
+              <a:buNone/>
+            </a:pPr>
+            <a:r>
+              <a:rPr lang="en-US" sz="4000" dirty="0">
+                <a:solidFill>
+                  <a:srgbClr val="111111"/>
+                </a:solidFill>
+                <a:latin typeface="Times New Roman" pitchFamily="34" charset="0"/>
+                <a:ea typeface="Times New Roman" pitchFamily="34" charset="-122"/>
+                <a:cs typeface="Times New Roman" pitchFamily="34" charset="-120"/>
+              </a:rPr>
+              <a:t>The Harmattan blows from the north-east. What is its name as a wind direction?</a:t>
+            </a:r>
+            <a:endParaRPr lang="en-US" sz="4000" dirty="0"/>
+          </a:p>
+        </p:txBody>
+      </p:sp>
+      <p:sp>
+        <p:nvSpPr>
+          <p:cNvPr id="25" name="Slide Number Placeholder 0"/>
+          <p:cNvSpPr>
+            <a:spLocks noGrp="1"/>
+          </p:cNvSpPr>
+          <p:nvPr>
+            <p:ph type="sldNum" sz="quarter" idx="4294967295"/>
+          </p:nvPr>
+        </p:nvSpPr>
+        <p:spPr>
+          <a:xfrm>
+            <a:off x="27432" y="91440"/>
+            <a:ext cx="585216" cy="475488"/>
+          </a:xfrm>
+          <a:prstGeom prst="rect">
+            <a:avLst/>
+          </a:prstGeom>
+          <a:extLst>
+            <a:ext uri="{C572A759-6A51-4108-AA02-DFA0A04FC94B}">
+              <ma14:wrappingTextBoxFlag xmlns:ma14="http://schemas.microsoft.com/office/mac/drawingml/2011/main" val="0"/>
+            </a:ext>
+          </a:extLst>
+        </p:spPr>
+        <p:txBody>
+          <a:bodyPr/>
+          <a:lstStyle>
+            <a:lvl1pPr>
+              <a:defRPr sz="2000">
+                <a:solidFill>
+                  <a:srgbClr val="FFFFFF"/>
+                </a:solidFill>
+                <a:latin typeface="Calibri"/>
+                <a:ea typeface="Calibri"/>
+                <a:cs typeface="Calibri"/>
+              </a:defRPr>
+            </a:lvl1pPr>
+          </a:lstStyle>
+          <a:p>
+            <a:pPr algn="ctr"/>
+            <a:fld id="{F7021451-1387-4CA6-816F-3879F97B5CBC}" type="slidenum">
+              <a:rPr b="1" lang="en-US"/>
+              <a:t>47</a:t>
+            </a:fld>
+            <a:endParaRPr lang="en-US"/>
+          </a:p>
+        </p:txBody>
+      </p:sp>
+    </p:spTree>
+  </p:cSld>
+  <p:clrMapOvr>
+    <a:masterClrMapping/>
+  </p:clrMapOvr>
+</p:sld>
+</file>
+
+<file path=ppt/slides/slide48.xml><?xml version="1.0" encoding="utf-8"?>
+<p:sld xmlns:a="http://schemas.openxmlformats.org/drawingml/2006/main" xmlns:r="http://schemas.openxmlformats.org/officeDocument/2006/relationships" xmlns:p="http://schemas.openxmlformats.org/presentationml/2006/main">
+  <p:cSld name="Slide 48">
+    <p:spTree>
+      <p:nvGrpSpPr>
+        <p:cNvPr id="1" name=""/>
+        <p:cNvGrpSpPr/>
+        <p:nvPr/>
+      </p:nvGrpSpPr>
+      <p:grpSpPr>
+        <a:xfrm>
+          <a:off x="0" y="0"/>
+          <a:ext cx="0" cy="0"/>
+          <a:chOff x="0" y="0"/>
+          <a:chExt cx="0" cy="0"/>
+        </a:xfrm>
+      </p:grpSpPr>
+      <p:sp>
+        <p:nvSpPr>
+          <p:cNvPr id="2" name="Text 0"/>
+          <p:cNvSpPr/>
+          <p:nvPr/>
+        </p:nvSpPr>
+        <p:spPr>
+          <a:xfrm>
+            <a:off x="457200" y="713232"/>
+            <a:ext cx="11368735" cy="274320"/>
+          </a:xfrm>
+          <a:prstGeom prst="rect">
+            <a:avLst/>
+          </a:prstGeom>
+          <a:noFill/>
+          <a:ln/>
+        </p:spPr>
+        <p:txBody>
+          <a:bodyPr wrap="square" lIns="0" tIns="0" rIns="0" bIns="0" rtlCol="0" anchor="ctr"/>
+          <a:lstStyle/>
+          <a:p>
+            <a:pPr algn="r" indent="0" marL="0">
+              <a:buNone/>
+            </a:pPr>
+            <a:r>
+              <a:rPr lang="en-US" sz="1400" b="1" dirty="0">
+                <a:solidFill>
+                  <a:srgbClr val="1C3F6E"/>
+                </a:solidFill>
+                <a:latin typeface="Calibri" pitchFamily="34" charset="0"/>
+                <a:ea typeface="Calibri" pitchFamily="34" charset="-122"/>
+                <a:cs typeface="Calibri" pitchFamily="34" charset="-120"/>
+              </a:rPr>
+              <a:t>FORMATIVE EVALUATION</a:t>
+            </a:r>
+            <a:endParaRPr lang="en-US" sz="1400" dirty="0"/>
+          </a:p>
+        </p:txBody>
+      </p:sp>
+      <p:pic>
+        <p:nvPicPr>
+          <p:cNvPr id="3" name="Image 0" descr="/home/claude/f4/img/minesec_sheet.png">    </p:cNvPr>
+          <p:cNvPicPr>
+            <a:picLocks noChangeAspect="1"/>
+          </p:cNvPicPr>
+          <p:nvPr/>
+        </p:nvPicPr>
+        <p:blipFill>
+          <a:blip r:embed="rId1"/>
+          <a:stretch>
+            <a:fillRect/>
+          </a:stretch>
+        </p:blipFill>
+        <p:spPr>
+          <a:xfrm>
+            <a:off x="0" y="658368"/>
+            <a:ext cx="5120640" cy="5833872"/>
+          </a:xfrm>
+          <a:prstGeom prst="rect">
+            <a:avLst/>
+          </a:prstGeom>
+        </p:spPr>
+      </p:pic>
+      <p:sp>
+        <p:nvSpPr>
+          <p:cNvPr id="4" name="Text 1"/>
+          <p:cNvSpPr/>
+          <p:nvPr/>
+        </p:nvSpPr>
+        <p:spPr>
+          <a:xfrm>
+            <a:off x="5349240" y="1005840"/>
+            <a:ext cx="6522415" cy="731520"/>
+          </a:xfrm>
+          <a:prstGeom prst="rect">
+            <a:avLst/>
+          </a:prstGeom>
+          <a:noFill/>
+          <a:ln/>
+        </p:spPr>
+        <p:txBody>
+          <a:bodyPr wrap="square" lIns="0" tIns="0" rIns="0" bIns="0" rtlCol="0" anchor="ctr">
+            <a:normAutofit/>
+          </a:bodyPr>
+          <a:lstStyle/>
+          <a:p>
+            <a:pPr algn="ctr" indent="0" marL="0">
+              <a:buNone/>
+            </a:pPr>
+            <a:r>
+              <a:rPr lang="en-US" sz="3600" b="1" dirty="0">
+                <a:solidFill>
+                  <a:srgbClr val="990011"/>
+                </a:solidFill>
+                <a:latin typeface="Times New Roman" pitchFamily="34" charset="0"/>
+                <a:ea typeface="Times New Roman" pitchFamily="34" charset="-122"/>
+                <a:cs typeface="Times New Roman" pitchFamily="34" charset="-120"/>
+              </a:rPr>
+              <a:t>Expected Answer</a:t>
+            </a:r>
+            <a:endParaRPr lang="en-US" sz="3600" dirty="0"/>
+          </a:p>
+        </p:txBody>
+      </p:sp>
+      <p:sp>
+        <p:nvSpPr>
+          <p:cNvPr id="5" name="Text 2"/>
+          <p:cNvSpPr/>
+          <p:nvPr/>
+        </p:nvSpPr>
+        <p:spPr>
+          <a:xfrm>
+            <a:off x="5349240" y="1783080"/>
+            <a:ext cx="6522415" cy="4663440"/>
+          </a:xfrm>
+          <a:prstGeom prst="rect">
+            <a:avLst/>
+          </a:prstGeom>
+          <a:noFill/>
+          <a:ln/>
+        </p:spPr>
+        <p:txBody>
+          <a:bodyPr wrap="square" lIns="0" tIns="0" rIns="0" bIns="0" rtlCol="0" anchor="t"/>
+          <a:lstStyle/>
+          <a:p>
+            <a:pPr algn="l" indent="0" marL="0">
+              <a:spcAft>
+                <a:spcPts val="800"/>
+              </a:spcAft>
+              <a:buNone/>
+            </a:pPr>
+            <a:r>
+              <a:rPr lang="en-US" sz="4000" dirty="0">
+                <a:solidFill>
+                  <a:srgbClr val="111111"/>
+                </a:solidFill>
+                <a:latin typeface="Times New Roman" pitchFamily="34" charset="0"/>
+                <a:ea typeface="Times New Roman" pitchFamily="34" charset="-122"/>
+                <a:cs typeface="Times New Roman" pitchFamily="34" charset="-120"/>
+              </a:rPr>
+              <a:t>A north-easterly wind.</a:t>
+            </a:r>
+            <a:endParaRPr lang="en-US" sz="4000" dirty="0"/>
+          </a:p>
+        </p:txBody>
+      </p:sp>
+      <p:sp>
+        <p:nvSpPr>
+          <p:cNvPr id="25" name="Slide Number Placeholder 0"/>
+          <p:cNvSpPr>
+            <a:spLocks noGrp="1"/>
+          </p:cNvSpPr>
+          <p:nvPr>
+            <p:ph type="sldNum" sz="quarter" idx="4294967295"/>
+          </p:nvPr>
+        </p:nvSpPr>
+        <p:spPr>
+          <a:xfrm>
+            <a:off x="27432" y="91440"/>
+            <a:ext cx="585216" cy="475488"/>
+          </a:xfrm>
+          <a:prstGeom prst="rect">
+            <a:avLst/>
+          </a:prstGeom>
+          <a:extLst>
+            <a:ext uri="{C572A759-6A51-4108-AA02-DFA0A04FC94B}">
+              <ma14:wrappingTextBoxFlag xmlns:ma14="http://schemas.microsoft.com/office/mac/drawingml/2011/main" val="0"/>
+            </a:ext>
+          </a:extLst>
+        </p:spPr>
+        <p:txBody>
+          <a:bodyPr/>
+          <a:lstStyle>
+            <a:lvl1pPr>
+              <a:defRPr sz="2000">
+                <a:solidFill>
+                  <a:srgbClr val="FFFFFF"/>
+                </a:solidFill>
+                <a:latin typeface="Calibri"/>
+                <a:ea typeface="Calibri"/>
+                <a:cs typeface="Calibri"/>
+              </a:defRPr>
+            </a:lvl1pPr>
+          </a:lstStyle>
+          <a:p>
+            <a:pPr algn="ctr"/>
+            <a:fld id="{F7021451-1387-4CA6-816F-3879F97B5CBC}" type="slidenum">
+              <a:rPr b="1" lang="en-US"/>
+              <a:t>48</a:t>
+            </a:fld>
+            <a:endParaRPr lang="en-US"/>
+          </a:p>
+        </p:txBody>
+      </p:sp>
+    </p:spTree>
+  </p:cSld>
+  <p:clrMapOvr>
+    <a:masterClrMapping/>
+  </p:clrMapOvr>
+</p:sld>
+</file>
+
+<file path=ppt/slides/slide49.xml><?xml version="1.0" encoding="utf-8"?>
+<p:sld xmlns:a="http://schemas.openxmlformats.org/drawingml/2006/main" xmlns:r="http://schemas.openxmlformats.org/officeDocument/2006/relationships" xmlns:p="http://schemas.openxmlformats.org/presentationml/2006/main">
+  <p:cSld name="Slide 49">
+    <p:spTree>
+      <p:nvGrpSpPr>
+        <p:cNvPr id="1" name=""/>
+        <p:cNvGrpSpPr/>
+        <p:nvPr/>
+      </p:nvGrpSpPr>
+      <p:grpSpPr>
+        <a:xfrm>
+          <a:off x="0" y="0"/>
+          <a:ext cx="0" cy="0"/>
+          <a:chOff x="0" y="0"/>
+          <a:chExt cx="0" cy="0"/>
+        </a:xfrm>
+      </p:grpSpPr>
+      <p:sp>
+        <p:nvSpPr>
+          <p:cNvPr id="2" name="Text 0"/>
+          <p:cNvSpPr/>
+          <p:nvPr/>
+        </p:nvSpPr>
+        <p:spPr>
+          <a:xfrm>
+            <a:off x="457200" y="713232"/>
+            <a:ext cx="11368735" cy="274320"/>
+          </a:xfrm>
+          <a:prstGeom prst="rect">
+            <a:avLst/>
+          </a:prstGeom>
+          <a:noFill/>
+          <a:ln/>
+        </p:spPr>
+        <p:txBody>
+          <a:bodyPr wrap="square" lIns="0" tIns="0" rIns="0" bIns="0" rtlCol="0" anchor="ctr"/>
+          <a:lstStyle/>
+          <a:p>
+            <a:pPr algn="r" indent="0" marL="0">
+              <a:buNone/>
+            </a:pPr>
+            <a:r>
+              <a:rPr lang="en-US" sz="1400" b="1" dirty="0">
+                <a:solidFill>
+                  <a:srgbClr val="1C3F6E"/>
+                </a:solidFill>
+                <a:latin typeface="Calibri" pitchFamily="34" charset="0"/>
+                <a:ea typeface="Calibri" pitchFamily="34" charset="-122"/>
+                <a:cs typeface="Calibri" pitchFamily="34" charset="-120"/>
+              </a:rPr>
+              <a:t>REMEDIATION</a:t>
+            </a:r>
+            <a:endParaRPr lang="en-US" sz="1400" dirty="0"/>
+          </a:p>
+        </p:txBody>
+      </p:sp>
+      <p:pic>
+        <p:nvPicPr>
+          <p:cNvPr id="3" name="Image 0" descr="/home/claude/f4/img/minesec_sheet.png">    </p:cNvPr>
+          <p:cNvPicPr>
+            <a:picLocks noChangeAspect="1"/>
+          </p:cNvPicPr>
+          <p:nvPr/>
+        </p:nvPicPr>
+        <p:blipFill>
+          <a:blip r:embed="rId1"/>
+          <a:stretch>
+            <a:fillRect/>
+          </a:stretch>
+        </p:blipFill>
+        <p:spPr>
+          <a:xfrm>
+            <a:off x="0" y="658368"/>
+            <a:ext cx="2468880" cy="5833872"/>
+          </a:xfrm>
+          <a:prstGeom prst="rect">
+            <a:avLst/>
+          </a:prstGeom>
+        </p:spPr>
+      </p:pic>
+      <p:sp>
+        <p:nvSpPr>
+          <p:cNvPr id="4" name="Text 1"/>
+          <p:cNvSpPr/>
+          <p:nvPr/>
+        </p:nvSpPr>
+        <p:spPr>
+          <a:xfrm>
+            <a:off x="2697480" y="1005840"/>
+            <a:ext cx="9174175" cy="731520"/>
+          </a:xfrm>
+          <a:prstGeom prst="rect">
+            <a:avLst/>
+          </a:prstGeom>
+          <a:noFill/>
+          <a:ln/>
+        </p:spPr>
+        <p:txBody>
+          <a:bodyPr wrap="square" lIns="0" tIns="0" rIns="0" bIns="0" rtlCol="0" anchor="ctr">
+            <a:normAutofit/>
+          </a:bodyPr>
+          <a:lstStyle/>
+          <a:p>
+            <a:pPr algn="ctr" indent="0" marL="0">
+              <a:buNone/>
+            </a:pPr>
+            <a:r>
+              <a:rPr lang="en-US" sz="3600" b="1" dirty="0">
+                <a:solidFill>
+                  <a:srgbClr val="990011"/>
+                </a:solidFill>
+                <a:latin typeface="Times New Roman" pitchFamily="34" charset="0"/>
+                <a:ea typeface="Times New Roman" pitchFamily="34" charset="-122"/>
+                <a:cs typeface="Times New Roman" pitchFamily="34" charset="-120"/>
+              </a:rPr>
+              <a:t>Remediation</a:t>
+            </a:r>
+            <a:endParaRPr lang="en-US" sz="3600" dirty="0"/>
+          </a:p>
+        </p:txBody>
+      </p:sp>
+      <p:sp>
+        <p:nvSpPr>
+          <p:cNvPr id="5" name="Text 2"/>
+          <p:cNvSpPr/>
+          <p:nvPr/>
+        </p:nvSpPr>
+        <p:spPr>
+          <a:xfrm>
+            <a:off x="2697480" y="1783080"/>
+            <a:ext cx="9174175" cy="4663440"/>
+          </a:xfrm>
+          <a:prstGeom prst="rect">
+            <a:avLst/>
+          </a:prstGeom>
+          <a:noFill/>
+          <a:ln/>
+        </p:spPr>
+        <p:txBody>
+          <a:bodyPr wrap="square" lIns="0" tIns="0" rIns="0" bIns="0" rtlCol="0" anchor="t"/>
+          <a:lstStyle/>
+          <a:p>
+            <a:pPr algn="l" indent="0" marL="0">
+              <a:spcAft>
+                <a:spcPts val="800"/>
+              </a:spcAft>
+              <a:buNone/>
+            </a:pPr>
+            <a:r>
+              <a:rPr lang="en-US" sz="4000" b="1" dirty="0">
+                <a:solidFill>
+                  <a:srgbClr val="111111"/>
+                </a:solidFill>
+                <a:latin typeface="Times New Roman" pitchFamily="34" charset="0"/>
+                <a:ea typeface="Times New Roman" pitchFamily="34" charset="-122"/>
+                <a:cs typeface="Times New Roman" pitchFamily="34" charset="-120"/>
+              </a:rPr>
+              <a:t>Fill in the blanks:</a:t>
+            </a:r>
+            <a:endParaRPr lang="en-US" sz="4000" dirty="0"/>
+          </a:p>
+          <a:p>
+            <a:pPr algn="l" marL="342900" indent="-342900">
+              <a:spcAft>
+                <a:spcPts val="800"/>
+              </a:spcAft>
+              <a:buSzPct val="100000"/>
+              <a:buFont typeface="+mj-lt"/>
+              <a:buAutoNum type="arabicPeriod" startAt="1"/>
+            </a:pPr>
+            <a:r>
+              <a:rPr lang="en-US" sz="4000" dirty="0">
+                <a:solidFill>
+                  <a:srgbClr val="111111"/>
+                </a:solidFill>
+                <a:latin typeface="Times New Roman" pitchFamily="34" charset="0"/>
+                <a:ea typeface="Times New Roman" pitchFamily="34" charset="-122"/>
+                <a:cs typeface="Times New Roman" pitchFamily="34" charset="-120"/>
+              </a:rPr>
+              <a:t>Humidity is measured with a ______.</a:t>
+            </a:r>
+            <a:endParaRPr lang="en-US" sz="4000" dirty="0"/>
+          </a:p>
+          <a:p>
+            <a:pPr algn="l" marL="342900" indent="-342900">
+              <a:spcAft>
+                <a:spcPts val="800"/>
+              </a:spcAft>
+              <a:buSzPct val="100000"/>
+              <a:buFont typeface="+mj-lt"/>
+              <a:buAutoNum type="arabicPeriod" startAt="1"/>
+            </a:pPr>
+            <a:r>
+              <a:rPr lang="en-US" sz="4000" dirty="0">
+                <a:solidFill>
+                  <a:srgbClr val="111111"/>
+                </a:solidFill>
+                <a:latin typeface="Times New Roman" pitchFamily="34" charset="0"/>
+                <a:ea typeface="Times New Roman" pitchFamily="34" charset="-122"/>
+                <a:cs typeface="Times New Roman" pitchFamily="34" charset="-120"/>
+              </a:rPr>
+              <a:t>Air pressure is measured with a ______.</a:t>
+            </a:r>
+            <a:endParaRPr lang="en-US" sz="4000" dirty="0"/>
+          </a:p>
+          <a:p>
+            <a:pPr algn="l" marL="342900" indent="-342900">
+              <a:spcAft>
+                <a:spcPts val="800"/>
+              </a:spcAft>
+              <a:buSzPct val="100000"/>
+              <a:buFont typeface="+mj-lt"/>
+              <a:buAutoNum type="arabicPeriod" startAt="1"/>
+            </a:pPr>
+            <a:r>
+              <a:rPr lang="en-US" sz="4000" dirty="0">
+                <a:solidFill>
+                  <a:srgbClr val="111111"/>
+                </a:solidFill>
+                <a:latin typeface="Times New Roman" pitchFamily="34" charset="0"/>
+                <a:ea typeface="Times New Roman" pitchFamily="34" charset="-122"/>
+                <a:cs typeface="Times New Roman" pitchFamily="34" charset="-120"/>
+              </a:rPr>
+              <a:t>A wind is named after the direction it comes ______.</a:t>
+            </a:r>
+            <a:endParaRPr lang="en-US" sz="4000" dirty="0"/>
+          </a:p>
+        </p:txBody>
+      </p:sp>
+      <p:sp>
+        <p:nvSpPr>
+          <p:cNvPr id="25" name="Slide Number Placeholder 0"/>
+          <p:cNvSpPr>
+            <a:spLocks noGrp="1"/>
+          </p:cNvSpPr>
+          <p:nvPr>
+            <p:ph type="sldNum" sz="quarter" idx="4294967295"/>
+          </p:nvPr>
+        </p:nvSpPr>
+        <p:spPr>
+          <a:xfrm>
+            <a:off x="27432" y="91440"/>
+            <a:ext cx="585216" cy="475488"/>
+          </a:xfrm>
+          <a:prstGeom prst="rect">
+            <a:avLst/>
+          </a:prstGeom>
+          <a:extLst>
+            <a:ext uri="{C572A759-6A51-4108-AA02-DFA0A04FC94B}">
+              <ma14:wrappingTextBoxFlag xmlns:ma14="http://schemas.microsoft.com/office/mac/drawingml/2011/main" val="0"/>
+            </a:ext>
+          </a:extLst>
+        </p:spPr>
+        <p:txBody>
+          <a:bodyPr/>
+          <a:lstStyle>
+            <a:lvl1pPr>
+              <a:defRPr sz="2000">
+                <a:solidFill>
+                  <a:srgbClr val="FFFFFF"/>
+                </a:solidFill>
+                <a:latin typeface="Calibri"/>
+                <a:ea typeface="Calibri"/>
+                <a:cs typeface="Calibri"/>
+              </a:defRPr>
+            </a:lvl1pPr>
+          </a:lstStyle>
+          <a:p>
+            <a:pPr algn="ctr"/>
+            <a:fld id="{F7021451-1387-4CA6-816F-3879F97B5CBC}" type="slidenum">
+              <a:rPr b="1" lang="en-US"/>
+              <a:t>49</a:t>
+            </a:fld>
+            <a:endParaRPr lang="en-US"/>
+          </a:p>
+        </p:txBody>
+      </p:sp>
+    </p:spTree>
+  </p:cSld>
+  <p:clrMapOvr>
+    <a:masterClrMapping/>
+  </p:clrMapOvr>
+</p:sld>
+</file>
+
+<file path=ppt/slides/slide5.xml><?xml version="1.0" encoding="utf-8"?>
+<p:sld xmlns:a="http://schemas.openxmlformats.org/drawingml/2006/main" xmlns:r="http://schemas.openxmlformats.org/officeDocument/2006/relationships" xmlns:p="http://schemas.openxmlformats.org/presentationml/2006/main">
+  <p:cSld name="Slide 5">
+    <p:spTree>
+      <p:nvGrpSpPr>
+        <p:cNvPr id="1" name=""/>
+        <p:cNvGrpSpPr/>
+        <p:nvPr/>
+      </p:nvGrpSpPr>
+      <p:grpSpPr>
+        <a:xfrm>
+          <a:off x="0" y="0"/>
+          <a:ext cx="0" cy="0"/>
+          <a:chOff x="0" y="0"/>
+          <a:chExt cx="0" cy="0"/>
+        </a:xfrm>
+      </p:grpSpPr>
+      <p:sp>
+        <p:nvSpPr>
+          <p:cNvPr id="2" name="Text 0"/>
+          <p:cNvSpPr/>
+          <p:nvPr/>
+        </p:nvSpPr>
+        <p:spPr>
+          <a:xfrm>
+            <a:off x="457200" y="713232"/>
+            <a:ext cx="11368735" cy="274320"/>
+          </a:xfrm>
+          <a:prstGeom prst="rect">
+            <a:avLst/>
+          </a:prstGeom>
+          <a:noFill/>
+          <a:ln/>
+        </p:spPr>
+        <p:txBody>
+          <a:bodyPr wrap="square" lIns="0" tIns="0" rIns="0" bIns="0" rtlCol="0" anchor="ctr"/>
+          <a:lstStyle/>
+          <a:p>
+            <a:pPr algn="r" indent="0" marL="0">
+              <a:buNone/>
+            </a:pPr>
+            <a:r>
+              <a:rPr lang="en-US" sz="1400" b="1" dirty="0">
+                <a:solidFill>
+                  <a:srgbClr val="1C3F6E"/>
+                </a:solidFill>
+                <a:latin typeface="Calibri" pitchFamily="34" charset="0"/>
+                <a:ea typeface="Calibri" pitchFamily="34" charset="-122"/>
+                <a:cs typeface="Calibri" pitchFamily="34" charset="-120"/>
+              </a:rPr>
+              <a:t>HOMEWORK CORRECTION</a:t>
+            </a:r>
+            <a:endParaRPr lang="en-US" sz="1400" dirty="0"/>
+          </a:p>
+        </p:txBody>
+      </p:sp>
+      <p:pic>
+        <p:nvPicPr>
+          <p:cNvPr id="3" name="Image 0" descr="/home/claude/f4/img/minesec_sheet.png">    </p:cNvPr>
+          <p:cNvPicPr>
+            <a:picLocks noChangeAspect="1"/>
+          </p:cNvPicPr>
+          <p:nvPr/>
+        </p:nvPicPr>
+        <p:blipFill>
+          <a:blip r:embed="rId1"/>
+          <a:stretch>
+            <a:fillRect/>
+          </a:stretch>
+        </p:blipFill>
+        <p:spPr>
+          <a:xfrm>
+            <a:off x="0" y="658368"/>
+            <a:ext cx="5120640" cy="5833872"/>
+          </a:xfrm>
+          <a:prstGeom prst="rect">
+            <a:avLst/>
+          </a:prstGeom>
+        </p:spPr>
+      </p:pic>
+      <p:sp>
+        <p:nvSpPr>
+          <p:cNvPr id="4" name="Text 1"/>
+          <p:cNvSpPr/>
+          <p:nvPr/>
+        </p:nvSpPr>
+        <p:spPr>
+          <a:xfrm>
+            <a:off x="5349240" y="1005840"/>
+            <a:ext cx="6522415" cy="731520"/>
+          </a:xfrm>
+          <a:prstGeom prst="rect">
+            <a:avLst/>
+          </a:prstGeom>
+          <a:noFill/>
+          <a:ln/>
+        </p:spPr>
+        <p:txBody>
+          <a:bodyPr wrap="square" lIns="0" tIns="0" rIns="0" bIns="0" rtlCol="0" anchor="ctr">
+            <a:normAutofit/>
+          </a:bodyPr>
+          <a:lstStyle/>
+          <a:p>
+            <a:pPr algn="ctr" indent="0" marL="0">
+              <a:buNone/>
+            </a:pPr>
+            <a:r>
+              <a:rPr lang="en-US" sz="3600" b="1" dirty="0">
+                <a:solidFill>
+                  <a:srgbClr val="990011"/>
+                </a:solidFill>
+                <a:latin typeface="Times New Roman" pitchFamily="34" charset="0"/>
+                <a:ea typeface="Times New Roman" pitchFamily="34" charset="-122"/>
+                <a:cs typeface="Times New Roman" pitchFamily="34" charset="-120"/>
+              </a:rPr>
+              <a:t>Correction: Possible Answer</a:t>
+            </a:r>
+            <a:endParaRPr lang="en-US" sz="3600" dirty="0"/>
+          </a:p>
+        </p:txBody>
+      </p:sp>
+      <p:sp>
+        <p:nvSpPr>
+          <p:cNvPr id="5" name="Text 2"/>
+          <p:cNvSpPr/>
+          <p:nvPr/>
+        </p:nvSpPr>
+        <p:spPr>
+          <a:xfrm>
+            <a:off x="5349240" y="1783080"/>
+            <a:ext cx="6522415" cy="4663440"/>
+          </a:xfrm>
+          <a:prstGeom prst="rect">
+            <a:avLst/>
+          </a:prstGeom>
+          <a:noFill/>
+          <a:ln/>
+        </p:spPr>
+        <p:txBody>
+          <a:bodyPr wrap="square" lIns="0" tIns="0" rIns="0" bIns="0" rtlCol="0" anchor="t"/>
+          <a:lstStyle/>
+          <a:p>
+            <a:pPr algn="l" indent="0" marL="0">
+              <a:spcAft>
+                <a:spcPts val="800"/>
+              </a:spcAft>
+              <a:buNone/>
+            </a:pPr>
+            <a:r>
+              <a:rPr lang="en-US" sz="4000" dirty="0">
+                <a:solidFill>
+                  <a:srgbClr val="111111"/>
+                </a:solidFill>
+                <a:latin typeface="Times New Roman" pitchFamily="34" charset="0"/>
+                <a:ea typeface="Times New Roman" pitchFamily="34" charset="-122"/>
+                <a:cs typeface="Times New Roman" pitchFamily="34" charset="-120"/>
+              </a:rPr>
+              <a:t>The cloth dries faster in the afternoon because the air is hotter and drier (lower humidity), so water evaporates faster.</a:t>
+            </a:r>
+            <a:endParaRPr lang="en-US" sz="4000" dirty="0"/>
+          </a:p>
+        </p:txBody>
+      </p:sp>
+      <p:sp>
+        <p:nvSpPr>
+          <p:cNvPr id="25" name="Slide Number Placeholder 0"/>
+          <p:cNvSpPr>
+            <a:spLocks noGrp="1"/>
+          </p:cNvSpPr>
+          <p:nvPr>
+            <p:ph type="sldNum" sz="quarter" idx="4294967295"/>
+          </p:nvPr>
+        </p:nvSpPr>
+        <p:spPr>
+          <a:xfrm>
+            <a:off x="27432" y="91440"/>
+            <a:ext cx="585216" cy="475488"/>
+          </a:xfrm>
+          <a:prstGeom prst="rect">
+            <a:avLst/>
+          </a:prstGeom>
+          <a:extLst>
+            <a:ext uri="{C572A759-6A51-4108-AA02-DFA0A04FC94B}">
+              <ma14:wrappingTextBoxFlag xmlns:ma14="http://schemas.microsoft.com/office/mac/drawingml/2011/main" val="0"/>
+            </a:ext>
+          </a:extLst>
+        </p:spPr>
+        <p:txBody>
+          <a:bodyPr/>
+          <a:lstStyle>
+            <a:lvl1pPr>
+              <a:defRPr sz="2000">
+                <a:solidFill>
+                  <a:srgbClr val="FFFFFF"/>
+                </a:solidFill>
+                <a:latin typeface="Calibri"/>
+                <a:ea typeface="Calibri"/>
+                <a:cs typeface="Calibri"/>
+              </a:defRPr>
+            </a:lvl1pPr>
+          </a:lstStyle>
+          <a:p>
+            <a:pPr algn="ctr"/>
+            <a:fld id="{F7021451-1387-4CA6-816F-3879F97B5CBC}" type="slidenum">
+              <a:rPr b="1" lang="en-US"/>
+              <a:t>5</a:t>
+            </a:fld>
+            <a:endParaRPr lang="en-US"/>
+          </a:p>
+        </p:txBody>
+      </p:sp>
+    </p:spTree>
+  </p:cSld>
+  <p:clrMapOvr>
+    <a:masterClrMapping/>
+  </p:clrMapOvr>
+</p:sld>
+</file>
+
+<file path=ppt/slides/slide50.xml><?xml version="1.0" encoding="utf-8"?>
+<p:sld xmlns:a="http://schemas.openxmlformats.org/drawingml/2006/main" xmlns:r="http://schemas.openxmlformats.org/officeDocument/2006/relationships" xmlns:p="http://schemas.openxmlformats.org/presentationml/2006/main">
+  <p:cSld name="Slide 50">
+    <p:spTree>
+      <p:nvGrpSpPr>
+        <p:cNvPr id="1" name=""/>
+        <p:cNvGrpSpPr/>
+        <p:nvPr/>
+      </p:nvGrpSpPr>
+      <p:grpSpPr>
+        <a:xfrm>
+          <a:off x="0" y="0"/>
+          <a:ext cx="0" cy="0"/>
+          <a:chOff x="0" y="0"/>
+          <a:chExt cx="0" cy="0"/>
+        </a:xfrm>
+      </p:grpSpPr>
+      <p:sp>
+        <p:nvSpPr>
+          <p:cNvPr id="2" name="Text 0"/>
+          <p:cNvSpPr/>
+          <p:nvPr/>
+        </p:nvSpPr>
+        <p:spPr>
+          <a:xfrm>
+            <a:off x="457200" y="713232"/>
+            <a:ext cx="11368735" cy="274320"/>
+          </a:xfrm>
+          <a:prstGeom prst="rect">
+            <a:avLst/>
+          </a:prstGeom>
+          <a:noFill/>
+          <a:ln/>
+        </p:spPr>
+        <p:txBody>
+          <a:bodyPr wrap="square" lIns="0" tIns="0" rIns="0" bIns="0" rtlCol="0" anchor="ctr"/>
+          <a:lstStyle/>
+          <a:p>
+            <a:pPr algn="r" indent="0" marL="0">
+              <a:buNone/>
+            </a:pPr>
+            <a:r>
+              <a:rPr lang="en-US" sz="1400" b="1" dirty="0">
+                <a:solidFill>
+                  <a:srgbClr val="1C3F6E"/>
+                </a:solidFill>
+                <a:latin typeface="Calibri" pitchFamily="34" charset="0"/>
+                <a:ea typeface="Calibri" pitchFamily="34" charset="-122"/>
+                <a:cs typeface="Calibri" pitchFamily="34" charset="-120"/>
+              </a:rPr>
+              <a:t>HOMEWORK</a:t>
+            </a:r>
+            <a:endParaRPr lang="en-US" sz="1400" dirty="0"/>
+          </a:p>
+        </p:txBody>
+      </p:sp>
+      <p:pic>
+        <p:nvPicPr>
+          <p:cNvPr id="3" name="Image 0" descr="/home/claude/f4/img/minesec_sheet.png">    </p:cNvPr>
+          <p:cNvPicPr>
+            <a:picLocks noChangeAspect="1"/>
+          </p:cNvPicPr>
+          <p:nvPr/>
+        </p:nvPicPr>
+        <p:blipFill>
+          <a:blip r:embed="rId1"/>
+          <a:stretch>
+            <a:fillRect/>
+          </a:stretch>
+        </p:blipFill>
+        <p:spPr>
+          <a:xfrm>
+            <a:off x="0" y="658368"/>
+            <a:ext cx="5120640" cy="5833872"/>
+          </a:xfrm>
+          <a:prstGeom prst="rect">
+            <a:avLst/>
+          </a:prstGeom>
+        </p:spPr>
+      </p:pic>
+      <p:sp>
+        <p:nvSpPr>
+          <p:cNvPr id="4" name="Text 1"/>
+          <p:cNvSpPr/>
+          <p:nvPr/>
+        </p:nvSpPr>
+        <p:spPr>
+          <a:xfrm>
+            <a:off x="5349240" y="1005840"/>
+            <a:ext cx="6522415" cy="731520"/>
+          </a:xfrm>
+          <a:prstGeom prst="rect">
+            <a:avLst/>
+          </a:prstGeom>
+          <a:noFill/>
+          <a:ln/>
+        </p:spPr>
+        <p:txBody>
+          <a:bodyPr wrap="square" lIns="0" tIns="0" rIns="0" bIns="0" rtlCol="0" anchor="ctr">
+            <a:normAutofit/>
+          </a:bodyPr>
+          <a:lstStyle/>
+          <a:p>
+            <a:pPr algn="ctr" indent="0" marL="0">
+              <a:buNone/>
+            </a:pPr>
+            <a:r>
+              <a:rPr lang="en-US" sz="3600" b="1" dirty="0">
+                <a:solidFill>
+                  <a:srgbClr val="990011"/>
+                </a:solidFill>
+                <a:latin typeface="Times New Roman" pitchFamily="34" charset="0"/>
+                <a:ea typeface="Times New Roman" pitchFamily="34" charset="-122"/>
+                <a:cs typeface="Times New Roman" pitchFamily="34" charset="-120"/>
+              </a:rPr>
+              <a:t>Homework</a:t>
+            </a:r>
+            <a:endParaRPr lang="en-US" sz="3600" dirty="0"/>
+          </a:p>
+        </p:txBody>
+      </p:sp>
+      <p:sp>
+        <p:nvSpPr>
+          <p:cNvPr id="5" name="Text 2"/>
+          <p:cNvSpPr/>
+          <p:nvPr/>
+        </p:nvSpPr>
+        <p:spPr>
+          <a:xfrm>
+            <a:off x="5349240" y="1783080"/>
+            <a:ext cx="6522415" cy="4663440"/>
+          </a:xfrm>
+          <a:prstGeom prst="rect">
+            <a:avLst/>
+          </a:prstGeom>
+          <a:noFill/>
+          <a:ln/>
+        </p:spPr>
+        <p:txBody>
+          <a:bodyPr wrap="square" lIns="0" tIns="0" rIns="0" bIns="0" rtlCol="0" anchor="t"/>
+          <a:lstStyle/>
+          <a:p>
+            <a:pPr algn="l" indent="0" marL="0">
+              <a:spcAft>
+                <a:spcPts val="800"/>
+              </a:spcAft>
+              <a:buNone/>
+            </a:pPr>
+            <a:r>
+              <a:rPr lang="en-US" sz="4000" dirty="0">
+                <a:solidFill>
+                  <a:srgbClr val="111111"/>
+                </a:solidFill>
+                <a:latin typeface="Times New Roman" pitchFamily="34" charset="0"/>
+                <a:ea typeface="Times New Roman" pitchFamily="34" charset="-122"/>
+                <a:cs typeface="Times New Roman" pitchFamily="34" charset="-120"/>
+              </a:rPr>
+              <a:t>Early tomorrow morning, look at the grass, leaves or cars near your house. Write down whether you see drops of water on them, and where you think the water came from.</a:t>
+            </a:r>
+            <a:endParaRPr lang="en-US" sz="4000" dirty="0"/>
+          </a:p>
+        </p:txBody>
+      </p:sp>
+      <p:sp>
+        <p:nvSpPr>
+          <p:cNvPr id="25" name="Slide Number Placeholder 0"/>
+          <p:cNvSpPr>
+            <a:spLocks noGrp="1"/>
+          </p:cNvSpPr>
+          <p:nvPr>
+            <p:ph type="sldNum" sz="quarter" idx="4294967295"/>
+          </p:nvPr>
+        </p:nvSpPr>
+        <p:spPr>
+          <a:xfrm>
+            <a:off x="27432" y="91440"/>
+            <a:ext cx="585216" cy="475488"/>
+          </a:xfrm>
+          <a:prstGeom prst="rect">
+            <a:avLst/>
+          </a:prstGeom>
+          <a:extLst>
+            <a:ext uri="{C572A759-6A51-4108-AA02-DFA0A04FC94B}">
+              <ma14:wrappingTextBoxFlag xmlns:ma14="http://schemas.microsoft.com/office/mac/drawingml/2011/main" val="0"/>
+            </a:ext>
+          </a:extLst>
+        </p:spPr>
+        <p:txBody>
+          <a:bodyPr/>
+          <a:lstStyle>
+            <a:lvl1pPr>
+              <a:defRPr sz="2000">
+                <a:solidFill>
+                  <a:srgbClr val="FFFFFF"/>
+                </a:solidFill>
+                <a:latin typeface="Calibri"/>
+                <a:ea typeface="Calibri"/>
+                <a:cs typeface="Calibri"/>
+              </a:defRPr>
+            </a:lvl1pPr>
+          </a:lstStyle>
+          <a:p>
+            <a:pPr algn="ctr"/>
+            <a:fld id="{F7021451-1387-4CA6-816F-3879F97B5CBC}" type="slidenum">
+              <a:rPr b="1" lang="en-US"/>
+              <a:t>50</a:t>
+            </a:fld>
+            <a:endParaRPr lang="en-US"/>
+          </a:p>
+        </p:txBody>
+      </p:sp>
+    </p:spTree>
+  </p:cSld>
+  <p:clrMapOvr>
+    <a:masterClrMapping/>
+  </p:clrMapOvr>
+</p:sld>
+</file>
+
+<file path=ppt/slides/slide51.xml><?xml version="1.0" encoding="utf-8"?>
+<p:sld xmlns:a="http://schemas.openxmlformats.org/drawingml/2006/main" xmlns:r="http://schemas.openxmlformats.org/officeDocument/2006/relationships" xmlns:p="http://schemas.openxmlformats.org/presentationml/2006/main">
+  <p:cSld name="Slide 51">
+    <p:spTree>
+      <p:nvGrpSpPr>
+        <p:cNvPr id="1" name=""/>
+        <p:cNvGrpSpPr/>
+        <p:nvPr/>
+      </p:nvGrpSpPr>
+      <p:grpSpPr>
+        <a:xfrm>
+          <a:off x="0" y="0"/>
+          <a:ext cx="0" cy="0"/>
+          <a:chOff x="0" y="0"/>
+          <a:chExt cx="0" cy="0"/>
+        </a:xfrm>
+      </p:grpSpPr>
+      <p:sp>
+        <p:nvSpPr>
+          <p:cNvPr id="2" name="Text 0"/>
+          <p:cNvSpPr/>
+          <p:nvPr/>
+        </p:nvSpPr>
+        <p:spPr>
+          <a:xfrm>
+            <a:off x="457200" y="713232"/>
+            <a:ext cx="11368735" cy="274320"/>
+          </a:xfrm>
+          <a:prstGeom prst="rect">
+            <a:avLst/>
+          </a:prstGeom>
+          <a:noFill/>
+          <a:ln/>
+        </p:spPr>
+        <p:txBody>
+          <a:bodyPr wrap="square" lIns="0" tIns="0" rIns="0" bIns="0" rtlCol="0" anchor="ctr"/>
+          <a:lstStyle/>
+          <a:p>
+            <a:pPr algn="r" indent="0" marL="0">
+              <a:buNone/>
+            </a:pPr>
+            <a:r>
+              <a:rPr lang="en-US" sz="1400" b="1" dirty="0">
+                <a:solidFill>
+                  <a:srgbClr val="1C3F6E"/>
+                </a:solidFill>
+                <a:latin typeface="Calibri" pitchFamily="34" charset="0"/>
+                <a:ea typeface="Calibri" pitchFamily="34" charset="-122"/>
+                <a:cs typeface="Calibri" pitchFamily="34" charset="-120"/>
+              </a:rPr>
+              <a:t>NEXT LESSON</a:t>
+            </a:r>
+            <a:endParaRPr lang="en-US" sz="1400" dirty="0"/>
+          </a:p>
+        </p:txBody>
+      </p:sp>
+      <p:pic>
+        <p:nvPicPr>
+          <p:cNvPr id="3" name="Image 0" descr="/home/claude/f4/img/minesec_sheet.png">    </p:cNvPr>
+          <p:cNvPicPr>
+            <a:picLocks noChangeAspect="1"/>
+          </p:cNvPicPr>
+          <p:nvPr/>
+        </p:nvPicPr>
+        <p:blipFill>
+          <a:blip r:embed="rId1"/>
+          <a:stretch>
+            <a:fillRect/>
+          </a:stretch>
+        </p:blipFill>
+        <p:spPr>
+          <a:xfrm>
+            <a:off x="0" y="658368"/>
+            <a:ext cx="5120640" cy="5833872"/>
+          </a:xfrm>
+          <a:prstGeom prst="rect">
+            <a:avLst/>
+          </a:prstGeom>
+        </p:spPr>
+      </p:pic>
+      <p:sp>
+        <p:nvSpPr>
+          <p:cNvPr id="4" name="Text 1"/>
+          <p:cNvSpPr/>
+          <p:nvPr/>
+        </p:nvSpPr>
+        <p:spPr>
+          <a:xfrm>
+            <a:off x="5349240" y="1005840"/>
+            <a:ext cx="6522415" cy="731520"/>
+          </a:xfrm>
+          <a:prstGeom prst="rect">
+            <a:avLst/>
+          </a:prstGeom>
+          <a:noFill/>
+          <a:ln/>
+        </p:spPr>
+        <p:txBody>
+          <a:bodyPr wrap="square" lIns="0" tIns="0" rIns="0" bIns="0" rtlCol="0" anchor="ctr">
+            <a:normAutofit/>
+          </a:bodyPr>
+          <a:lstStyle/>
+          <a:p>
+            <a:pPr algn="ctr" indent="0" marL="0">
+              <a:buNone/>
+            </a:pPr>
+            <a:r>
+              <a:rPr lang="en-US" sz="3600" b="1" dirty="0">
+                <a:solidFill>
+                  <a:srgbClr val="990011"/>
+                </a:solidFill>
+                <a:latin typeface="Times New Roman" pitchFamily="34" charset="0"/>
+                <a:ea typeface="Times New Roman" pitchFamily="34" charset="-122"/>
+                <a:cs typeface="Times New Roman" pitchFamily="34" charset="-120"/>
+              </a:rPr>
+              <a:t>Next Lesson</a:t>
+            </a:r>
+            <a:endParaRPr lang="en-US" sz="3600" dirty="0"/>
+          </a:p>
+        </p:txBody>
+      </p:sp>
+      <p:sp>
+        <p:nvSpPr>
+          <p:cNvPr id="5" name="Text 2"/>
+          <p:cNvSpPr/>
+          <p:nvPr/>
+        </p:nvSpPr>
+        <p:spPr>
+          <a:xfrm>
+            <a:off x="5349240" y="1783080"/>
+            <a:ext cx="6522415" cy="4663440"/>
+          </a:xfrm>
+          <a:prstGeom prst="rect">
+            <a:avLst/>
+          </a:prstGeom>
+          <a:noFill/>
+          <a:ln/>
+        </p:spPr>
+        <p:txBody>
+          <a:bodyPr wrap="square" lIns="0" tIns="0" rIns="0" bIns="0" rtlCol="0" anchor="ctr"/>
+          <a:lstStyle/>
+          <a:p>
+            <a:pPr algn="ctr" indent="0" marL="0">
+              <a:spcAft>
+                <a:spcPts val="800"/>
+              </a:spcAft>
+              <a:buNone/>
+            </a:pPr>
+            <a:r>
+              <a:rPr lang="en-US" sz="4000" b="1" dirty="0">
+                <a:solidFill>
+                  <a:srgbClr val="111111"/>
+                </a:solidFill>
+                <a:latin typeface="Times New Roman" pitchFamily="34" charset="0"/>
+                <a:ea typeface="Times New Roman" pitchFamily="34" charset="-122"/>
+                <a:cs typeface="Times New Roman" pitchFamily="34" charset="-120"/>
+              </a:rPr>
+              <a:t>Our next lesson will be on:</a:t>
+            </a:r>
+            <a:endParaRPr lang="en-US" sz="4000" dirty="0"/>
+          </a:p>
+          <a:p>
+            <a:pPr algn="ctr" indent="0" marL="0">
+              <a:spcAft>
+                <a:spcPts val="800"/>
+              </a:spcAft>
+              <a:buNone/>
+            </a:pPr>
+            <a:r>
+              <a:rPr lang="en-US" sz="4000" b="1" dirty="0">
+                <a:solidFill>
+                  <a:srgbClr val="990011"/>
+                </a:solidFill>
+                <a:latin typeface="Times New Roman" pitchFamily="34" charset="0"/>
+                <a:ea typeface="Times New Roman" pitchFamily="34" charset="-122"/>
+                <a:cs typeface="Times New Roman" pitchFamily="34" charset="-120"/>
+              </a:rPr>
+              <a:t>Lesson 34: Condensation</a:t>
+            </a:r>
+            <a:endParaRPr lang="en-US" sz="4000" dirty="0"/>
+          </a:p>
+        </p:txBody>
+      </p:sp>
+      <p:sp>
+        <p:nvSpPr>
+          <p:cNvPr id="25" name="Slide Number Placeholder 0"/>
+          <p:cNvSpPr>
+            <a:spLocks noGrp="1"/>
+          </p:cNvSpPr>
+          <p:nvPr>
+            <p:ph type="sldNum" sz="quarter" idx="4294967295"/>
+          </p:nvPr>
+        </p:nvSpPr>
+        <p:spPr>
+          <a:xfrm>
+            <a:off x="27432" y="91440"/>
+            <a:ext cx="585216" cy="475488"/>
+          </a:xfrm>
+          <a:prstGeom prst="rect">
+            <a:avLst/>
+          </a:prstGeom>
+          <a:extLst>
+            <a:ext uri="{C572A759-6A51-4108-AA02-DFA0A04FC94B}">
+              <ma14:wrappingTextBoxFlag xmlns:ma14="http://schemas.microsoft.com/office/mac/drawingml/2011/main" val="0"/>
+            </a:ext>
+          </a:extLst>
+        </p:spPr>
+        <p:txBody>
+          <a:bodyPr/>
+          <a:lstStyle>
+            <a:lvl1pPr>
+              <a:defRPr sz="2000">
+                <a:solidFill>
+                  <a:srgbClr val="FFFFFF"/>
+                </a:solidFill>
+                <a:latin typeface="Calibri"/>
+                <a:ea typeface="Calibri"/>
+                <a:cs typeface="Calibri"/>
+              </a:defRPr>
+            </a:lvl1pPr>
+          </a:lstStyle>
+          <a:p>
+            <a:pPr algn="ctr"/>
+            <a:fld id="{F7021451-1387-4CA6-816F-3879F97B5CBC}" type="slidenum">
+              <a:rPr b="1" lang="en-US"/>
+              <a:t>51</a:t>
+            </a:fld>
+            <a:endParaRPr lang="en-US"/>
+          </a:p>
+        </p:txBody>
+      </p:sp>
+    </p:spTree>
+  </p:cSld>
+  <p:clrMapOvr>
+    <a:masterClrMapping/>
+  </p:clrMapOvr>
+</p:sld>
+</file>
+
+<file path=ppt/slides/slide52.xml><?xml version="1.0" encoding="utf-8"?>
+<p:sld xmlns:a="http://schemas.openxmlformats.org/drawingml/2006/main" xmlns:r="http://schemas.openxmlformats.org/officeDocument/2006/relationships" xmlns:p="http://schemas.openxmlformats.org/presentationml/2006/main">
+  <p:cSld name="Slide 52">
+    <p:spTree>
+      <p:nvGrpSpPr>
+        <p:cNvPr id="1" name=""/>
+        <p:cNvGrpSpPr/>
+        <p:nvPr/>
+      </p:nvGrpSpPr>
+      <p:grpSpPr>
+        <a:xfrm>
+          <a:off x="0" y="0"/>
+          <a:ext cx="0" cy="0"/>
+          <a:chOff x="0" y="0"/>
+          <a:chExt cx="0" cy="0"/>
+        </a:xfrm>
+      </p:grpSpPr>
+      <p:sp>
+        <p:nvSpPr>
+          <p:cNvPr id="2" name="Text 0"/>
+          <p:cNvSpPr/>
+          <p:nvPr/>
+        </p:nvSpPr>
+        <p:spPr>
+          <a:xfrm>
+            <a:off x="457200" y="713232"/>
+            <a:ext cx="11368735" cy="274320"/>
+          </a:xfrm>
+          <a:prstGeom prst="rect">
+            <a:avLst/>
+          </a:prstGeom>
+          <a:noFill/>
+          <a:ln/>
+        </p:spPr>
+        <p:txBody>
+          <a:bodyPr wrap="square" lIns="0" tIns="0" rIns="0" bIns="0" rtlCol="0" anchor="ctr"/>
+          <a:lstStyle/>
+          <a:p>
+            <a:pPr algn="r" indent="0" marL="0">
+              <a:buNone/>
+            </a:pPr>
+            <a:r>
+              <a:rPr lang="en-US" sz="1400" b="1" dirty="0">
+                <a:solidFill>
+                  <a:srgbClr val="1C3F6E"/>
+                </a:solidFill>
+                <a:latin typeface="Calibri" pitchFamily="34" charset="0"/>
+                <a:ea typeface="Calibri" pitchFamily="34" charset="-122"/>
+                <a:cs typeface="Calibri" pitchFamily="34" charset="-120"/>
+              </a:rPr>
               <a:t>BILINGUAL GAME</a:t>
             </a:r>
             <a:endParaRPr lang="en-US" sz="1400" dirty="0"/>
@@ -14821,7 +19033,7 @@
       </p:sp>
       <p:graphicFrame>
         <p:nvGraphicFramePr>
-          <p:cNvPr id="42" name="Table 0"/>
+          <p:cNvPr id="53" name="Table 0"/>
           <p:cNvGraphicFramePr>
             <a:graphicFrameLocks noGrp="1"/>
           </p:cNvGraphicFramePr>
@@ -16133,7 +20345,7 @@
             <a:pPr algn="ctr"/>
             <a:fld id="{F7021451-1387-4CA6-816F-3879F97B5CBC}" type="slidenum">
               <a:rPr b="1" lang="en-US"/>
-              <a:t>41</a:t>
+              <a:t>52</a:t>
             </a:fld>
             <a:endParaRPr lang="en-US"/>
           </a:p>
@@ -16147,9 +20359,9 @@
 </p:sld>
 </file>
 
-<file path=ppt/slides/slide42.xml><?xml version="1.0" encoding="utf-8"?>
+<file path=ppt/slides/slide53.xml><?xml version="1.0" encoding="utf-8"?>
 <p:sld xmlns:a="http://schemas.openxmlformats.org/drawingml/2006/main" xmlns:r="http://schemas.openxmlformats.org/officeDocument/2006/relationships" xmlns:p="http://schemas.openxmlformats.org/presentationml/2006/main">
-  <p:cSld name="Slide 42">
+  <p:cSld name="Slide 53">
     <p:spTree>
       <p:nvGrpSpPr>
         <p:cNvPr id="1" name=""/>
@@ -16244,7 +20456,7 @@
       </p:sp>
       <p:graphicFrame>
         <p:nvGraphicFramePr>
-          <p:cNvPr id="43" name="Table 0"/>
+          <p:cNvPr id="54" name="Table 0"/>
           <p:cNvGraphicFramePr>
             <a:graphicFrameLocks noGrp="1"/>
           </p:cNvGraphicFramePr>
@@ -16866,7 +21078,7 @@
             <a:pPr algn="ctr"/>
             <a:fld id="{F7021451-1387-4CA6-816F-3879F97B5CBC}" type="slidenum">
               <a:rPr b="1" lang="en-US"/>
-              <a:t>42</a:t>
+              <a:t>53</a:t>
             </a:fld>
             <a:endParaRPr lang="en-US"/>
           </a:p>
@@ -16880,9 +21092,9 @@
 </p:sld>
 </file>
 
-<file path=ppt/slides/slide43.xml><?xml version="1.0" encoding="utf-8"?>
+<file path=ppt/slides/slide54.xml><?xml version="1.0" encoding="utf-8"?>
 <p:sld xmlns:a="http://schemas.openxmlformats.org/drawingml/2006/main" xmlns:r="http://schemas.openxmlformats.org/officeDocument/2006/relationships" xmlns:p="http://schemas.openxmlformats.org/presentationml/2006/main">
-  <p:cSld name="Slide 43">
+  <p:cSld name="Slide 54">
     <p:spTree>
       <p:nvGrpSpPr>
         <p:cNvPr id="1" name=""/>
@@ -16977,7 +21189,7 @@
       </p:sp>
       <p:graphicFrame>
         <p:nvGraphicFramePr>
-          <p:cNvPr id="44" name="Table 0"/>
+          <p:cNvPr id="55" name="Table 0"/>
           <p:cNvGraphicFramePr>
             <a:graphicFrameLocks noGrp="1"/>
           </p:cNvGraphicFramePr>
@@ -17087,7 +21299,7 @@
                           <a:ea typeface="Calibri" pitchFamily="34" charset="-122"/>
                           <a:cs typeface="Calibri" pitchFamily="34" charset="-120"/>
                         </a:rPr>
-                        <a:t>Atmospheric Humidity; Wind; Pressure and Sunshine.</a:t>
+                        <a:t>DEFINITIONS; Atmospheric Humidity; Wind Direction; Wind Speed; Atmospheric Pressure; Amount of Sunshine.</a:t>
                       </a:r>
                       <a:endParaRPr lang="en-US" sz="1600" dirty="0">
                         <a:latin typeface="Calibri" charset="0"/>
@@ -17737,7 +21949,7 @@
             <a:pPr algn="ctr"/>
             <a:fld id="{F7021451-1387-4CA6-816F-3879F97B5CBC}" type="slidenum">
               <a:rPr b="1" lang="en-US"/>
-              <a:t>43</a:t>
+              <a:t>54</a:t>
             </a:fld>
             <a:endParaRPr lang="en-US"/>
           </a:p>
@@ -17751,9 +21963,9 @@
 </p:sld>
 </file>
 
-<file path=ppt/slides/slide44.xml><?xml version="1.0" encoding="utf-8"?>
+<file path=ppt/slides/slide55.xml><?xml version="1.0" encoding="utf-8"?>
 <p:sld xmlns:a="http://schemas.openxmlformats.org/drawingml/2006/main" xmlns:r="http://schemas.openxmlformats.org/officeDocument/2006/relationships" xmlns:p="http://schemas.openxmlformats.org/presentationml/2006/main">
-  <p:cSld name="Slide 44">
+  <p:cSld name="Slide 55">
     <p:spTree>
       <p:nvGrpSpPr>
         <p:cNvPr id="1" name=""/>
@@ -17930,7 +22142,7 @@
                 <a:ea typeface="Calibri" pitchFamily="34" charset="-122"/>
                 <a:cs typeface="Calibri" pitchFamily="34" charset="-120"/>
               </a:rPr>
-              <a:t>Without the projector (Activity 1): use the situation of Hadja.</a:t>
+              <a:t>Without the projector (Activity 1): compare drying in August and January.</a:t>
             </a:r>
             <a:endParaRPr lang="en-US" sz="2000" dirty="0"/>
           </a:p>
@@ -17951,7 +22163,7 @@
                 <a:ea typeface="Calibri" pitchFamily="34" charset="-122"/>
                 <a:cs typeface="Calibri" pitchFamily="34" charset="-120"/>
               </a:rPr>
-              <a:t>Without the projector (Activity 2): hold a piece of cloth in the wind.</a:t>
+              <a:t>Without the projector (Activity 2): hang a piece of cloth on a stick.</a:t>
             </a:r>
             <a:endParaRPr lang="en-US" sz="2000" dirty="0"/>
           </a:p>
@@ -17972,7 +22184,7 @@
                 <a:ea typeface="Calibri" pitchFamily="34" charset="-122"/>
                 <a:cs typeface="Calibri" pitchFamily="34" charset="-120"/>
               </a:rPr>
-              <a:t>Without the projector (Activity 3): explain that air has weight.</a:t>
+              <a:t>Without the projector (Activity 3): explain that low pressure brings rain.</a:t>
             </a:r>
             <a:endParaRPr lang="en-US" sz="2000" dirty="0"/>
           </a:p>
@@ -18020,7 +22232,7 @@
             <a:pPr algn="ctr"/>
             <a:fld id="{F7021451-1387-4CA6-816F-3879F97B5CBC}" type="slidenum">
               <a:rPr b="1" lang="en-US"/>
-              <a:t>44</a:t>
+              <a:t>55</a:t>
             </a:fld>
             <a:endParaRPr lang="en-US"/>
           </a:p>
@@ -18034,9 +22246,9 @@
 </p:sld>
 </file>
 
-<file path=ppt/slides/slide45.xml><?xml version="1.0" encoding="utf-8"?>
+<file path=ppt/slides/slide56.xml><?xml version="1.0" encoding="utf-8"?>
 <p:sld xmlns:a="http://schemas.openxmlformats.org/drawingml/2006/main" xmlns:r="http://schemas.openxmlformats.org/officeDocument/2006/relationships" xmlns:p="http://schemas.openxmlformats.org/presentationml/2006/main">
-  <p:cSld name="Slide 45">
+  <p:cSld name="Slide 56">
     <p:spTree>
       <p:nvGrpSpPr>
         <p:cNvPr id="1" name=""/>
@@ -18107,7 +22319,7 @@
         <p:spPr>
           <a:xfrm>
             <a:off x="0" y="658368"/>
-            <a:ext cx="3840480" cy="5833872"/>
+            <a:ext cx="2468880" cy="5833872"/>
           </a:xfrm>
           <a:prstGeom prst="rect">
             <a:avLst/>
@@ -18122,8 +22334,8 @@
         </p:nvSpPr>
         <p:spPr>
           <a:xfrm>
-            <a:off x="4069080" y="1005840"/>
-            <a:ext cx="7802575" cy="731520"/>
+            <a:off x="2697480" y="1005840"/>
+            <a:ext cx="9174175" cy="731520"/>
           </a:xfrm>
           <a:prstGeom prst="rect">
             <a:avLst/>
@@ -18163,8 +22375,8 @@
         </p:nvSpPr>
         <p:spPr>
           <a:xfrm>
-            <a:off x="4069080" y="1783080"/>
-            <a:ext cx="7802575" cy="4663440"/>
+            <a:off x="2697480" y="1783080"/>
+            <a:ext cx="9174175" cy="4663440"/>
           </a:xfrm>
           <a:prstGeom prst="rect">
             <a:avLst/>
@@ -18297,7 +22509,7 @@
                 <a:ea typeface="Calibri" pitchFamily="34" charset="-122"/>
                 <a:cs typeface="Calibri" pitchFamily="34" charset="-120"/>
               </a:rPr>
-              <a:t>Diagrams and animations: drawn for this lesson (Geography Department).</a:t>
+              <a:t>Photo, board summary (Instrument): “Sling hydrometer used on 1953 Mount Everest expedition” by G H Zeal Limited, CC BY-NC-SA 4.0, via sciencemuseum (https://collection.sciencemuseumgroup.org.uk/objects/co8593941/sling-hydrometer-used-on-1953-mount-everest-expedition)</a:t>
             </a:r>
             <a:endParaRPr lang="en-US" sz="1800" dirty="0"/>
           </a:p>
@@ -18345,7 +22557,7 @@
             <a:pPr algn="ctr"/>
             <a:fld id="{F7021451-1387-4CA6-816F-3879F97B5CBC}" type="slidenum">
               <a:rPr b="1" lang="en-US"/>
-              <a:t>45</a:t>
+              <a:t>56</a:t>
             </a:fld>
             <a:endParaRPr lang="en-US"/>
           </a:p>
@@ -18359,9 +22571,9 @@
 </p:sld>
 </file>
 
-<file path=ppt/slides/slide5.xml><?xml version="1.0" encoding="utf-8"?>
+<file path=ppt/slides/slide57.xml><?xml version="1.0" encoding="utf-8"?>
 <p:sld xmlns:a="http://schemas.openxmlformats.org/drawingml/2006/main" xmlns:r="http://schemas.openxmlformats.org/officeDocument/2006/relationships" xmlns:p="http://schemas.openxmlformats.org/presentationml/2006/main">
-  <p:cSld name="Slide 5">
+  <p:cSld name="Slide 57">
     <p:spTree>
       <p:nvGrpSpPr>
         <p:cNvPr id="1" name=""/>
@@ -18409,7 +22621,7 @@
                 <a:ea typeface="Calibri" pitchFamily="34" charset="-122"/>
                 <a:cs typeface="Calibri" pitchFamily="34" charset="-120"/>
               </a:rPr>
-              <a:t>HOMEWORK CORRECTION</a:t>
+              <a:t>REFERENCES</a:t>
             </a:r>
             <a:endParaRPr lang="en-US" sz="1400" dirty="0"/>
           </a:p>
@@ -18474,7 +22686,7 @@
                 <a:ea typeface="Times New Roman" pitchFamily="34" charset="-122"/>
                 <a:cs typeface="Times New Roman" pitchFamily="34" charset="-120"/>
               </a:rPr>
-              <a:t>Correction: Possible Answer</a:t>
+              <a:t>References (continued)</a:t>
             </a:r>
             <a:endParaRPr lang="en-US" sz="3600" dirty="0"/>
           </a:p>
@@ -18501,24 +22713,46 @@
           <a:bodyPr wrap="square" lIns="0" tIns="0" rIns="0" bIns="0" rtlCol="0" anchor="t"/>
           <a:lstStyle/>
           <a:p>
-            <a:pPr algn="l" indent="0" marL="0">
+            <a:pPr algn="l" marL="342900" indent="-342900">
               <a:spcAft>
                 <a:spcPts val="800"/>
               </a:spcAft>
-              <a:buNone/>
+              <a:buSzPct val="100000"/>
+              <a:buChar char="•"/>
             </a:pPr>
             <a:r>
-              <a:rPr lang="en-US" sz="4000" dirty="0">
+              <a:rPr lang="en-US" sz="1800" dirty="0">
                 <a:solidFill>
                   <a:srgbClr val="111111"/>
                 </a:solidFill>
-                <a:latin typeface="Times New Roman" pitchFamily="34" charset="0"/>
-                <a:ea typeface="Times New Roman" pitchFamily="34" charset="-122"/>
-                <a:cs typeface="Times New Roman" pitchFamily="34" charset="-120"/>
+                <a:latin typeface="Calibri" pitchFamily="34" charset="0"/>
+                <a:ea typeface="Calibri" pitchFamily="34" charset="-122"/>
+                <a:cs typeface="Calibri" pitchFamily="34" charset="-120"/>
               </a:rPr>
-              <a:t>The cloth dries faster in the afternoon because the air is hotter and drier (lower humidity), so water evaporates faster.</a:t>
-            </a:r>
-            <a:endParaRPr lang="en-US" sz="4000" dirty="0"/>
+              <a:t>Photo, board summary (Anemometer): “3-cup anemometer installed at Thomas More College measures horizontal ” by FondriestEnv, CC BY-NC 2.0, via Flickr (https://www.flickr.com/photos/67593579@N07/6334536635)</a:t>
+            </a:r>
+            <a:endParaRPr lang="en-US" sz="1800" dirty="0"/>
+          </a:p>
+          <a:p>
+            <a:pPr algn="l" marL="342900" indent="-342900">
+              <a:spcAft>
+                <a:spcPts val="800"/>
+              </a:spcAft>
+              <a:buSzPct val="100000"/>
+              <a:buChar char="•"/>
+            </a:pPr>
+            <a:r>
+              <a:rPr lang="en-US" sz="1800" dirty="0">
+                <a:solidFill>
+                  <a:srgbClr val="111111"/>
+                </a:solidFill>
+                <a:latin typeface="Calibri" pitchFamily="34" charset="0"/>
+                <a:ea typeface="Calibri" pitchFamily="34" charset="-122"/>
+                <a:cs typeface="Calibri" pitchFamily="34" charset="-120"/>
+              </a:rPr>
+              <a:t>Diagrams and animations: drawn for this lesson (Geography Department).</a:t>
+            </a:r>
+            <a:endParaRPr lang="en-US" sz="1800" dirty="0"/>
           </a:p>
         </p:txBody>
       </p:sp>
@@ -18564,7 +22798,7 @@
             <a:pPr algn="ctr"/>
             <a:fld id="{F7021451-1387-4CA6-816F-3879F97B5CBC}" type="slidenum">
               <a:rPr b="1" lang="en-US"/>
-              <a:t>5</a:t>
+              <a:t>57</a:t>
             </a:fld>
             <a:endParaRPr lang="en-US"/>
           </a:p>

--- a/lecons/F3/37_FORM4_LESSON33_Other_Weather_Elements.pptx
+++ b/lecons/F3/37_FORM4_LESSON33_Other_Weather_Elements.pptx
@@ -3462,7 +3462,7 @@
           <a:p>
             <a:r>
               <a:rPr lang="en-US" dirty="0"/>
-              <a:t>Before we start the new lesson, let us correct the homework I gave you at the end of Lesson 32: Weather Elements: Atmospheric Temperatures. The question was: Wet a piece of cloth and hang it outside in the morning and in the afternoon. Note how long it takes to dry each time. Take out your exercise books.</a:t>
+              <a:t>Before we start the new lesson, let us correct the homework I gave you at the end of Lesson 32: Weather Elements: Atmospheric Temperatures. The question was: Name the instrument that measures air pressure. Take out your exercise books.</a:t>
             </a:r>
             <a:endParaRPr lang="en-US" dirty="0"/>
           </a:p>
@@ -4430,7 +4430,7 @@
           <a:p>
             <a:r>
               <a:rPr lang="en-US" dirty="0"/>
-              <a:t>Here is a good answer. The cloth dries faster in the afternoon because the air is hotter and drier (lower humidity), so water evaporates faster. Compare it with your own answer and correct your work in red.</a:t>
+              <a:t>Here is a good answer. The barometer. Compare it with your own answer and correct your work in red.</a:t>
             </a:r>
             <a:endParaRPr lang="en-US" dirty="0"/>
           </a:p>
@@ -4518,7 +4518,7 @@
           <a:p>
             <a:r>
               <a:rPr lang="en-US" dirty="0"/>
-              <a:t>For your homework: Early tomorrow morning, look at the grass, leaves or cars near your house. Write down whether you see drops of water on them, and where you think the water came from. We shall correct it at the beginning of our next lesson.</a:t>
+              <a:t>For your homework: Define condensation. We shall correct it at the beginning of our next lesson.</a:t>
             </a:r>
             <a:endParaRPr lang="en-US" dirty="0"/>
           </a:p>
@@ -15562,7 +15562,7 @@
         <p:spPr>
           <a:xfrm>
             <a:off x="0" y="658368"/>
-            <a:ext cx="3840480" cy="5833872"/>
+            <a:ext cx="5120640" cy="5833872"/>
           </a:xfrm>
           <a:prstGeom prst="rect">
             <a:avLst/>
@@ -15577,8 +15577,8 @@
         </p:nvSpPr>
         <p:spPr>
           <a:xfrm>
-            <a:off x="4069080" y="1005840"/>
-            <a:ext cx="7802575" cy="731520"/>
+            <a:off x="5349240" y="1005840"/>
+            <a:ext cx="6522415" cy="731520"/>
           </a:xfrm>
           <a:prstGeom prst="rect">
             <a:avLst/>
@@ -15618,8 +15618,8 @@
         </p:nvSpPr>
         <p:spPr>
           <a:xfrm>
-            <a:off x="4069080" y="1783080"/>
-            <a:ext cx="7802575" cy="4663440"/>
+            <a:off x="5349240" y="1783080"/>
+            <a:ext cx="6522415" cy="4663440"/>
           </a:xfrm>
           <a:prstGeom prst="rect">
             <a:avLst/>
@@ -15666,7 +15666,7 @@
                 <a:ea typeface="Times New Roman" pitchFamily="34" charset="-122"/>
                 <a:cs typeface="Times New Roman" pitchFamily="34" charset="-120"/>
               </a:rPr>
-              <a:t>Wet a piece of cloth and hang it outside in the morning and in the afternoon. Note how long it takes to dry each time.</a:t>
+              <a:t>Name the instrument that measures air pressure.</a:t>
             </a:r>
             <a:endParaRPr lang="en-US" sz="4000" dirty="0"/>
           </a:p>
@@ -18416,7 +18416,7 @@
                 <a:ea typeface="Times New Roman" pitchFamily="34" charset="-122"/>
                 <a:cs typeface="Times New Roman" pitchFamily="34" charset="-120"/>
               </a:rPr>
-              <a:t>The cloth dries faster in the afternoon because the air is hotter and drier (lower humidity), so water evaporates faster.</a:t>
+              <a:t>The barometer.</a:t>
             </a:r>
             <a:endParaRPr lang="en-US" sz="4000" dirty="0"/>
           </a:p>
@@ -18635,7 +18635,7 @@
                 <a:ea typeface="Times New Roman" pitchFamily="34" charset="-122"/>
                 <a:cs typeface="Times New Roman" pitchFamily="34" charset="-120"/>
               </a:rPr>
-              <a:t>Early tomorrow morning, look at the grass, leaves or cars near your house. Write down whether you see drops of water on them, and where you think the water came from.</a:t>
+              <a:t>Define condensation.</a:t>
             </a:r>
             <a:endParaRPr lang="en-US" sz="4000" dirty="0"/>
           </a:p>
@@ -21575,7 +21575,7 @@
                           <a:ea typeface="Calibri" pitchFamily="34" charset="-122"/>
                           <a:cs typeface="Calibri" pitchFamily="34" charset="-120"/>
                         </a:rPr>
-                        <a:t>Early tomorrow morning, look at the grass, leaves or cars near your house. Write down whether you see drops of water on them, and where you think the water came from.</a:t>
+                        <a:t>Define condensation.</a:t>
                       </a:r>
                       <a:endParaRPr lang="en-US" sz="1600" dirty="0">
                         <a:latin typeface="Calibri" charset="0"/>
